--- a/files/ccjs418e_fall2026/lecture_1.pptx
+++ b/files/ccjs418e_fall2026/lecture_1.pptx
@@ -5,36 +5,35 @@
     <p:sldMasterId id="2147483648" r:id="rId1"/>
   </p:sldMasterIdLst>
   <p:notesMasterIdLst>
-    <p:notesMasterId r:id="rId29"/>
+    <p:notesMasterId r:id="rId26"/>
   </p:notesMasterIdLst>
   <p:sldIdLst>
-    <p:sldId id="256" r:id="rId7"/>
-    <p:sldId id="257" r:id="rId8"/>
-    <p:sldId id="258" r:id="rId9"/>
-    <p:sldId id="259" r:id="rId10"/>
-    <p:sldId id="260" r:id="rId11"/>
-    <p:sldId id="261" r:id="rId12"/>
-    <p:sldId id="262" r:id="rId13"/>
-    <p:sldId id="263" r:id="rId14"/>
-    <p:sldId id="264" r:id="rId15"/>
-    <p:sldId id="265" r:id="rId16"/>
-    <p:sldId id="266" r:id="rId17"/>
-    <p:sldId id="267" r:id="rId18"/>
-    <p:sldId id="268" r:id="rId19"/>
-    <p:sldId id="269" r:id="rId20"/>
-    <p:sldId id="270" r:id="rId21"/>
-    <p:sldId id="271" r:id="rId22"/>
-    <p:sldId id="272" r:id="rId23"/>
-    <p:sldId id="273" r:id="rId24"/>
-    <p:sldId id="274" r:id="rId25"/>
-    <p:sldId id="275" r:id="rId26"/>
-    <p:sldId id="276" r:id="rId27"/>
-    <p:sldId id="277" r:id="rId28"/>
-    <p:sldId id="278" r:id="rId6"/>
-    <p:sldId id="279" r:id="rId5"/>
-    <p:sldId id="280" r:id="rId4"/>
+    <p:sldId id="256" r:id="rId2"/>
+    <p:sldId id="257" r:id="rId3"/>
+    <p:sldId id="258" r:id="rId4"/>
+    <p:sldId id="259" r:id="rId5"/>
+    <p:sldId id="260" r:id="rId6"/>
+    <p:sldId id="261" r:id="rId7"/>
+    <p:sldId id="262" r:id="rId8"/>
+    <p:sldId id="263" r:id="rId9"/>
+    <p:sldId id="264" r:id="rId10"/>
+    <p:sldId id="265" r:id="rId11"/>
+    <p:sldId id="266" r:id="rId12"/>
+    <p:sldId id="267" r:id="rId13"/>
+    <p:sldId id="268" r:id="rId14"/>
+    <p:sldId id="269" r:id="rId15"/>
+    <p:sldId id="270" r:id="rId16"/>
+    <p:sldId id="271" r:id="rId17"/>
+    <p:sldId id="272" r:id="rId18"/>
+    <p:sldId id="273" r:id="rId19"/>
+    <p:sldId id="274" r:id="rId20"/>
+    <p:sldId id="275" r:id="rId21"/>
+    <p:sldId id="276" r:id="rId22"/>
+    <p:sldId id="277" r:id="rId23"/>
+    <p:sldId id="278" r:id="rId24"/>
+    <p:sldId id="279" r:id="rId25"/>
   </p:sldIdLst>
-  <p:sldSz cx="12191999" cy="6858000"/>
+  <p:sldSz cx="12192000" cy="6858000"/>
   <p:notesSz cx="6858000" cy="9144000"/>
   <p:defaultTextStyle>
     <a:defPPr>
@@ -140,11 +139,15 @@
 </file>
 
 <file path=ppt/charts/chart1.xml><?xml version="1.0" encoding="utf-8"?>
-<c:chartSpace xmlns:c="http://schemas.openxmlformats.org/drawingml/2006/chart" xmlns:a="http://schemas.openxmlformats.org/drawingml/2006/main" xmlns:r="http://schemas.openxmlformats.org/officeDocument/2006/relationships">
+<c:chartSpace xmlns:c="http://schemas.openxmlformats.org/drawingml/2006/chart" xmlns:a="http://schemas.openxmlformats.org/drawingml/2006/main" xmlns:r="http://schemas.openxmlformats.org/officeDocument/2006/relationships" xmlns:c16r2="http://schemas.microsoft.com/office/drawing/2015/06/chart">
   <c:date1904 val="0"/>
+  <c:lang val="en-US"/>
+  <c:roundedCorners val="1"/>
+  <c:style val="2"/>
   <c:chart>
     <c:autoTitleDeleted val="0"/>
     <c:plotArea>
+      <c:layout/>
       <c:lineChart>
         <c:grouping val="standard"/>
         <c:varyColors val="0"/>
@@ -262,7 +265,7 @@
                   <c:v>97.79</c:v>
                 </c:pt>
                 <c:pt idx="5">
-                  <c:v>100.0</c:v>
+                  <c:v>100</c:v>
                 </c:pt>
                 <c:pt idx="6">
                   <c:v>99.25</c:v>
@@ -310,6 +313,11 @@
             </c:numRef>
           </c:val>
           <c:smooth val="0"/>
+          <c:extLst>
+            <c:ext xmlns:c16="http://schemas.microsoft.com/office/drawing/2014/chart" uri="{C3380CC4-5D6E-409C-BE32-E72D297353CC}">
+              <c16:uniqueId val="{00000000-CA03-44AD-BBDA-524646D405A5}"/>
+            </c:ext>
+          </c:extLst>
         </c:ser>
         <c:ser>
           <c:idx val="1"/>
@@ -416,7 +424,7 @@
                   <c:v>93.23</c:v>
                 </c:pt>
                 <c:pt idx="2">
-                  <c:v>95.0</c:v>
+                  <c:v>95</c:v>
                 </c:pt>
                 <c:pt idx="3">
                   <c:v>96.33</c:v>
@@ -425,13 +433,13 @@
                   <c:v>97.92</c:v>
                 </c:pt>
                 <c:pt idx="5">
-                  <c:v>100.0</c:v>
+                  <c:v>100</c:v>
                 </c:pt>
                 <c:pt idx="6">
                   <c:v>101.2</c:v>
                 </c:pt>
                 <c:pt idx="7">
-                  <c:v>102.0</c:v>
+                  <c:v>102</c:v>
                 </c:pt>
                 <c:pt idx="8">
                   <c:v>102.6</c:v>
@@ -473,8 +481,20 @@
             </c:numRef>
           </c:val>
           <c:smooth val="0"/>
+          <c:extLst>
+            <c:ext xmlns:c16="http://schemas.microsoft.com/office/drawing/2014/chart" uri="{C3380CC4-5D6E-409C-BE32-E72D297353CC}">
+              <c16:uniqueId val="{00000001-CA03-44AD-BBDA-524646D405A5}"/>
+            </c:ext>
+          </c:extLst>
         </c:ser>
-        <c:marker val="1"/>
+        <c:dLbls>
+          <c:showLegendKey val="0"/>
+          <c:showVal val="0"/>
+          <c:showCatName val="0"/>
+          <c:showSerName val="0"/>
+          <c:showPercent val="0"/>
+          <c:showBubbleSize val="0"/>
+        </c:dLbls>
         <c:smooth val="0"/>
         <c:axId val="2118791784"/>
         <c:axId val="2140495176"/>
@@ -486,6 +506,7 @@
         </c:scaling>
         <c:delete val="0"/>
         <c:axPos val="b"/>
+        <c:numFmt formatCode="General" sourceLinked="0"/>
         <c:majorTickMark val="out"/>
         <c:minorTickMark val="none"/>
         <c:tickLblPos val="nextTo"/>
@@ -498,6 +519,7 @@
                 <a:latin typeface="Cambria"/>
               </a:defRPr>
             </a:pPr>
+            <a:endParaRPr lang="en-US"/>
           </a:p>
         </c:txPr>
         <c:crossAx val="2140495176"/>
@@ -510,12 +532,14 @@
       <c:valAx>
         <c:axId val="2140495176"/>
         <c:scaling>
-          <c:max val="120.0"/>
-          <c:min val="75.0"/>
+          <c:orientation val="minMax"/>
+          <c:max val="120"/>
+          <c:min val="75"/>
         </c:scaling>
         <c:delete val="0"/>
         <c:axPos val="l"/>
         <c:majorGridlines/>
+        <c:numFmt formatCode="General" sourceLinked="1"/>
         <c:majorTickMark val="out"/>
         <c:minorTickMark val="none"/>
         <c:tickLblPos val="nextTo"/>
@@ -528,16 +552,17 @@
                 <a:latin typeface="Cambria"/>
               </a:defRPr>
             </a:pPr>
+            <a:endParaRPr lang="en-US"/>
           </a:p>
         </c:txPr>
         <c:crossAx val="2118791784"/>
         <c:crosses val="autoZero"/>
-        <c:majorUnit val="10.0"/>
+        <c:crossBetween val="between"/>
+        <c:majorUnit val="10"/>
       </c:valAx>
     </c:plotArea>
     <c:legend>
       <c:legendPos val="b"/>
-      <c:layout/>
       <c:overlay val="0"/>
       <c:txPr>
         <a:bodyPr/>
@@ -548,6 +573,7 @@
               <a:latin typeface="Cambria"/>
             </a:defRPr>
           </a:pPr>
+          <a:endParaRPr lang="en-US"/>
         </a:p>
       </c:txPr>
     </c:legend>
@@ -572,11 +598,15 @@
 </file>
 
 <file path=ppt/charts/chart2.xml><?xml version="1.0" encoding="utf-8"?>
-<c:chartSpace xmlns:c="http://schemas.openxmlformats.org/drawingml/2006/chart" xmlns:a="http://schemas.openxmlformats.org/drawingml/2006/main" xmlns:r="http://schemas.openxmlformats.org/officeDocument/2006/relationships">
+<c:chartSpace xmlns:c="http://schemas.openxmlformats.org/drawingml/2006/chart" xmlns:a="http://schemas.openxmlformats.org/drawingml/2006/main" xmlns:r="http://schemas.openxmlformats.org/officeDocument/2006/relationships" xmlns:c16r2="http://schemas.microsoft.com/office/drawing/2015/06/chart">
   <c:date1904 val="0"/>
+  <c:lang val="en-US"/>
+  <c:roundedCorners val="1"/>
+  <c:style val="2"/>
   <c:chart>
     <c:autoTitleDeleted val="0"/>
     <c:plotArea>
+      <c:layout/>
       <c:lineChart>
         <c:grouping val="standard"/>
         <c:varyColors val="0"/>
@@ -694,7 +724,7 @@
                   <c:v>97.68</c:v>
                 </c:pt>
                 <c:pt idx="5">
-                  <c:v>100.0</c:v>
+                  <c:v>100</c:v>
                 </c:pt>
                 <c:pt idx="6">
                   <c:v>102.8</c:v>
@@ -742,6 +772,11 @@
             </c:numRef>
           </c:val>
           <c:smooth val="0"/>
+          <c:extLst>
+            <c:ext xmlns:c16="http://schemas.microsoft.com/office/drawing/2014/chart" uri="{C3380CC4-5D6E-409C-BE32-E72D297353CC}">
+              <c16:uniqueId val="{00000000-ECBC-41B3-9CF4-C96D94533822}"/>
+            </c:ext>
+          </c:extLst>
         </c:ser>
         <c:ser>
           <c:idx val="1"/>
@@ -857,7 +892,7 @@
                   <c:v>96.35</c:v>
                 </c:pt>
                 <c:pt idx="5">
-                  <c:v>100.0</c:v>
+                  <c:v>100</c:v>
                 </c:pt>
                 <c:pt idx="6">
                   <c:v>102.9</c:v>
@@ -887,7 +922,7 @@
                   <c:v>112.3</c:v>
                 </c:pt>
                 <c:pt idx="15">
-                  <c:v>114.0</c:v>
+                  <c:v>114</c:v>
                 </c:pt>
                 <c:pt idx="16">
                   <c:v>113.9</c:v>
@@ -905,6 +940,11 @@
             </c:numRef>
           </c:val>
           <c:smooth val="0"/>
+          <c:extLst>
+            <c:ext xmlns:c16="http://schemas.microsoft.com/office/drawing/2014/chart" uri="{C3380CC4-5D6E-409C-BE32-E72D297353CC}">
+              <c16:uniqueId val="{00000001-ECBC-41B3-9CF4-C96D94533822}"/>
+            </c:ext>
+          </c:extLst>
         </c:ser>
         <c:ser>
           <c:idx val="2"/>
@@ -1014,13 +1054,13 @@
                   <c:v>91.27</c:v>
                 </c:pt>
                 <c:pt idx="3">
-                  <c:v>89.25999999999999</c:v>
+                  <c:v>89.259999999999991</c:v>
                 </c:pt>
                 <c:pt idx="4">
                   <c:v>92.62</c:v>
                 </c:pt>
                 <c:pt idx="5">
-                  <c:v>100.0</c:v>
+                  <c:v>100</c:v>
                 </c:pt>
                 <c:pt idx="6">
                   <c:v>100.5</c:v>
@@ -1056,7 +1096,7 @@
                   <c:v>106.1</c:v>
                 </c:pt>
                 <c:pt idx="17">
-                  <c:v>110.0</c:v>
+                  <c:v>110</c:v>
                 </c:pt>
                 <c:pt idx="18">
                   <c:v>107.2</c:v>
@@ -1068,6 +1108,11 @@
             </c:numRef>
           </c:val>
           <c:smooth val="0"/>
+          <c:extLst>
+            <c:ext xmlns:c16="http://schemas.microsoft.com/office/drawing/2014/chart" uri="{C3380CC4-5D6E-409C-BE32-E72D297353CC}">
+              <c16:uniqueId val="{00000002-ECBC-41B3-9CF4-C96D94533822}"/>
+            </c:ext>
+          </c:extLst>
         </c:ser>
         <c:ser>
           <c:idx val="3"/>
@@ -1183,7 +1228,7 @@
                   <c:v>96.83</c:v>
                 </c:pt>
                 <c:pt idx="5">
-                  <c:v>100.0</c:v>
+                  <c:v>100</c:v>
                 </c:pt>
                 <c:pt idx="6">
                   <c:v>100.9</c:v>
@@ -1231,6 +1276,11 @@
             </c:numRef>
           </c:val>
           <c:smooth val="0"/>
+          <c:extLst>
+            <c:ext xmlns:c16="http://schemas.microsoft.com/office/drawing/2014/chart" uri="{C3380CC4-5D6E-409C-BE32-E72D297353CC}">
+              <c16:uniqueId val="{00000003-ECBC-41B3-9CF4-C96D94533822}"/>
+            </c:ext>
+          </c:extLst>
         </c:ser>
         <c:ser>
           <c:idx val="4"/>
@@ -1346,7 +1396,7 @@
                   <c:v>97.79</c:v>
                 </c:pt>
                 <c:pt idx="5">
-                  <c:v>100.0</c:v>
+                  <c:v>100</c:v>
                 </c:pt>
                 <c:pt idx="6">
                   <c:v>99.25</c:v>
@@ -1394,8 +1444,20 @@
             </c:numRef>
           </c:val>
           <c:smooth val="0"/>
+          <c:extLst>
+            <c:ext xmlns:c16="http://schemas.microsoft.com/office/drawing/2014/chart" uri="{C3380CC4-5D6E-409C-BE32-E72D297353CC}">
+              <c16:uniqueId val="{00000004-ECBC-41B3-9CF4-C96D94533822}"/>
+            </c:ext>
+          </c:extLst>
         </c:ser>
-        <c:marker val="1"/>
+        <c:dLbls>
+          <c:showLegendKey val="0"/>
+          <c:showVal val="0"/>
+          <c:showCatName val="0"/>
+          <c:showSerName val="0"/>
+          <c:showPercent val="0"/>
+          <c:showBubbleSize val="0"/>
+        </c:dLbls>
         <c:smooth val="0"/>
         <c:axId val="2118791784"/>
         <c:axId val="2140495176"/>
@@ -1407,6 +1469,7 @@
         </c:scaling>
         <c:delete val="0"/>
         <c:axPos val="b"/>
+        <c:numFmt formatCode="General" sourceLinked="0"/>
         <c:majorTickMark val="out"/>
         <c:minorTickMark val="none"/>
         <c:tickLblPos val="nextTo"/>
@@ -1419,6 +1482,7 @@
                 <a:latin typeface="Cambria"/>
               </a:defRPr>
             </a:pPr>
+            <a:endParaRPr lang="en-US"/>
           </a:p>
         </c:txPr>
         <c:crossAx val="2140495176"/>
@@ -1431,12 +1495,14 @@
       <c:valAx>
         <c:axId val="2140495176"/>
         <c:scaling>
-          <c:max val="120.0"/>
-          <c:min val="75.0"/>
+          <c:orientation val="minMax"/>
+          <c:max val="120"/>
+          <c:min val="75"/>
         </c:scaling>
         <c:delete val="0"/>
         <c:axPos val="l"/>
         <c:majorGridlines/>
+        <c:numFmt formatCode="General" sourceLinked="1"/>
         <c:majorTickMark val="out"/>
         <c:minorTickMark val="none"/>
         <c:tickLblPos val="nextTo"/>
@@ -1449,11 +1515,13 @@
                 <a:latin typeface="Cambria"/>
               </a:defRPr>
             </a:pPr>
+            <a:endParaRPr lang="en-US"/>
           </a:p>
         </c:txPr>
         <c:crossAx val="2118791784"/>
         <c:crosses val="autoZero"/>
-        <c:majorUnit val="20.0"/>
+        <c:crossBetween val="between"/>
+        <c:majorUnit val="20"/>
       </c:valAx>
     </c:plotArea>
     <c:plotVisOnly val="1"/>
@@ -1477,11 +1545,15 @@
 </file>
 
 <file path=ppt/charts/chart3.xml><?xml version="1.0" encoding="utf-8"?>
-<c:chartSpace xmlns:c="http://schemas.openxmlformats.org/drawingml/2006/chart" xmlns:a="http://schemas.openxmlformats.org/drawingml/2006/main" xmlns:r="http://schemas.openxmlformats.org/officeDocument/2006/relationships">
+<c:chartSpace xmlns:c="http://schemas.openxmlformats.org/drawingml/2006/chart" xmlns:a="http://schemas.openxmlformats.org/drawingml/2006/main" xmlns:r="http://schemas.openxmlformats.org/officeDocument/2006/relationships" xmlns:c16r2="http://schemas.microsoft.com/office/drawing/2015/06/chart">
   <c:date1904 val="0"/>
+  <c:lang val="en-US"/>
+  <c:roundedCorners val="1"/>
+  <c:style val="2"/>
   <c:chart>
     <c:autoTitleDeleted val="0"/>
     <c:plotArea>
+      <c:layout/>
       <c:lineChart>
         <c:grouping val="standard"/>
         <c:varyColors val="0"/>
@@ -1599,7 +1671,7 @@
                   <c:v>98.75</c:v>
                 </c:pt>
                 <c:pt idx="5">
-                  <c:v>100.0</c:v>
+                  <c:v>100</c:v>
                 </c:pt>
                 <c:pt idx="6">
                   <c:v>101.7</c:v>
@@ -1647,6 +1719,11 @@
             </c:numRef>
           </c:val>
           <c:smooth val="0"/>
+          <c:extLst>
+            <c:ext xmlns:c16="http://schemas.microsoft.com/office/drawing/2014/chart" uri="{C3380CC4-5D6E-409C-BE32-E72D297353CC}">
+              <c16:uniqueId val="{00000000-2C1A-471B-9D0B-B909F30A7092}"/>
+            </c:ext>
+          </c:extLst>
         </c:ser>
         <c:ser>
           <c:idx val="1"/>
@@ -1762,7 +1839,7 @@
                   <c:v>96.97</c:v>
                 </c:pt>
                 <c:pt idx="5">
-                  <c:v>100.0</c:v>
+                  <c:v>100</c:v>
                 </c:pt>
                 <c:pt idx="6">
                   <c:v>101.9</c:v>
@@ -1771,7 +1848,7 @@
                   <c:v>103.1</c:v>
                 </c:pt>
                 <c:pt idx="8">
-                  <c:v>103.0</c:v>
+                  <c:v>103</c:v>
                 </c:pt>
                 <c:pt idx="9">
                   <c:v>105.3</c:v>
@@ -1810,6 +1887,11 @@
             </c:numRef>
           </c:val>
           <c:smooth val="0"/>
+          <c:extLst>
+            <c:ext xmlns:c16="http://schemas.microsoft.com/office/drawing/2014/chart" uri="{C3380CC4-5D6E-409C-BE32-E72D297353CC}">
+              <c16:uniqueId val="{00000001-2C1A-471B-9D0B-B909F30A7092}"/>
+            </c:ext>
+          </c:extLst>
         </c:ser>
         <c:ser>
           <c:idx val="2"/>
@@ -1925,7 +2007,7 @@
                   <c:v>95.64</c:v>
                 </c:pt>
                 <c:pt idx="5">
-                  <c:v>100.0</c:v>
+                  <c:v>100</c:v>
                 </c:pt>
                 <c:pt idx="6">
                   <c:v>100.8</c:v>
@@ -1952,7 +2034,7 @@
                   <c:v>109.9</c:v>
                 </c:pt>
                 <c:pt idx="14">
-                  <c:v>108.0</c:v>
+                  <c:v>108</c:v>
                 </c:pt>
                 <c:pt idx="15">
                   <c:v>107.2</c:v>
@@ -1964,15 +2046,20 @@
                   <c:v>111.4</c:v>
                 </c:pt>
                 <c:pt idx="18">
-                  <c:v>110.0</c:v>
+                  <c:v>110</c:v>
                 </c:pt>
                 <c:pt idx="19">
-                  <c:v>110.0</c:v>
+                  <c:v>110</c:v>
                 </c:pt>
               </c:numCache>
             </c:numRef>
           </c:val>
           <c:smooth val="0"/>
+          <c:extLst>
+            <c:ext xmlns:c16="http://schemas.microsoft.com/office/drawing/2014/chart" uri="{C3380CC4-5D6E-409C-BE32-E72D297353CC}">
+              <c16:uniqueId val="{00000002-2C1A-471B-9D0B-B909F30A7092}"/>
+            </c:ext>
+          </c:extLst>
         </c:ser>
         <c:ser>
           <c:idx val="3"/>
@@ -2088,7 +2175,7 @@
                   <c:v>97.47</c:v>
                 </c:pt>
                 <c:pt idx="5">
-                  <c:v>100.0</c:v>
+                  <c:v>100</c:v>
                 </c:pt>
                 <c:pt idx="6">
                   <c:v>100.5</c:v>
@@ -2121,7 +2208,7 @@
                   <c:v>99.6</c:v>
                 </c:pt>
                 <c:pt idx="16">
-                  <c:v>99.0</c:v>
+                  <c:v>99</c:v>
                 </c:pt>
                 <c:pt idx="17">
                   <c:v>99.08</c:v>
@@ -2136,6 +2223,11 @@
             </c:numRef>
           </c:val>
           <c:smooth val="0"/>
+          <c:extLst>
+            <c:ext xmlns:c16="http://schemas.microsoft.com/office/drawing/2014/chart" uri="{C3380CC4-5D6E-409C-BE32-E72D297353CC}">
+              <c16:uniqueId val="{00000003-2C1A-471B-9D0B-B909F30A7092}"/>
+            </c:ext>
+          </c:extLst>
         </c:ser>
         <c:ser>
           <c:idx val="4"/>
@@ -2236,7 +2328,7 @@
                 <c:formatCode>General</c:formatCode>
                 <c:ptCount val="20"/>
                 <c:pt idx="0">
-                  <c:v>89.60000000000001</c:v>
+                  <c:v>89.600000000000009</c:v>
                 </c:pt>
                 <c:pt idx="1">
                   <c:v>92.51</c:v>
@@ -2251,7 +2343,7 @@
                   <c:v>97.9</c:v>
                 </c:pt>
                 <c:pt idx="5">
-                  <c:v>100.0</c:v>
+                  <c:v>100</c:v>
                 </c:pt>
                 <c:pt idx="6">
                   <c:v>100.2</c:v>
@@ -2299,8 +2391,20 @@
             </c:numRef>
           </c:val>
           <c:smooth val="0"/>
+          <c:extLst>
+            <c:ext xmlns:c16="http://schemas.microsoft.com/office/drawing/2014/chart" uri="{C3380CC4-5D6E-409C-BE32-E72D297353CC}">
+              <c16:uniqueId val="{00000004-2C1A-471B-9D0B-B909F30A7092}"/>
+            </c:ext>
+          </c:extLst>
         </c:ser>
-        <c:marker val="1"/>
+        <c:dLbls>
+          <c:showLegendKey val="0"/>
+          <c:showVal val="0"/>
+          <c:showCatName val="0"/>
+          <c:showSerName val="0"/>
+          <c:showPercent val="0"/>
+          <c:showBubbleSize val="0"/>
+        </c:dLbls>
         <c:smooth val="0"/>
         <c:axId val="2118791784"/>
         <c:axId val="2140495176"/>
@@ -2312,6 +2416,7 @@
         </c:scaling>
         <c:delete val="0"/>
         <c:axPos val="b"/>
+        <c:numFmt formatCode="General" sourceLinked="0"/>
         <c:majorTickMark val="out"/>
         <c:minorTickMark val="none"/>
         <c:tickLblPos val="nextTo"/>
@@ -2324,6 +2429,7 @@
                 <a:latin typeface="Cambria"/>
               </a:defRPr>
             </a:pPr>
+            <a:endParaRPr lang="en-US"/>
           </a:p>
         </c:txPr>
         <c:crossAx val="2140495176"/>
@@ -2336,12 +2442,14 @@
       <c:valAx>
         <c:axId val="2140495176"/>
         <c:scaling>
-          <c:max val="120.0"/>
-          <c:min val="75.0"/>
+          <c:orientation val="minMax"/>
+          <c:max val="120"/>
+          <c:min val="75"/>
         </c:scaling>
         <c:delete val="0"/>
         <c:axPos val="l"/>
         <c:majorGridlines/>
+        <c:numFmt formatCode="General" sourceLinked="1"/>
         <c:majorTickMark val="out"/>
         <c:minorTickMark val="none"/>
         <c:tickLblPos val="nextTo"/>
@@ -2354,11 +2462,13 @@
                 <a:latin typeface="Cambria"/>
               </a:defRPr>
             </a:pPr>
+            <a:endParaRPr lang="en-US"/>
           </a:p>
         </c:txPr>
         <c:crossAx val="2118791784"/>
         <c:crosses val="autoZero"/>
-        <c:majorUnit val="20.0"/>
+        <c:crossBetween val="between"/>
+        <c:majorUnit val="20"/>
       </c:valAx>
     </c:plotArea>
     <c:plotVisOnly val="1"/>
@@ -2382,11 +2492,15 @@
 </file>
 
 <file path=ppt/charts/chart4.xml><?xml version="1.0" encoding="utf-8"?>
-<c:chartSpace xmlns:c="http://schemas.openxmlformats.org/drawingml/2006/chart" xmlns:a="http://schemas.openxmlformats.org/drawingml/2006/main" xmlns:r="http://schemas.openxmlformats.org/officeDocument/2006/relationships">
+<c:chartSpace xmlns:c="http://schemas.openxmlformats.org/drawingml/2006/chart" xmlns:a="http://schemas.openxmlformats.org/drawingml/2006/main" xmlns:r="http://schemas.openxmlformats.org/officeDocument/2006/relationships" xmlns:c16r2="http://schemas.microsoft.com/office/drawing/2015/06/chart">
   <c:date1904 val="0"/>
+  <c:lang val="en-US"/>
+  <c:roundedCorners val="1"/>
+  <c:style val="2"/>
   <c:chart>
     <c:autoTitleDeleted val="0"/>
     <c:plotArea>
+      <c:layout/>
       <c:lineChart>
         <c:grouping val="standard"/>
         <c:varyColors val="0"/>
@@ -2504,7 +2618,7 @@
                   <c:v>97.38</c:v>
                 </c:pt>
                 <c:pt idx="5">
-                  <c:v>100.0</c:v>
+                  <c:v>100</c:v>
                 </c:pt>
                 <c:pt idx="6">
                   <c:v>102.5</c:v>
@@ -2531,7 +2645,7 @@
                   <c:v>109.9</c:v>
                 </c:pt>
                 <c:pt idx="14">
-                  <c:v>109.0</c:v>
+                  <c:v>109</c:v>
                 </c:pt>
                 <c:pt idx="15">
                   <c:v>107.8</c:v>
@@ -2552,6 +2666,11 @@
             </c:numRef>
           </c:val>
           <c:smooth val="0"/>
+          <c:extLst>
+            <c:ext xmlns:c16="http://schemas.microsoft.com/office/drawing/2014/chart" uri="{C3380CC4-5D6E-409C-BE32-E72D297353CC}">
+              <c16:uniqueId val="{00000000-2CE9-4F71-BD3A-C610834CDA9C}"/>
+            </c:ext>
+          </c:extLst>
         </c:ser>
         <c:ser>
           <c:idx val="1"/>
@@ -2664,10 +2783,10 @@
                   <c:v>94.33</c:v>
                 </c:pt>
                 <c:pt idx="4">
-                  <c:v>97.0</c:v>
+                  <c:v>97</c:v>
                 </c:pt>
                 <c:pt idx="5">
-                  <c:v>100.0</c:v>
+                  <c:v>100</c:v>
                 </c:pt>
                 <c:pt idx="6">
                   <c:v>102.3</c:v>
@@ -2682,13 +2801,13 @@
                   <c:v>106.1</c:v>
                 </c:pt>
                 <c:pt idx="10">
-                  <c:v>107.0</c:v>
+                  <c:v>107</c:v>
                 </c:pt>
                 <c:pt idx="11">
                   <c:v>108.5</c:v>
                 </c:pt>
                 <c:pt idx="12">
-                  <c:v>109.0</c:v>
+                  <c:v>109</c:v>
                 </c:pt>
                 <c:pt idx="13">
                   <c:v>110.6</c:v>
@@ -2715,6 +2834,11 @@
             </c:numRef>
           </c:val>
           <c:smooth val="0"/>
+          <c:extLst>
+            <c:ext xmlns:c16="http://schemas.microsoft.com/office/drawing/2014/chart" uri="{C3380CC4-5D6E-409C-BE32-E72D297353CC}">
+              <c16:uniqueId val="{00000001-2CE9-4F71-BD3A-C610834CDA9C}"/>
+            </c:ext>
+          </c:extLst>
         </c:ser>
         <c:ser>
           <c:idx val="2"/>
@@ -2815,7 +2939,7 @@
                 <c:formatCode>General</c:formatCode>
                 <c:ptCount val="20"/>
                 <c:pt idx="0">
-                  <c:v>86.0</c:v>
+                  <c:v>86</c:v>
                 </c:pt>
                 <c:pt idx="1">
                   <c:v>91.4</c:v>
@@ -2830,7 +2954,7 @@
                   <c:v>95.58</c:v>
                 </c:pt>
                 <c:pt idx="5">
-                  <c:v>100.0</c:v>
+                  <c:v>100</c:v>
                 </c:pt>
                 <c:pt idx="6">
                   <c:v>101.5</c:v>
@@ -2842,7 +2966,7 @@
                   <c:v>102.6</c:v>
                 </c:pt>
                 <c:pt idx="9">
-                  <c:v>107.0</c:v>
+                  <c:v>107</c:v>
                 </c:pt>
                 <c:pt idx="10">
                   <c:v>106.6</c:v>
@@ -2878,6 +3002,11 @@
             </c:numRef>
           </c:val>
           <c:smooth val="0"/>
+          <c:extLst>
+            <c:ext xmlns:c16="http://schemas.microsoft.com/office/drawing/2014/chart" uri="{C3380CC4-5D6E-409C-BE32-E72D297353CC}">
+              <c16:uniqueId val="{00000002-2CE9-4F71-BD3A-C610834CDA9C}"/>
+            </c:ext>
+          </c:extLst>
         </c:ser>
         <c:ser>
           <c:idx val="3"/>
@@ -2993,10 +3122,10 @@
                   <c:v>97.67</c:v>
                 </c:pt>
                 <c:pt idx="5">
-                  <c:v>100.0</c:v>
+                  <c:v>100</c:v>
                 </c:pt>
                 <c:pt idx="6">
-                  <c:v>101.0</c:v>
+                  <c:v>101</c:v>
                 </c:pt>
                 <c:pt idx="7">
                   <c:v>101.7</c:v>
@@ -3029,7 +3158,7 @@
                   <c:v>101.9</c:v>
                 </c:pt>
                 <c:pt idx="17">
-                  <c:v>102.0</c:v>
+                  <c:v>102</c:v>
                 </c:pt>
                 <c:pt idx="18">
                   <c:v>101.5</c:v>
@@ -3041,6 +3170,11 @@
             </c:numRef>
           </c:val>
           <c:smooth val="0"/>
+          <c:extLst>
+            <c:ext xmlns:c16="http://schemas.microsoft.com/office/drawing/2014/chart" uri="{C3380CC4-5D6E-409C-BE32-E72D297353CC}">
+              <c16:uniqueId val="{00000003-2CE9-4F71-BD3A-C610834CDA9C}"/>
+            </c:ext>
+          </c:extLst>
         </c:ser>
         <c:ser>
           <c:idx val="4"/>
@@ -3156,13 +3290,13 @@
                   <c:v>97.52</c:v>
                 </c:pt>
                 <c:pt idx="5">
-                  <c:v>100.0</c:v>
+                  <c:v>100</c:v>
                 </c:pt>
                 <c:pt idx="6">
-                  <c:v>101.0</c:v>
+                  <c:v>101</c:v>
                 </c:pt>
                 <c:pt idx="7">
-                  <c:v>102.0</c:v>
+                  <c:v>102</c:v>
                 </c:pt>
                 <c:pt idx="8">
                   <c:v>102.7</c:v>
@@ -3174,7 +3308,7 @@
                   <c:v>104.6</c:v>
                 </c:pt>
                 <c:pt idx="11">
-                  <c:v>105.0</c:v>
+                  <c:v>105</c:v>
                 </c:pt>
                 <c:pt idx="12">
                   <c:v>105.2</c:v>
@@ -3183,7 +3317,7 @@
                   <c:v>105.6</c:v>
                 </c:pt>
                 <c:pt idx="14">
-                  <c:v>105.0</c:v>
+                  <c:v>105</c:v>
                 </c:pt>
                 <c:pt idx="15">
                   <c:v>104.6</c:v>
@@ -3204,8 +3338,20 @@
             </c:numRef>
           </c:val>
           <c:smooth val="0"/>
+          <c:extLst>
+            <c:ext xmlns:c16="http://schemas.microsoft.com/office/drawing/2014/chart" uri="{C3380CC4-5D6E-409C-BE32-E72D297353CC}">
+              <c16:uniqueId val="{00000004-2CE9-4F71-BD3A-C610834CDA9C}"/>
+            </c:ext>
+          </c:extLst>
         </c:ser>
-        <c:marker val="1"/>
+        <c:dLbls>
+          <c:showLegendKey val="0"/>
+          <c:showVal val="0"/>
+          <c:showCatName val="0"/>
+          <c:showSerName val="0"/>
+          <c:showPercent val="0"/>
+          <c:showBubbleSize val="0"/>
+        </c:dLbls>
         <c:smooth val="0"/>
         <c:axId val="2118791784"/>
         <c:axId val="2140495176"/>
@@ -3217,6 +3363,7 @@
         </c:scaling>
         <c:delete val="0"/>
         <c:axPos val="b"/>
+        <c:numFmt formatCode="General" sourceLinked="0"/>
         <c:majorTickMark val="out"/>
         <c:minorTickMark val="none"/>
         <c:tickLblPos val="nextTo"/>
@@ -3229,6 +3376,7 @@
                 <a:latin typeface="Cambria"/>
               </a:defRPr>
             </a:pPr>
+            <a:endParaRPr lang="en-US"/>
           </a:p>
         </c:txPr>
         <c:crossAx val="2140495176"/>
@@ -3241,12 +3389,14 @@
       <c:valAx>
         <c:axId val="2140495176"/>
         <c:scaling>
-          <c:max val="120.0"/>
-          <c:min val="75.0"/>
+          <c:orientation val="minMax"/>
+          <c:max val="120"/>
+          <c:min val="75"/>
         </c:scaling>
         <c:delete val="0"/>
         <c:axPos val="l"/>
         <c:majorGridlines/>
+        <c:numFmt formatCode="General" sourceLinked="1"/>
         <c:majorTickMark val="out"/>
         <c:minorTickMark val="none"/>
         <c:tickLblPos val="nextTo"/>
@@ -3259,11 +3409,13 @@
                 <a:latin typeface="Cambria"/>
               </a:defRPr>
             </a:pPr>
+            <a:endParaRPr lang="en-US"/>
           </a:p>
         </c:txPr>
         <c:crossAx val="2118791784"/>
         <c:crosses val="autoZero"/>
-        <c:majorUnit val="20.0"/>
+        <c:crossBetween val="between"/>
+        <c:majorUnit val="20"/>
       </c:valAx>
     </c:plotArea>
     <c:plotVisOnly val="1"/>
@@ -3287,11 +3439,15 @@
 </file>
 
 <file path=ppt/charts/chart5.xml><?xml version="1.0" encoding="utf-8"?>
-<c:chartSpace xmlns:c="http://schemas.openxmlformats.org/drawingml/2006/chart" xmlns:a="http://schemas.openxmlformats.org/drawingml/2006/main" xmlns:r="http://schemas.openxmlformats.org/officeDocument/2006/relationships">
+<c:chartSpace xmlns:c="http://schemas.openxmlformats.org/drawingml/2006/chart" xmlns:a="http://schemas.openxmlformats.org/drawingml/2006/main" xmlns:r="http://schemas.openxmlformats.org/officeDocument/2006/relationships" xmlns:c16r2="http://schemas.microsoft.com/office/drawing/2015/06/chart">
   <c:date1904 val="0"/>
+  <c:lang val="en-US"/>
+  <c:roundedCorners val="1"/>
+  <c:style val="2"/>
   <c:chart>
     <c:autoTitleDeleted val="0"/>
     <c:plotArea>
+      <c:layout/>
       <c:lineChart>
         <c:grouping val="standard"/>
         <c:varyColors val="0"/>
@@ -3409,19 +3565,19 @@
                   <c:v>97.96</c:v>
                 </c:pt>
                 <c:pt idx="5">
-                  <c:v>100.0</c:v>
+                  <c:v>100</c:v>
                 </c:pt>
                 <c:pt idx="6">
                   <c:v>101.8</c:v>
                 </c:pt>
                 <c:pt idx="7">
-                  <c:v>103.0</c:v>
+                  <c:v>103</c:v>
                 </c:pt>
                 <c:pt idx="8">
                   <c:v>103.4</c:v>
                 </c:pt>
                 <c:pt idx="9">
-                  <c:v>105.0</c:v>
+                  <c:v>105</c:v>
                 </c:pt>
                 <c:pt idx="10">
                   <c:v>105.4</c:v>
@@ -3457,6 +3613,11 @@
             </c:numRef>
           </c:val>
           <c:smooth val="0"/>
+          <c:extLst>
+            <c:ext xmlns:c16="http://schemas.microsoft.com/office/drawing/2014/chart" uri="{C3380CC4-5D6E-409C-BE32-E72D297353CC}">
+              <c16:uniqueId val="{00000000-CFD2-48B2-8A55-9199D32FAD42}"/>
+            </c:ext>
+          </c:extLst>
         </c:ser>
         <c:ser>
           <c:idx val="1"/>
@@ -3572,7 +3733,7 @@
                   <c:v>96.69</c:v>
                 </c:pt>
                 <c:pt idx="5">
-                  <c:v>100.0</c:v>
+                  <c:v>100</c:v>
                 </c:pt>
                 <c:pt idx="6">
                   <c:v>101.8</c:v>
@@ -3587,7 +3748,7 @@
                   <c:v>106.1</c:v>
                 </c:pt>
                 <c:pt idx="10">
-                  <c:v>107.0</c:v>
+                  <c:v>107</c:v>
                 </c:pt>
                 <c:pt idx="11">
                   <c:v>109.1</c:v>
@@ -3605,7 +3766,7 @@
                   <c:v>114.6</c:v>
                 </c:pt>
                 <c:pt idx="16">
-                  <c:v>115.0</c:v>
+                  <c:v>115</c:v>
                 </c:pt>
                 <c:pt idx="17">
                   <c:v>116.1</c:v>
@@ -3614,12 +3775,17 @@
                   <c:v>115.6</c:v>
                 </c:pt>
                 <c:pt idx="19">
-                  <c:v>116.0</c:v>
+                  <c:v>116</c:v>
                 </c:pt>
               </c:numCache>
             </c:numRef>
           </c:val>
           <c:smooth val="0"/>
+          <c:extLst>
+            <c:ext xmlns:c16="http://schemas.microsoft.com/office/drawing/2014/chart" uri="{C3380CC4-5D6E-409C-BE32-E72D297353CC}">
+              <c16:uniqueId val="{00000001-CFD2-48B2-8A55-9199D32FAD42}"/>
+            </c:ext>
+          </c:extLst>
         </c:ser>
         <c:ser>
           <c:idx val="2"/>
@@ -3735,7 +3901,7 @@
                   <c:v>96.13</c:v>
                 </c:pt>
                 <c:pt idx="5">
-                  <c:v>100.0</c:v>
+                  <c:v>100</c:v>
                 </c:pt>
                 <c:pt idx="6">
                   <c:v>101.2</c:v>
@@ -3783,6 +3949,11 @@
             </c:numRef>
           </c:val>
           <c:smooth val="0"/>
+          <c:extLst>
+            <c:ext xmlns:c16="http://schemas.microsoft.com/office/drawing/2014/chart" uri="{C3380CC4-5D6E-409C-BE32-E72D297353CC}">
+              <c16:uniqueId val="{00000002-CFD2-48B2-8A55-9199D32FAD42}"/>
+            </c:ext>
+          </c:extLst>
         </c:ser>
         <c:ser>
           <c:idx val="3"/>
@@ -3898,7 +4069,7 @@
                   <c:v>97.59</c:v>
                 </c:pt>
                 <c:pt idx="5">
-                  <c:v>100.0</c:v>
+                  <c:v>100</c:v>
                 </c:pt>
                 <c:pt idx="6">
                   <c:v>101.4</c:v>
@@ -3913,7 +4084,7 @@
                   <c:v>104.4</c:v>
                 </c:pt>
                 <c:pt idx="10">
-                  <c:v>105.0</c:v>
+                  <c:v>105</c:v>
                 </c:pt>
                 <c:pt idx="11">
                   <c:v>106.2</c:v>
@@ -3946,6 +4117,11 @@
             </c:numRef>
           </c:val>
           <c:smooth val="0"/>
+          <c:extLst>
+            <c:ext xmlns:c16="http://schemas.microsoft.com/office/drawing/2014/chart" uri="{C3380CC4-5D6E-409C-BE32-E72D297353CC}">
+              <c16:uniqueId val="{00000003-CFD2-48B2-8A55-9199D32FAD42}"/>
+            </c:ext>
+          </c:extLst>
         </c:ser>
         <c:ser>
           <c:idx val="4"/>
@@ -4052,7 +4228,7 @@
                   <c:v>93.23</c:v>
                 </c:pt>
                 <c:pt idx="2">
-                  <c:v>95.0</c:v>
+                  <c:v>95</c:v>
                 </c:pt>
                 <c:pt idx="3">
                   <c:v>96.33</c:v>
@@ -4061,13 +4237,13 @@
                   <c:v>97.92</c:v>
                 </c:pt>
                 <c:pt idx="5">
-                  <c:v>100.0</c:v>
+                  <c:v>100</c:v>
                 </c:pt>
                 <c:pt idx="6">
                   <c:v>101.2</c:v>
                 </c:pt>
                 <c:pt idx="7">
-                  <c:v>102.0</c:v>
+                  <c:v>102</c:v>
                 </c:pt>
                 <c:pt idx="8">
                   <c:v>102.6</c:v>
@@ -4109,8 +4285,20 @@
             </c:numRef>
           </c:val>
           <c:smooth val="0"/>
+          <c:extLst>
+            <c:ext xmlns:c16="http://schemas.microsoft.com/office/drawing/2014/chart" uri="{C3380CC4-5D6E-409C-BE32-E72D297353CC}">
+              <c16:uniqueId val="{00000004-CFD2-48B2-8A55-9199D32FAD42}"/>
+            </c:ext>
+          </c:extLst>
         </c:ser>
-        <c:marker val="1"/>
+        <c:dLbls>
+          <c:showLegendKey val="0"/>
+          <c:showVal val="0"/>
+          <c:showCatName val="0"/>
+          <c:showSerName val="0"/>
+          <c:showPercent val="0"/>
+          <c:showBubbleSize val="0"/>
+        </c:dLbls>
         <c:smooth val="0"/>
         <c:axId val="2118791784"/>
         <c:axId val="2140495176"/>
@@ -4122,6 +4310,7 @@
         </c:scaling>
         <c:delete val="0"/>
         <c:axPos val="b"/>
+        <c:numFmt formatCode="General" sourceLinked="0"/>
         <c:majorTickMark val="out"/>
         <c:minorTickMark val="none"/>
         <c:tickLblPos val="nextTo"/>
@@ -4134,6 +4323,7 @@
                 <a:latin typeface="Cambria"/>
               </a:defRPr>
             </a:pPr>
+            <a:endParaRPr lang="en-US"/>
           </a:p>
         </c:txPr>
         <c:crossAx val="2140495176"/>
@@ -4146,12 +4336,14 @@
       <c:valAx>
         <c:axId val="2140495176"/>
         <c:scaling>
-          <c:max val="120.0"/>
-          <c:min val="75.0"/>
+          <c:orientation val="minMax"/>
+          <c:max val="120"/>
+          <c:min val="75"/>
         </c:scaling>
         <c:delete val="0"/>
         <c:axPos val="l"/>
         <c:majorGridlines/>
+        <c:numFmt formatCode="General" sourceLinked="1"/>
         <c:majorTickMark val="out"/>
         <c:minorTickMark val="none"/>
         <c:tickLblPos val="nextTo"/>
@@ -4164,11 +4356,13 @@
                 <a:latin typeface="Cambria"/>
               </a:defRPr>
             </a:pPr>
+            <a:endParaRPr lang="en-US"/>
           </a:p>
         </c:txPr>
         <c:crossAx val="2118791784"/>
         <c:crosses val="autoZero"/>
-        <c:majorUnit val="20.0"/>
+        <c:crossBetween val="between"/>
+        <c:majorUnit val="20"/>
       </c:valAx>
     </c:plotArea>
     <c:plotVisOnly val="1"/>
@@ -4192,11 +4386,15 @@
 </file>
 
 <file path=ppt/charts/chart6.xml><?xml version="1.0" encoding="utf-8"?>
-<c:chartSpace xmlns:c="http://schemas.openxmlformats.org/drawingml/2006/chart" xmlns:a="http://schemas.openxmlformats.org/drawingml/2006/main" xmlns:r="http://schemas.openxmlformats.org/officeDocument/2006/relationships">
+<c:chartSpace xmlns:c="http://schemas.openxmlformats.org/drawingml/2006/chart" xmlns:a="http://schemas.openxmlformats.org/drawingml/2006/main" xmlns:r="http://schemas.openxmlformats.org/officeDocument/2006/relationships" xmlns:c16r2="http://schemas.microsoft.com/office/drawing/2015/06/chart">
   <c:date1904 val="0"/>
+  <c:lang val="en-US"/>
+  <c:roundedCorners val="1"/>
+  <c:style val="2"/>
   <c:chart>
     <c:autoTitleDeleted val="0"/>
     <c:plotArea>
+      <c:layout/>
       <c:lineChart>
         <c:grouping val="standard"/>
         <c:varyColors val="0"/>
@@ -4314,10 +4512,10 @@
                   <c:v>98.28</c:v>
                 </c:pt>
                 <c:pt idx="5">
-                  <c:v>100.0</c:v>
+                  <c:v>100</c:v>
                 </c:pt>
                 <c:pt idx="6">
-                  <c:v>102.0</c:v>
+                  <c:v>102</c:v>
                 </c:pt>
                 <c:pt idx="7">
                   <c:v>103.2</c:v>
@@ -4347,7 +4545,7 @@
                   <c:v>107.6</c:v>
                 </c:pt>
                 <c:pt idx="16">
-                  <c:v>107.0</c:v>
+                  <c:v>107</c:v>
                 </c:pt>
                 <c:pt idx="17">
                   <c:v>107.2</c:v>
@@ -4362,6 +4560,11 @@
             </c:numRef>
           </c:val>
           <c:smooth val="0"/>
+          <c:extLst>
+            <c:ext xmlns:c16="http://schemas.microsoft.com/office/drawing/2014/chart" uri="{C3380CC4-5D6E-409C-BE32-E72D297353CC}">
+              <c16:uniqueId val="{00000000-9B27-48BB-973B-DBD8A87309B3}"/>
+            </c:ext>
+          </c:extLst>
         </c:ser>
         <c:ser>
           <c:idx val="1"/>
@@ -4477,7 +4680,7 @@
                   <c:v>97.21</c:v>
                 </c:pt>
                 <c:pt idx="5">
-                  <c:v>100.0</c:v>
+                  <c:v>100</c:v>
                 </c:pt>
                 <c:pt idx="6">
                   <c:v>101.4</c:v>
@@ -4525,6 +4728,11 @@
             </c:numRef>
           </c:val>
           <c:smooth val="0"/>
+          <c:extLst>
+            <c:ext xmlns:c16="http://schemas.microsoft.com/office/drawing/2014/chart" uri="{C3380CC4-5D6E-409C-BE32-E72D297353CC}">
+              <c16:uniqueId val="{00000001-9B27-48BB-973B-DBD8A87309B3}"/>
+            </c:ext>
+          </c:extLst>
         </c:ser>
         <c:ser>
           <c:idx val="2"/>
@@ -4640,7 +4848,7 @@
                   <c:v>96.86</c:v>
                 </c:pt>
                 <c:pt idx="5">
-                  <c:v>100.0</c:v>
+                  <c:v>100</c:v>
                 </c:pt>
                 <c:pt idx="6">
                   <c:v>100.9</c:v>
@@ -4679,7 +4887,7 @@
                   <c:v>112.3</c:v>
                 </c:pt>
                 <c:pt idx="18">
-                  <c:v>112.0</c:v>
+                  <c:v>112</c:v>
                 </c:pt>
                 <c:pt idx="19">
                   <c:v>112.4</c:v>
@@ -4688,6 +4896,11 @@
             </c:numRef>
           </c:val>
           <c:smooth val="0"/>
+          <c:extLst>
+            <c:ext xmlns:c16="http://schemas.microsoft.com/office/drawing/2014/chart" uri="{C3380CC4-5D6E-409C-BE32-E72D297353CC}">
+              <c16:uniqueId val="{00000002-9B27-48BB-973B-DBD8A87309B3}"/>
+            </c:ext>
+          </c:extLst>
         </c:ser>
         <c:ser>
           <c:idx val="3"/>
@@ -4800,10 +5013,10 @@
                   <c:v>96.14</c:v>
                 </c:pt>
                 <c:pt idx="4">
-                  <c:v>98.0</c:v>
+                  <c:v>98</c:v>
                 </c:pt>
                 <c:pt idx="5">
-                  <c:v>100.0</c:v>
+                  <c:v>100</c:v>
                 </c:pt>
                 <c:pt idx="6">
                   <c:v>101.6</c:v>
@@ -4815,7 +5028,7 @@
                   <c:v>103.6</c:v>
                 </c:pt>
                 <c:pt idx="9">
-                  <c:v>105.0</c:v>
+                  <c:v>105</c:v>
                 </c:pt>
                 <c:pt idx="10">
                   <c:v>106.1</c:v>
@@ -4851,6 +5064,11 @@
             </c:numRef>
           </c:val>
           <c:smooth val="0"/>
+          <c:extLst>
+            <c:ext xmlns:c16="http://schemas.microsoft.com/office/drawing/2014/chart" uri="{C3380CC4-5D6E-409C-BE32-E72D297353CC}">
+              <c16:uniqueId val="{00000003-9B27-48BB-973B-DBD8A87309B3}"/>
+            </c:ext>
+          </c:extLst>
         </c:ser>
         <c:ser>
           <c:idx val="4"/>
@@ -4966,10 +5184,10 @@
                   <c:v>98.32</c:v>
                 </c:pt>
                 <c:pt idx="5">
-                  <c:v>100.0</c:v>
+                  <c:v>100</c:v>
                 </c:pt>
                 <c:pt idx="6">
-                  <c:v>101.0</c:v>
+                  <c:v>101</c:v>
                 </c:pt>
                 <c:pt idx="7">
                   <c:v>102.2</c:v>
@@ -4990,7 +5208,7 @@
                   <c:v>106.1</c:v>
                 </c:pt>
                 <c:pt idx="13">
-                  <c:v>107.0</c:v>
+                  <c:v>107</c:v>
                 </c:pt>
                 <c:pt idx="14">
                   <c:v>107.3</c:v>
@@ -5002,7 +5220,7 @@
                   <c:v>107.9</c:v>
                 </c:pt>
                 <c:pt idx="17">
-                  <c:v>109.0</c:v>
+                  <c:v>109</c:v>
                 </c:pt>
                 <c:pt idx="18">
                   <c:v>109.3</c:v>
@@ -5014,8 +5232,20 @@
             </c:numRef>
           </c:val>
           <c:smooth val="0"/>
+          <c:extLst>
+            <c:ext xmlns:c16="http://schemas.microsoft.com/office/drawing/2014/chart" uri="{C3380CC4-5D6E-409C-BE32-E72D297353CC}">
+              <c16:uniqueId val="{00000004-9B27-48BB-973B-DBD8A87309B3}"/>
+            </c:ext>
+          </c:extLst>
         </c:ser>
-        <c:marker val="1"/>
+        <c:dLbls>
+          <c:showLegendKey val="0"/>
+          <c:showVal val="0"/>
+          <c:showCatName val="0"/>
+          <c:showSerName val="0"/>
+          <c:showPercent val="0"/>
+          <c:showBubbleSize val="0"/>
+        </c:dLbls>
         <c:smooth val="0"/>
         <c:axId val="2118791784"/>
         <c:axId val="2140495176"/>
@@ -5027,6 +5257,7 @@
         </c:scaling>
         <c:delete val="0"/>
         <c:axPos val="b"/>
+        <c:numFmt formatCode="General" sourceLinked="0"/>
         <c:majorTickMark val="out"/>
         <c:minorTickMark val="none"/>
         <c:tickLblPos val="nextTo"/>
@@ -5039,6 +5270,7 @@
                 <a:latin typeface="Cambria"/>
               </a:defRPr>
             </a:pPr>
+            <a:endParaRPr lang="en-US"/>
           </a:p>
         </c:txPr>
         <c:crossAx val="2140495176"/>
@@ -5051,12 +5283,14 @@
       <c:valAx>
         <c:axId val="2140495176"/>
         <c:scaling>
-          <c:max val="120.0"/>
-          <c:min val="75.0"/>
+          <c:orientation val="minMax"/>
+          <c:max val="120"/>
+          <c:min val="75"/>
         </c:scaling>
         <c:delete val="0"/>
         <c:axPos val="l"/>
         <c:majorGridlines/>
+        <c:numFmt formatCode="General" sourceLinked="1"/>
         <c:majorTickMark val="out"/>
         <c:minorTickMark val="none"/>
         <c:tickLblPos val="nextTo"/>
@@ -5069,11 +5303,13 @@
                 <a:latin typeface="Cambria"/>
               </a:defRPr>
             </a:pPr>
+            <a:endParaRPr lang="en-US"/>
           </a:p>
         </c:txPr>
         <c:crossAx val="2118791784"/>
         <c:crosses val="autoZero"/>
-        <c:majorUnit val="20.0"/>
+        <c:crossBetween val="between"/>
+        <c:majorUnit val="20"/>
       </c:valAx>
     </c:plotArea>
     <c:plotVisOnly val="1"/>
@@ -5097,11 +5333,15 @@
 </file>
 
 <file path=ppt/charts/chart7.xml><?xml version="1.0" encoding="utf-8"?>
-<c:chartSpace xmlns:c="http://schemas.openxmlformats.org/drawingml/2006/chart" xmlns:a="http://schemas.openxmlformats.org/drawingml/2006/main" xmlns:r="http://schemas.openxmlformats.org/officeDocument/2006/relationships">
+<c:chartSpace xmlns:c="http://schemas.openxmlformats.org/drawingml/2006/chart" xmlns:a="http://schemas.openxmlformats.org/drawingml/2006/main" xmlns:r="http://schemas.openxmlformats.org/officeDocument/2006/relationships" xmlns:c16r2="http://schemas.microsoft.com/office/drawing/2015/06/chart">
   <c:date1904 val="0"/>
+  <c:lang val="en-US"/>
+  <c:roundedCorners val="1"/>
+  <c:style val="2"/>
   <c:chart>
     <c:autoTitleDeleted val="0"/>
     <c:plotArea>
+      <c:layout/>
       <c:lineChart>
         <c:grouping val="standard"/>
         <c:varyColors val="0"/>
@@ -5219,7 +5459,7 @@
                   <c:v>98.14</c:v>
                 </c:pt>
                 <c:pt idx="5">
-                  <c:v>100.0</c:v>
+                  <c:v>100</c:v>
                 </c:pt>
                 <c:pt idx="6">
                   <c:v>101.2</c:v>
@@ -5240,7 +5480,7 @@
                   <c:v>104.7</c:v>
                 </c:pt>
                 <c:pt idx="12">
-                  <c:v>105.0</c:v>
+                  <c:v>105</c:v>
                 </c:pt>
                 <c:pt idx="13">
                   <c:v>107.1</c:v>
@@ -5267,6 +5507,11 @@
             </c:numRef>
           </c:val>
           <c:smooth val="0"/>
+          <c:extLst>
+            <c:ext xmlns:c16="http://schemas.microsoft.com/office/drawing/2014/chart" uri="{C3380CC4-5D6E-409C-BE32-E72D297353CC}">
+              <c16:uniqueId val="{00000000-453F-4ACA-82D6-A76EC12CCF8B}"/>
+            </c:ext>
+          </c:extLst>
         </c:ser>
         <c:ser>
           <c:idx val="1"/>
@@ -5382,7 +5627,7 @@
                   <c:v>97.47</c:v>
                 </c:pt>
                 <c:pt idx="5">
-                  <c:v>100.0</c:v>
+                  <c:v>100</c:v>
                 </c:pt>
                 <c:pt idx="6">
                   <c:v>100.2</c:v>
@@ -5430,6 +5675,11 @@
             </c:numRef>
           </c:val>
           <c:smooth val="0"/>
+          <c:extLst>
+            <c:ext xmlns:c16="http://schemas.microsoft.com/office/drawing/2014/chart" uri="{C3380CC4-5D6E-409C-BE32-E72D297353CC}">
+              <c16:uniqueId val="{00000001-453F-4ACA-82D6-A76EC12CCF8B}"/>
+            </c:ext>
+          </c:extLst>
         </c:ser>
         <c:ser>
           <c:idx val="2"/>
@@ -5545,7 +5795,7 @@
                   <c:v>97.24</c:v>
                 </c:pt>
                 <c:pt idx="5">
-                  <c:v>100.0</c:v>
+                  <c:v>100</c:v>
                 </c:pt>
                 <c:pt idx="6">
                   <c:v>99.83</c:v>
@@ -5593,6 +5843,11 @@
             </c:numRef>
           </c:val>
           <c:smooth val="0"/>
+          <c:extLst>
+            <c:ext xmlns:c16="http://schemas.microsoft.com/office/drawing/2014/chart" uri="{C3380CC4-5D6E-409C-BE32-E72D297353CC}">
+              <c16:uniqueId val="{00000002-453F-4ACA-82D6-A76EC12CCF8B}"/>
+            </c:ext>
+          </c:extLst>
         </c:ser>
         <c:ser>
           <c:idx val="3"/>
@@ -5708,7 +5963,7 @@
                   <c:v>97.71</c:v>
                 </c:pt>
                 <c:pt idx="5">
-                  <c:v>100.0</c:v>
+                  <c:v>100</c:v>
                 </c:pt>
                 <c:pt idx="6">
                   <c:v>100.8</c:v>
@@ -5717,7 +5972,7 @@
                   <c:v>102.1</c:v>
                 </c:pt>
                 <c:pt idx="8">
-                  <c:v>103.0</c:v>
+                  <c:v>103</c:v>
                 </c:pt>
                 <c:pt idx="9">
                   <c:v>104.4</c:v>
@@ -5756,6 +6011,11 @@
             </c:numRef>
           </c:val>
           <c:smooth val="0"/>
+          <c:extLst>
+            <c:ext xmlns:c16="http://schemas.microsoft.com/office/drawing/2014/chart" uri="{C3380CC4-5D6E-409C-BE32-E72D297353CC}">
+              <c16:uniqueId val="{00000003-453F-4ACA-82D6-A76EC12CCF8B}"/>
+            </c:ext>
+          </c:extLst>
         </c:ser>
         <c:ser>
           <c:idx val="4"/>
@@ -5871,7 +6131,7 @@
                   <c:v>97.92</c:v>
                 </c:pt>
                 <c:pt idx="5">
-                  <c:v>100.0</c:v>
+                  <c:v>100</c:v>
                 </c:pt>
                 <c:pt idx="6">
                   <c:v>100.1</c:v>
@@ -5919,8 +6179,20 @@
             </c:numRef>
           </c:val>
           <c:smooth val="0"/>
+          <c:extLst>
+            <c:ext xmlns:c16="http://schemas.microsoft.com/office/drawing/2014/chart" uri="{C3380CC4-5D6E-409C-BE32-E72D297353CC}">
+              <c16:uniqueId val="{00000004-453F-4ACA-82D6-A76EC12CCF8B}"/>
+            </c:ext>
+          </c:extLst>
         </c:ser>
-        <c:marker val="1"/>
+        <c:dLbls>
+          <c:showLegendKey val="0"/>
+          <c:showVal val="0"/>
+          <c:showCatName val="0"/>
+          <c:showSerName val="0"/>
+          <c:showPercent val="0"/>
+          <c:showBubbleSize val="0"/>
+        </c:dLbls>
         <c:smooth val="0"/>
         <c:axId val="2118791784"/>
         <c:axId val="2140495176"/>
@@ -5932,6 +6204,7 @@
         </c:scaling>
         <c:delete val="0"/>
         <c:axPos val="b"/>
+        <c:numFmt formatCode="General" sourceLinked="0"/>
         <c:majorTickMark val="out"/>
         <c:minorTickMark val="none"/>
         <c:tickLblPos val="nextTo"/>
@@ -5944,6 +6217,7 @@
                 <a:latin typeface="Cambria"/>
               </a:defRPr>
             </a:pPr>
+            <a:endParaRPr lang="en-US"/>
           </a:p>
         </c:txPr>
         <c:crossAx val="2140495176"/>
@@ -5956,12 +6230,14 @@
       <c:valAx>
         <c:axId val="2140495176"/>
         <c:scaling>
-          <c:max val="120.0"/>
-          <c:min val="75.0"/>
+          <c:orientation val="minMax"/>
+          <c:max val="120"/>
+          <c:min val="75"/>
         </c:scaling>
         <c:delete val="0"/>
         <c:axPos val="l"/>
         <c:majorGridlines/>
+        <c:numFmt formatCode="General" sourceLinked="1"/>
         <c:majorTickMark val="out"/>
         <c:minorTickMark val="none"/>
         <c:tickLblPos val="nextTo"/>
@@ -5974,11 +6250,13 @@
                 <a:latin typeface="Cambria"/>
               </a:defRPr>
             </a:pPr>
+            <a:endParaRPr lang="en-US"/>
           </a:p>
         </c:txPr>
         <c:crossAx val="2118791784"/>
         <c:crosses val="autoZero"/>
-        <c:majorUnit val="20.0"/>
+        <c:crossBetween val="between"/>
+        <c:majorUnit val="20"/>
       </c:valAx>
     </c:plotArea>
     <c:plotVisOnly val="1"/>
@@ -6083,7 +6361,7 @@
           <a:p>
             <a:fld id="{8A6DA117-10E6-4BFD-ADAF-6E7EA5EFA42C}" type="datetimeFigureOut">
               <a:rPr lang="en-US" smtClean="0"/>
-              <a:t>9/4/2025</a:t>
+              <a:t>9/3/2026</a:t>
             </a:fld>
             <a:endParaRPr lang="en-US"/>
           </a:p>
@@ -6351,7 +6629,7 @@
 </file>
 
 <file path=ppt/notesSlides/notesSlide1.xml><?xml version="1.0" encoding="utf-8"?>
-<p:notes xmlns:a="http://schemas.openxmlformats.org/drawingml/2006/main" xmlns:p="http://schemas.openxmlformats.org/presentationml/2006/main" xmlns:r="http://schemas.openxmlformats.org/officeDocument/2006/relationships">
+<p:notes xmlns:a="http://schemas.openxmlformats.org/drawingml/2006/main" xmlns:r="http://schemas.openxmlformats.org/officeDocument/2006/relationships" xmlns:p="http://schemas.openxmlformats.org/presentationml/2006/main">
   <p:cSld>
     <p:spTree>
       <p:nvGrpSpPr>
@@ -6371,7 +6649,7 @@
         <p:nvSpPr>
           <p:cNvPr id="2" name="Slide Image Placeholder 1"/>
           <p:cNvSpPr>
-            <a:spLocks noGrp="1"/>
+            <a:spLocks noGrp="1" noRot="1" noChangeAspect="1"/>
           </p:cNvSpPr>
           <p:nvPr>
             <p:ph type="sldImg" idx="2"/>
@@ -6386,14 +6664,16 @@
             <a:spLocks noGrp="1"/>
           </p:cNvSpPr>
           <p:nvPr>
-            <p:ph type="body" idx="3" sz="quarter"/>
+            <p:ph type="body" sz="quarter" idx="3"/>
           </p:nvPr>
         </p:nvSpPr>
         <p:spPr/>
         <p:txBody>
           <a:bodyPr/>
           <a:lstStyle/>
-          <a:p/>
+          <a:p>
+            <a:endParaRPr/>
+          </a:p>
         </p:txBody>
       </p:sp>
       <p:sp>
@@ -6403,7 +6683,7 @@
             <a:spLocks noGrp="1"/>
           </p:cNvSpPr>
           <p:nvPr>
-            <p:ph type="sldNum" idx="5" sz="quarter"/>
+            <p:ph type="sldNum" sz="quarter" idx="5"/>
           </p:nvPr>
         </p:nvSpPr>
         <p:spPr/>
@@ -6417,7 +6697,7 @@
 </file>
 
 <file path=ppt/notesSlides/notesSlide10.xml><?xml version="1.0" encoding="utf-8"?>
-<p:notes xmlns:a="http://schemas.openxmlformats.org/drawingml/2006/main" xmlns:p="http://schemas.openxmlformats.org/presentationml/2006/main" xmlns:r="http://schemas.openxmlformats.org/officeDocument/2006/relationships">
+<p:notes xmlns:a="http://schemas.openxmlformats.org/drawingml/2006/main" xmlns:r="http://schemas.openxmlformats.org/officeDocument/2006/relationships" xmlns:p="http://schemas.openxmlformats.org/presentationml/2006/main">
   <p:cSld>
     <p:spTree>
       <p:nvGrpSpPr>
@@ -6437,7 +6717,7 @@
         <p:nvSpPr>
           <p:cNvPr id="2" name="Slide Image Placeholder 1"/>
           <p:cNvSpPr>
-            <a:spLocks noGrp="1"/>
+            <a:spLocks noGrp="1" noRot="1" noChangeAspect="1"/>
           </p:cNvSpPr>
           <p:nvPr>
             <p:ph type="sldImg" idx="2"/>
@@ -6452,14 +6732,16 @@
             <a:spLocks noGrp="1"/>
           </p:cNvSpPr>
           <p:nvPr>
-            <p:ph type="body" idx="3" sz="quarter"/>
+            <p:ph type="body" sz="quarter" idx="3"/>
           </p:nvPr>
         </p:nvSpPr>
         <p:spPr/>
         <p:txBody>
           <a:bodyPr/>
           <a:lstStyle/>
-          <a:p/>
+          <a:p>
+            <a:endParaRPr/>
+          </a:p>
         </p:txBody>
       </p:sp>
       <p:sp>
@@ -6469,7 +6751,7 @@
             <a:spLocks noGrp="1"/>
           </p:cNvSpPr>
           <p:nvPr>
-            <p:ph type="sldNum" idx="5" sz="quarter"/>
+            <p:ph type="sldNum" sz="quarter" idx="5"/>
           </p:nvPr>
         </p:nvSpPr>
         <p:spPr/>
@@ -6483,7 +6765,7 @@
 </file>
 
 <file path=ppt/notesSlides/notesSlide11.xml><?xml version="1.0" encoding="utf-8"?>
-<p:notes xmlns:a="http://schemas.openxmlformats.org/drawingml/2006/main" xmlns:p="http://schemas.openxmlformats.org/presentationml/2006/main" xmlns:r="http://schemas.openxmlformats.org/officeDocument/2006/relationships">
+<p:notes xmlns:a="http://schemas.openxmlformats.org/drawingml/2006/main" xmlns:r="http://schemas.openxmlformats.org/officeDocument/2006/relationships" xmlns:p="http://schemas.openxmlformats.org/presentationml/2006/main">
   <p:cSld>
     <p:spTree>
       <p:nvGrpSpPr>
@@ -6503,7 +6785,7 @@
         <p:nvSpPr>
           <p:cNvPr id="2" name="Slide Image Placeholder 1"/>
           <p:cNvSpPr>
-            <a:spLocks noGrp="1"/>
+            <a:spLocks noGrp="1" noRot="1" noChangeAspect="1"/>
           </p:cNvSpPr>
           <p:nvPr>
             <p:ph type="sldImg" idx="2"/>
@@ -6518,14 +6800,16 @@
             <a:spLocks noGrp="1"/>
           </p:cNvSpPr>
           <p:nvPr>
-            <p:ph type="body" idx="3" sz="quarter"/>
+            <p:ph type="body" sz="quarter" idx="3"/>
           </p:nvPr>
         </p:nvSpPr>
         <p:spPr/>
         <p:txBody>
           <a:bodyPr/>
           <a:lstStyle/>
-          <a:p/>
+          <a:p>
+            <a:endParaRPr/>
+          </a:p>
         </p:txBody>
       </p:sp>
       <p:sp>
@@ -6535,7 +6819,7 @@
             <a:spLocks noGrp="1"/>
           </p:cNvSpPr>
           <p:nvPr>
-            <p:ph type="sldNum" idx="5" sz="quarter"/>
+            <p:ph type="sldNum" sz="quarter" idx="5"/>
           </p:nvPr>
         </p:nvSpPr>
         <p:spPr/>
@@ -6549,7 +6833,7 @@
 </file>
 
 <file path=ppt/notesSlides/notesSlide12.xml><?xml version="1.0" encoding="utf-8"?>
-<p:notes xmlns:a="http://schemas.openxmlformats.org/drawingml/2006/main" xmlns:p="http://schemas.openxmlformats.org/presentationml/2006/main" xmlns:r="http://schemas.openxmlformats.org/officeDocument/2006/relationships">
+<p:notes xmlns:a="http://schemas.openxmlformats.org/drawingml/2006/main" xmlns:r="http://schemas.openxmlformats.org/officeDocument/2006/relationships" xmlns:p="http://schemas.openxmlformats.org/presentationml/2006/main">
   <p:cSld>
     <p:spTree>
       <p:nvGrpSpPr>
@@ -6569,7 +6853,7 @@
         <p:nvSpPr>
           <p:cNvPr id="2" name="Slide Image Placeholder 1"/>
           <p:cNvSpPr>
-            <a:spLocks noGrp="1"/>
+            <a:spLocks noGrp="1" noRot="1" noChangeAspect="1"/>
           </p:cNvSpPr>
           <p:nvPr>
             <p:ph type="sldImg" idx="2"/>
@@ -6584,14 +6868,16 @@
             <a:spLocks noGrp="1"/>
           </p:cNvSpPr>
           <p:nvPr>
-            <p:ph type="body" idx="3" sz="quarter"/>
+            <p:ph type="body" sz="quarter" idx="3"/>
           </p:nvPr>
         </p:nvSpPr>
         <p:spPr/>
         <p:txBody>
           <a:bodyPr/>
           <a:lstStyle/>
-          <a:p/>
+          <a:p>
+            <a:endParaRPr/>
+          </a:p>
         </p:txBody>
       </p:sp>
       <p:sp>
@@ -6601,7 +6887,7 @@
             <a:spLocks noGrp="1"/>
           </p:cNvSpPr>
           <p:nvPr>
-            <p:ph type="sldNum" idx="5" sz="quarter"/>
+            <p:ph type="sldNum" sz="quarter" idx="5"/>
           </p:nvPr>
         </p:nvSpPr>
         <p:spPr/>
@@ -6615,7 +6901,7 @@
 </file>
 
 <file path=ppt/notesSlides/notesSlide13.xml><?xml version="1.0" encoding="utf-8"?>
-<p:notes xmlns:a="http://schemas.openxmlformats.org/drawingml/2006/main" xmlns:p="http://schemas.openxmlformats.org/presentationml/2006/main" xmlns:r="http://schemas.openxmlformats.org/officeDocument/2006/relationships">
+<p:notes xmlns:a="http://schemas.openxmlformats.org/drawingml/2006/main" xmlns:r="http://schemas.openxmlformats.org/officeDocument/2006/relationships" xmlns:p="http://schemas.openxmlformats.org/presentationml/2006/main">
   <p:cSld>
     <p:spTree>
       <p:nvGrpSpPr>
@@ -6635,7 +6921,7 @@
         <p:nvSpPr>
           <p:cNvPr id="2" name="Slide Image Placeholder 1"/>
           <p:cNvSpPr>
-            <a:spLocks noGrp="1"/>
+            <a:spLocks noGrp="1" noRot="1" noChangeAspect="1"/>
           </p:cNvSpPr>
           <p:nvPr>
             <p:ph type="sldImg" idx="2"/>
@@ -6650,14 +6936,16 @@
             <a:spLocks noGrp="1"/>
           </p:cNvSpPr>
           <p:nvPr>
-            <p:ph type="body" idx="3" sz="quarter"/>
+            <p:ph type="body" sz="quarter" idx="3"/>
           </p:nvPr>
         </p:nvSpPr>
         <p:spPr/>
         <p:txBody>
           <a:bodyPr/>
           <a:lstStyle/>
-          <a:p/>
+          <a:p>
+            <a:endParaRPr/>
+          </a:p>
         </p:txBody>
       </p:sp>
       <p:sp>
@@ -6667,7 +6955,7 @@
             <a:spLocks noGrp="1"/>
           </p:cNvSpPr>
           <p:nvPr>
-            <p:ph type="sldNum" idx="5" sz="quarter"/>
+            <p:ph type="sldNum" sz="quarter" idx="5"/>
           </p:nvPr>
         </p:nvSpPr>
         <p:spPr/>
@@ -6681,7 +6969,7 @@
 </file>
 
 <file path=ppt/notesSlides/notesSlide14.xml><?xml version="1.0" encoding="utf-8"?>
-<p:notes xmlns:a="http://schemas.openxmlformats.org/drawingml/2006/main" xmlns:p="http://schemas.openxmlformats.org/presentationml/2006/main" xmlns:r="http://schemas.openxmlformats.org/officeDocument/2006/relationships">
+<p:notes xmlns:a="http://schemas.openxmlformats.org/drawingml/2006/main" xmlns:r="http://schemas.openxmlformats.org/officeDocument/2006/relationships" xmlns:p="http://schemas.openxmlformats.org/presentationml/2006/main">
   <p:cSld>
     <p:spTree>
       <p:nvGrpSpPr>
@@ -6701,7 +6989,7 @@
         <p:nvSpPr>
           <p:cNvPr id="2" name="Slide Image Placeholder 1"/>
           <p:cNvSpPr>
-            <a:spLocks noGrp="1"/>
+            <a:spLocks noGrp="1" noRot="1" noChangeAspect="1"/>
           </p:cNvSpPr>
           <p:nvPr>
             <p:ph type="sldImg" idx="2"/>
@@ -6716,14 +7004,16 @@
             <a:spLocks noGrp="1"/>
           </p:cNvSpPr>
           <p:nvPr>
-            <p:ph type="body" idx="3" sz="quarter"/>
+            <p:ph type="body" sz="quarter" idx="3"/>
           </p:nvPr>
         </p:nvSpPr>
         <p:spPr/>
         <p:txBody>
           <a:bodyPr/>
           <a:lstStyle/>
-          <a:p/>
+          <a:p>
+            <a:endParaRPr/>
+          </a:p>
         </p:txBody>
       </p:sp>
       <p:sp>
@@ -6733,7 +7023,7 @@
             <a:spLocks noGrp="1"/>
           </p:cNvSpPr>
           <p:nvPr>
-            <p:ph type="sldNum" idx="5" sz="quarter"/>
+            <p:ph type="sldNum" sz="quarter" idx="5"/>
           </p:nvPr>
         </p:nvSpPr>
         <p:spPr/>
@@ -6747,7 +7037,7 @@
 </file>
 
 <file path=ppt/notesSlides/notesSlide15.xml><?xml version="1.0" encoding="utf-8"?>
-<p:notes xmlns:a="http://schemas.openxmlformats.org/drawingml/2006/main" xmlns:p="http://schemas.openxmlformats.org/presentationml/2006/main" xmlns:r="http://schemas.openxmlformats.org/officeDocument/2006/relationships">
+<p:notes xmlns:a="http://schemas.openxmlformats.org/drawingml/2006/main" xmlns:r="http://schemas.openxmlformats.org/officeDocument/2006/relationships" xmlns:p="http://schemas.openxmlformats.org/presentationml/2006/main">
   <p:cSld>
     <p:spTree>
       <p:nvGrpSpPr>
@@ -6767,7 +7057,7 @@
         <p:nvSpPr>
           <p:cNvPr id="2" name="Slide Image Placeholder 1"/>
           <p:cNvSpPr>
-            <a:spLocks noGrp="1"/>
+            <a:spLocks noGrp="1" noRot="1" noChangeAspect="1"/>
           </p:cNvSpPr>
           <p:nvPr>
             <p:ph type="sldImg" idx="2"/>
@@ -6782,14 +7072,16 @@
             <a:spLocks noGrp="1"/>
           </p:cNvSpPr>
           <p:nvPr>
-            <p:ph type="body" idx="3" sz="quarter"/>
+            <p:ph type="body" sz="quarter" idx="3"/>
           </p:nvPr>
         </p:nvSpPr>
         <p:spPr/>
         <p:txBody>
           <a:bodyPr/>
           <a:lstStyle/>
-          <a:p/>
+          <a:p>
+            <a:endParaRPr/>
+          </a:p>
         </p:txBody>
       </p:sp>
       <p:sp>
@@ -6799,7 +7091,7 @@
             <a:spLocks noGrp="1"/>
           </p:cNvSpPr>
           <p:nvPr>
-            <p:ph type="sldNum" idx="5" sz="quarter"/>
+            <p:ph type="sldNum" sz="quarter" idx="5"/>
           </p:nvPr>
         </p:nvSpPr>
         <p:spPr/>
@@ -6813,7 +7105,7 @@
 </file>
 
 <file path=ppt/notesSlides/notesSlide16.xml><?xml version="1.0" encoding="utf-8"?>
-<p:notes xmlns:a="http://schemas.openxmlformats.org/drawingml/2006/main" xmlns:p="http://schemas.openxmlformats.org/presentationml/2006/main" xmlns:r="http://schemas.openxmlformats.org/officeDocument/2006/relationships">
+<p:notes xmlns:a="http://schemas.openxmlformats.org/drawingml/2006/main" xmlns:r="http://schemas.openxmlformats.org/officeDocument/2006/relationships" xmlns:p="http://schemas.openxmlformats.org/presentationml/2006/main">
   <p:cSld>
     <p:spTree>
       <p:nvGrpSpPr>
@@ -6833,7 +7125,7 @@
         <p:nvSpPr>
           <p:cNvPr id="2" name="Slide Image Placeholder 1"/>
           <p:cNvSpPr>
-            <a:spLocks noGrp="1"/>
+            <a:spLocks noGrp="1" noRot="1" noChangeAspect="1"/>
           </p:cNvSpPr>
           <p:nvPr>
             <p:ph type="sldImg" idx="2"/>
@@ -6848,14 +7140,16 @@
             <a:spLocks noGrp="1"/>
           </p:cNvSpPr>
           <p:nvPr>
-            <p:ph type="body" idx="3" sz="quarter"/>
+            <p:ph type="body" sz="quarter" idx="3"/>
           </p:nvPr>
         </p:nvSpPr>
         <p:spPr/>
         <p:txBody>
           <a:bodyPr/>
           <a:lstStyle/>
-          <a:p/>
+          <a:p>
+            <a:endParaRPr/>
+          </a:p>
         </p:txBody>
       </p:sp>
       <p:sp>
@@ -6865,7 +7159,7 @@
             <a:spLocks noGrp="1"/>
           </p:cNvSpPr>
           <p:nvPr>
-            <p:ph type="sldNum" idx="5" sz="quarter"/>
+            <p:ph type="sldNum" sz="quarter" idx="5"/>
           </p:nvPr>
         </p:nvSpPr>
         <p:spPr/>
@@ -6879,7 +7173,7 @@
 </file>
 
 <file path=ppt/notesSlides/notesSlide17.xml><?xml version="1.0" encoding="utf-8"?>
-<p:notes xmlns:a="http://schemas.openxmlformats.org/drawingml/2006/main" xmlns:p="http://schemas.openxmlformats.org/presentationml/2006/main" xmlns:r="http://schemas.openxmlformats.org/officeDocument/2006/relationships">
+<p:notes xmlns:a="http://schemas.openxmlformats.org/drawingml/2006/main" xmlns:r="http://schemas.openxmlformats.org/officeDocument/2006/relationships" xmlns:p="http://schemas.openxmlformats.org/presentationml/2006/main">
   <p:cSld>
     <p:spTree>
       <p:nvGrpSpPr>
@@ -6899,7 +7193,7 @@
         <p:nvSpPr>
           <p:cNvPr id="2" name="Slide Image Placeholder 1"/>
           <p:cNvSpPr>
-            <a:spLocks noGrp="1"/>
+            <a:spLocks noGrp="1" noRot="1" noChangeAspect="1"/>
           </p:cNvSpPr>
           <p:nvPr>
             <p:ph type="sldImg" idx="2"/>
@@ -6914,14 +7208,16 @@
             <a:spLocks noGrp="1"/>
           </p:cNvSpPr>
           <p:nvPr>
-            <p:ph type="body" idx="3" sz="quarter"/>
+            <p:ph type="body" sz="quarter" idx="3"/>
           </p:nvPr>
         </p:nvSpPr>
         <p:spPr/>
         <p:txBody>
           <a:bodyPr/>
           <a:lstStyle/>
-          <a:p/>
+          <a:p>
+            <a:endParaRPr/>
+          </a:p>
         </p:txBody>
       </p:sp>
       <p:sp>
@@ -6931,7 +7227,7 @@
             <a:spLocks noGrp="1"/>
           </p:cNvSpPr>
           <p:nvPr>
-            <p:ph type="sldNum" idx="5" sz="quarter"/>
+            <p:ph type="sldNum" sz="quarter" idx="5"/>
           </p:nvPr>
         </p:nvSpPr>
         <p:spPr/>
@@ -6945,7 +7241,7 @@
 </file>
 
 <file path=ppt/notesSlides/notesSlide18.xml><?xml version="1.0" encoding="utf-8"?>
-<p:notes xmlns:a="http://schemas.openxmlformats.org/drawingml/2006/main" xmlns:p="http://schemas.openxmlformats.org/presentationml/2006/main" xmlns:r="http://schemas.openxmlformats.org/officeDocument/2006/relationships">
+<p:notes xmlns:a="http://schemas.openxmlformats.org/drawingml/2006/main" xmlns:r="http://schemas.openxmlformats.org/officeDocument/2006/relationships" xmlns:p="http://schemas.openxmlformats.org/presentationml/2006/main">
   <p:cSld>
     <p:spTree>
       <p:nvGrpSpPr>
@@ -6965,7 +7261,7 @@
         <p:nvSpPr>
           <p:cNvPr id="2" name="Slide Image Placeholder 1"/>
           <p:cNvSpPr>
-            <a:spLocks noGrp="1"/>
+            <a:spLocks noGrp="1" noRot="1" noChangeAspect="1"/>
           </p:cNvSpPr>
           <p:nvPr>
             <p:ph type="sldImg" idx="2"/>
@@ -6980,14 +7276,16 @@
             <a:spLocks noGrp="1"/>
           </p:cNvSpPr>
           <p:nvPr>
-            <p:ph type="body" idx="3" sz="quarter"/>
+            <p:ph type="body" sz="quarter" idx="3"/>
           </p:nvPr>
         </p:nvSpPr>
         <p:spPr/>
         <p:txBody>
           <a:bodyPr/>
           <a:lstStyle/>
-          <a:p/>
+          <a:p>
+            <a:endParaRPr/>
+          </a:p>
         </p:txBody>
       </p:sp>
       <p:sp>
@@ -6997,7 +7295,7 @@
             <a:spLocks noGrp="1"/>
           </p:cNvSpPr>
           <p:nvPr>
-            <p:ph type="sldNum" idx="5" sz="quarter"/>
+            <p:ph type="sldNum" sz="quarter" idx="5"/>
           </p:nvPr>
         </p:nvSpPr>
         <p:spPr/>
@@ -7011,7 +7309,7 @@
 </file>
 
 <file path=ppt/notesSlides/notesSlide19.xml><?xml version="1.0" encoding="utf-8"?>
-<p:notes xmlns:a="http://schemas.openxmlformats.org/drawingml/2006/main" xmlns:p="http://schemas.openxmlformats.org/presentationml/2006/main" xmlns:r="http://schemas.openxmlformats.org/officeDocument/2006/relationships">
+<p:notes xmlns:a="http://schemas.openxmlformats.org/drawingml/2006/main" xmlns:r="http://schemas.openxmlformats.org/officeDocument/2006/relationships" xmlns:p="http://schemas.openxmlformats.org/presentationml/2006/main">
   <p:cSld>
     <p:spTree>
       <p:nvGrpSpPr>
@@ -7031,7 +7329,7 @@
         <p:nvSpPr>
           <p:cNvPr id="2" name="Slide Image Placeholder 1"/>
           <p:cNvSpPr>
-            <a:spLocks noGrp="1"/>
+            <a:spLocks noGrp="1" noRot="1" noChangeAspect="1"/>
           </p:cNvSpPr>
           <p:nvPr>
             <p:ph type="sldImg" idx="2"/>
@@ -7046,14 +7344,16 @@
             <a:spLocks noGrp="1"/>
           </p:cNvSpPr>
           <p:nvPr>
-            <p:ph type="body" idx="3" sz="quarter"/>
+            <p:ph type="body" sz="quarter" idx="3"/>
           </p:nvPr>
         </p:nvSpPr>
         <p:spPr/>
         <p:txBody>
           <a:bodyPr/>
           <a:lstStyle/>
-          <a:p/>
+          <a:p>
+            <a:endParaRPr/>
+          </a:p>
         </p:txBody>
       </p:sp>
       <p:sp>
@@ -7063,7 +7363,7 @@
             <a:spLocks noGrp="1"/>
           </p:cNvSpPr>
           <p:nvPr>
-            <p:ph type="sldNum" idx="5" sz="quarter"/>
+            <p:ph type="sldNum" sz="quarter" idx="5"/>
           </p:nvPr>
         </p:nvSpPr>
         <p:spPr/>
@@ -7077,7 +7377,7 @@
 </file>
 
 <file path=ppt/notesSlides/notesSlide2.xml><?xml version="1.0" encoding="utf-8"?>
-<p:notes xmlns:a="http://schemas.openxmlformats.org/drawingml/2006/main" xmlns:p="http://schemas.openxmlformats.org/presentationml/2006/main" xmlns:r="http://schemas.openxmlformats.org/officeDocument/2006/relationships">
+<p:notes xmlns:a="http://schemas.openxmlformats.org/drawingml/2006/main" xmlns:r="http://schemas.openxmlformats.org/officeDocument/2006/relationships" xmlns:p="http://schemas.openxmlformats.org/presentationml/2006/main">
   <p:cSld>
     <p:spTree>
       <p:nvGrpSpPr>
@@ -7097,7 +7397,7 @@
         <p:nvSpPr>
           <p:cNvPr id="2" name="Slide Image Placeholder 1"/>
           <p:cNvSpPr>
-            <a:spLocks noGrp="1"/>
+            <a:spLocks noGrp="1" noRot="1" noChangeAspect="1"/>
           </p:cNvSpPr>
           <p:nvPr>
             <p:ph type="sldImg" idx="2"/>
@@ -7112,14 +7412,16 @@
             <a:spLocks noGrp="1"/>
           </p:cNvSpPr>
           <p:nvPr>
-            <p:ph type="body" idx="3" sz="quarter"/>
+            <p:ph type="body" sz="quarter" idx="3"/>
           </p:nvPr>
         </p:nvSpPr>
         <p:spPr/>
         <p:txBody>
           <a:bodyPr/>
           <a:lstStyle/>
-          <a:p/>
+          <a:p>
+            <a:endParaRPr/>
+          </a:p>
         </p:txBody>
       </p:sp>
       <p:sp>
@@ -7129,7 +7431,7 @@
             <a:spLocks noGrp="1"/>
           </p:cNvSpPr>
           <p:nvPr>
-            <p:ph type="sldNum" idx="5" sz="quarter"/>
+            <p:ph type="sldNum" sz="quarter" idx="5"/>
           </p:nvPr>
         </p:nvSpPr>
         <p:spPr/>
@@ -7143,7 +7445,7 @@
 </file>
 
 <file path=ppt/notesSlides/notesSlide20.xml><?xml version="1.0" encoding="utf-8"?>
-<p:notes xmlns:a="http://schemas.openxmlformats.org/drawingml/2006/main" xmlns:p="http://schemas.openxmlformats.org/presentationml/2006/main" xmlns:r="http://schemas.openxmlformats.org/officeDocument/2006/relationships">
+<p:notes xmlns:a="http://schemas.openxmlformats.org/drawingml/2006/main" xmlns:r="http://schemas.openxmlformats.org/officeDocument/2006/relationships" xmlns:p="http://schemas.openxmlformats.org/presentationml/2006/main">
   <p:cSld>
     <p:spTree>
       <p:nvGrpSpPr>
@@ -7163,7 +7465,7 @@
         <p:nvSpPr>
           <p:cNvPr id="2" name="Slide Image Placeholder 1"/>
           <p:cNvSpPr>
-            <a:spLocks noGrp="1"/>
+            <a:spLocks noGrp="1" noRot="1" noChangeAspect="1"/>
           </p:cNvSpPr>
           <p:nvPr>
             <p:ph type="sldImg" idx="2"/>
@@ -7178,14 +7480,16 @@
             <a:spLocks noGrp="1"/>
           </p:cNvSpPr>
           <p:nvPr>
-            <p:ph type="body" idx="3" sz="quarter"/>
+            <p:ph type="body" sz="quarter" idx="3"/>
           </p:nvPr>
         </p:nvSpPr>
         <p:spPr/>
         <p:txBody>
           <a:bodyPr/>
           <a:lstStyle/>
-          <a:p/>
+          <a:p>
+            <a:endParaRPr/>
+          </a:p>
         </p:txBody>
       </p:sp>
       <p:sp>
@@ -7195,7 +7499,7 @@
             <a:spLocks noGrp="1"/>
           </p:cNvSpPr>
           <p:nvPr>
-            <p:ph type="sldNum" idx="5" sz="quarter"/>
+            <p:ph type="sldNum" sz="quarter" idx="5"/>
           </p:nvPr>
         </p:nvSpPr>
         <p:spPr/>
@@ -7209,7 +7513,7 @@
 </file>
 
 <file path=ppt/notesSlides/notesSlide21.xml><?xml version="1.0" encoding="utf-8"?>
-<p:notes xmlns:a="http://schemas.openxmlformats.org/drawingml/2006/main" xmlns:p="http://schemas.openxmlformats.org/presentationml/2006/main" xmlns:r="http://schemas.openxmlformats.org/officeDocument/2006/relationships">
+<p:notes xmlns:a="http://schemas.openxmlformats.org/drawingml/2006/main" xmlns:r="http://schemas.openxmlformats.org/officeDocument/2006/relationships" xmlns:p="http://schemas.openxmlformats.org/presentationml/2006/main">
   <p:cSld>
     <p:spTree>
       <p:nvGrpSpPr>
@@ -7229,7 +7533,7 @@
         <p:nvSpPr>
           <p:cNvPr id="2" name="Slide Image Placeholder 1"/>
           <p:cNvSpPr>
-            <a:spLocks noGrp="1"/>
+            <a:spLocks noGrp="1" noRot="1" noChangeAspect="1"/>
           </p:cNvSpPr>
           <p:nvPr>
             <p:ph type="sldImg" idx="2"/>
@@ -7244,14 +7548,16 @@
             <a:spLocks noGrp="1"/>
           </p:cNvSpPr>
           <p:nvPr>
-            <p:ph type="body" idx="3" sz="quarter"/>
+            <p:ph type="body" sz="quarter" idx="3"/>
           </p:nvPr>
         </p:nvSpPr>
         <p:spPr/>
         <p:txBody>
           <a:bodyPr/>
           <a:lstStyle/>
-          <a:p/>
+          <a:p>
+            <a:endParaRPr/>
+          </a:p>
         </p:txBody>
       </p:sp>
       <p:sp>
@@ -7261,7 +7567,7 @@
             <a:spLocks noGrp="1"/>
           </p:cNvSpPr>
           <p:nvPr>
-            <p:ph type="sldNum" idx="5" sz="quarter"/>
+            <p:ph type="sldNum" sz="quarter" idx="5"/>
           </p:nvPr>
         </p:nvSpPr>
         <p:spPr/>
@@ -7275,7 +7581,7 @@
 </file>
 
 <file path=ppt/notesSlides/notesSlide22.xml><?xml version="1.0" encoding="utf-8"?>
-<p:notes xmlns:a="http://schemas.openxmlformats.org/drawingml/2006/main" xmlns:p="http://schemas.openxmlformats.org/presentationml/2006/main" xmlns:r="http://schemas.openxmlformats.org/officeDocument/2006/relationships">
+<p:notes xmlns:a="http://schemas.openxmlformats.org/drawingml/2006/main" xmlns:r="http://schemas.openxmlformats.org/officeDocument/2006/relationships" xmlns:p="http://schemas.openxmlformats.org/presentationml/2006/main">
   <p:cSld>
     <p:spTree>
       <p:nvGrpSpPr>
@@ -7295,7 +7601,7 @@
         <p:nvSpPr>
           <p:cNvPr id="2" name="Slide Image Placeholder 1"/>
           <p:cNvSpPr>
-            <a:spLocks noGrp="1"/>
+            <a:spLocks noGrp="1" noRot="1" noChangeAspect="1"/>
           </p:cNvSpPr>
           <p:nvPr>
             <p:ph type="sldImg" idx="2"/>
@@ -7310,14 +7616,16 @@
             <a:spLocks noGrp="1"/>
           </p:cNvSpPr>
           <p:nvPr>
-            <p:ph type="body" idx="3" sz="quarter"/>
+            <p:ph type="body" sz="quarter" idx="3"/>
           </p:nvPr>
         </p:nvSpPr>
         <p:spPr/>
         <p:txBody>
           <a:bodyPr/>
           <a:lstStyle/>
-          <a:p/>
+          <a:p>
+            <a:endParaRPr/>
+          </a:p>
         </p:txBody>
       </p:sp>
       <p:sp>
@@ -7327,7 +7635,7 @@
             <a:spLocks noGrp="1"/>
           </p:cNvSpPr>
           <p:nvPr>
-            <p:ph type="sldNum" idx="5" sz="quarter"/>
+            <p:ph type="sldNum" sz="quarter" idx="5"/>
           </p:nvPr>
         </p:nvSpPr>
         <p:spPr/>
@@ -7341,7 +7649,7 @@
 </file>
 
 <file path=ppt/notesSlides/notesSlide23.xml><?xml version="1.0" encoding="utf-8"?>
-<p:notes xmlns:a="http://schemas.openxmlformats.org/drawingml/2006/main" xmlns:p="http://schemas.openxmlformats.org/presentationml/2006/main" xmlns:r="http://schemas.openxmlformats.org/officeDocument/2006/relationships">
+<p:notes xmlns:a="http://schemas.openxmlformats.org/drawingml/2006/main" xmlns:r="http://schemas.openxmlformats.org/officeDocument/2006/relationships" xmlns:p="http://schemas.openxmlformats.org/presentationml/2006/main">
   <p:cSld>
     <p:spTree>
       <p:nvGrpSpPr>
@@ -7361,7 +7669,7 @@
         <p:nvSpPr>
           <p:cNvPr id="2" name="Slide Image Placeholder 1"/>
           <p:cNvSpPr>
-            <a:spLocks noGrp="1"/>
+            <a:spLocks noGrp="1" noRot="1" noChangeAspect="1"/>
           </p:cNvSpPr>
           <p:nvPr>
             <p:ph type="sldImg" idx="2"/>
@@ -7376,14 +7684,16 @@
             <a:spLocks noGrp="1"/>
           </p:cNvSpPr>
           <p:nvPr>
-            <p:ph type="body" idx="3" sz="quarter"/>
+            <p:ph type="body" sz="quarter" idx="3"/>
           </p:nvPr>
         </p:nvSpPr>
         <p:spPr/>
         <p:txBody>
           <a:bodyPr/>
           <a:lstStyle/>
-          <a:p/>
+          <a:p>
+            <a:endParaRPr/>
+          </a:p>
         </p:txBody>
       </p:sp>
       <p:sp>
@@ -7393,7 +7703,7 @@
             <a:spLocks noGrp="1"/>
           </p:cNvSpPr>
           <p:nvPr>
-            <p:ph type="sldNum" idx="5" sz="quarter"/>
+            <p:ph type="sldNum" sz="quarter" idx="5"/>
           </p:nvPr>
         </p:nvSpPr>
         <p:spPr/>
@@ -7407,7 +7717,7 @@
 </file>
 
 <file path=ppt/notesSlides/notesSlide24.xml><?xml version="1.0" encoding="utf-8"?>
-<p:notes xmlns:a="http://schemas.openxmlformats.org/drawingml/2006/main" xmlns:p="http://schemas.openxmlformats.org/presentationml/2006/main" xmlns:r="http://schemas.openxmlformats.org/officeDocument/2006/relationships">
+<p:notes xmlns:a="http://schemas.openxmlformats.org/drawingml/2006/main" xmlns:r="http://schemas.openxmlformats.org/officeDocument/2006/relationships" xmlns:p="http://schemas.openxmlformats.org/presentationml/2006/main">
   <p:cSld>
     <p:spTree>
       <p:nvGrpSpPr>
@@ -7427,7 +7737,7 @@
         <p:nvSpPr>
           <p:cNvPr id="2" name="Slide Image Placeholder 1"/>
           <p:cNvSpPr>
-            <a:spLocks noGrp="1"/>
+            <a:spLocks noGrp="1" noRot="1" noChangeAspect="1"/>
           </p:cNvSpPr>
           <p:nvPr>
             <p:ph type="sldImg" idx="2"/>
@@ -7442,14 +7752,16 @@
             <a:spLocks noGrp="1"/>
           </p:cNvSpPr>
           <p:nvPr>
-            <p:ph type="body" idx="3" sz="quarter"/>
+            <p:ph type="body" sz="quarter" idx="3"/>
           </p:nvPr>
         </p:nvSpPr>
         <p:spPr/>
         <p:txBody>
           <a:bodyPr/>
           <a:lstStyle/>
-          <a:p/>
+          <a:p>
+            <a:endParaRPr/>
+          </a:p>
         </p:txBody>
       </p:sp>
       <p:sp>
@@ -7459,7 +7771,7 @@
             <a:spLocks noGrp="1"/>
           </p:cNvSpPr>
           <p:nvPr>
-            <p:ph type="sldNum" idx="5" sz="quarter"/>
+            <p:ph type="sldNum" sz="quarter" idx="5"/>
           </p:nvPr>
         </p:nvSpPr>
         <p:spPr/>
@@ -7472,8 +7784,8 @@
 </p:notes>
 </file>
 
-<file path=ppt/notesSlides/notesSlide25.xml><?xml version="1.0" encoding="utf-8"?>
-<p:notes xmlns:a="http://schemas.openxmlformats.org/drawingml/2006/main" xmlns:p="http://schemas.openxmlformats.org/presentationml/2006/main" xmlns:r="http://schemas.openxmlformats.org/officeDocument/2006/relationships">
+<file path=ppt/notesSlides/notesSlide3.xml><?xml version="1.0" encoding="utf-8"?>
+<p:notes xmlns:a="http://schemas.openxmlformats.org/drawingml/2006/main" xmlns:r="http://schemas.openxmlformats.org/officeDocument/2006/relationships" xmlns:p="http://schemas.openxmlformats.org/presentationml/2006/main">
   <p:cSld>
     <p:spTree>
       <p:nvGrpSpPr>
@@ -7493,7 +7805,7 @@
         <p:nvSpPr>
           <p:cNvPr id="2" name="Slide Image Placeholder 1"/>
           <p:cNvSpPr>
-            <a:spLocks noGrp="1"/>
+            <a:spLocks noGrp="1" noRot="1" noChangeAspect="1"/>
           </p:cNvSpPr>
           <p:nvPr>
             <p:ph type="sldImg" idx="2"/>
@@ -7508,14 +7820,16 @@
             <a:spLocks noGrp="1"/>
           </p:cNvSpPr>
           <p:nvPr>
-            <p:ph type="body" idx="3" sz="quarter"/>
+            <p:ph type="body" sz="quarter" idx="3"/>
           </p:nvPr>
         </p:nvSpPr>
         <p:spPr/>
         <p:txBody>
           <a:bodyPr/>
           <a:lstStyle/>
-          <a:p/>
+          <a:p>
+            <a:endParaRPr/>
+          </a:p>
         </p:txBody>
       </p:sp>
       <p:sp>
@@ -7525,7 +7839,7 @@
             <a:spLocks noGrp="1"/>
           </p:cNvSpPr>
           <p:nvPr>
-            <p:ph type="sldNum" idx="5" sz="quarter"/>
+            <p:ph type="sldNum" sz="quarter" idx="5"/>
           </p:nvPr>
         </p:nvSpPr>
         <p:spPr/>
@@ -7538,8 +7852,8 @@
 </p:notes>
 </file>
 
-<file path=ppt/notesSlides/notesSlide3.xml><?xml version="1.0" encoding="utf-8"?>
-<p:notes xmlns:a="http://schemas.openxmlformats.org/drawingml/2006/main" xmlns:p="http://schemas.openxmlformats.org/presentationml/2006/main" xmlns:r="http://schemas.openxmlformats.org/officeDocument/2006/relationships">
+<file path=ppt/notesSlides/notesSlide4.xml><?xml version="1.0" encoding="utf-8"?>
+<p:notes xmlns:a="http://schemas.openxmlformats.org/drawingml/2006/main" xmlns:r="http://schemas.openxmlformats.org/officeDocument/2006/relationships" xmlns:p="http://schemas.openxmlformats.org/presentationml/2006/main">
   <p:cSld>
     <p:spTree>
       <p:nvGrpSpPr>
@@ -7559,7 +7873,7 @@
         <p:nvSpPr>
           <p:cNvPr id="2" name="Slide Image Placeholder 1"/>
           <p:cNvSpPr>
-            <a:spLocks noGrp="1"/>
+            <a:spLocks noGrp="1" noRot="1" noChangeAspect="1"/>
           </p:cNvSpPr>
           <p:nvPr>
             <p:ph type="sldImg" idx="2"/>
@@ -7574,14 +7888,16 @@
             <a:spLocks noGrp="1"/>
           </p:cNvSpPr>
           <p:nvPr>
-            <p:ph type="body" idx="3" sz="quarter"/>
+            <p:ph type="body" sz="quarter" idx="3"/>
           </p:nvPr>
         </p:nvSpPr>
         <p:spPr/>
         <p:txBody>
           <a:bodyPr/>
           <a:lstStyle/>
-          <a:p/>
+          <a:p>
+            <a:endParaRPr/>
+          </a:p>
         </p:txBody>
       </p:sp>
       <p:sp>
@@ -7591,7 +7907,7 @@
             <a:spLocks noGrp="1"/>
           </p:cNvSpPr>
           <p:nvPr>
-            <p:ph type="sldNum" idx="5" sz="quarter"/>
+            <p:ph type="sldNum" sz="quarter" idx="5"/>
           </p:nvPr>
         </p:nvSpPr>
         <p:spPr/>
@@ -7604,8 +7920,8 @@
 </p:notes>
 </file>
 
-<file path=ppt/notesSlides/notesSlide4.xml><?xml version="1.0" encoding="utf-8"?>
-<p:notes xmlns:a="http://schemas.openxmlformats.org/drawingml/2006/main" xmlns:p="http://schemas.openxmlformats.org/presentationml/2006/main" xmlns:r="http://schemas.openxmlformats.org/officeDocument/2006/relationships">
+<file path=ppt/notesSlides/notesSlide5.xml><?xml version="1.0" encoding="utf-8"?>
+<p:notes xmlns:a="http://schemas.openxmlformats.org/drawingml/2006/main" xmlns:r="http://schemas.openxmlformats.org/officeDocument/2006/relationships" xmlns:p="http://schemas.openxmlformats.org/presentationml/2006/main">
   <p:cSld>
     <p:spTree>
       <p:nvGrpSpPr>
@@ -7625,7 +7941,7 @@
         <p:nvSpPr>
           <p:cNvPr id="2" name="Slide Image Placeholder 1"/>
           <p:cNvSpPr>
-            <a:spLocks noGrp="1"/>
+            <a:spLocks noGrp="1" noRot="1" noChangeAspect="1"/>
           </p:cNvSpPr>
           <p:nvPr>
             <p:ph type="sldImg" idx="2"/>
@@ -7640,14 +7956,16 @@
             <a:spLocks noGrp="1"/>
           </p:cNvSpPr>
           <p:nvPr>
-            <p:ph type="body" idx="3" sz="quarter"/>
+            <p:ph type="body" sz="quarter" idx="3"/>
           </p:nvPr>
         </p:nvSpPr>
         <p:spPr/>
         <p:txBody>
           <a:bodyPr/>
           <a:lstStyle/>
-          <a:p/>
+          <a:p>
+            <a:endParaRPr/>
+          </a:p>
         </p:txBody>
       </p:sp>
       <p:sp>
@@ -7657,7 +7975,7 @@
             <a:spLocks noGrp="1"/>
           </p:cNvSpPr>
           <p:nvPr>
-            <p:ph type="sldNum" idx="5" sz="quarter"/>
+            <p:ph type="sldNum" sz="quarter" idx="5"/>
           </p:nvPr>
         </p:nvSpPr>
         <p:spPr/>
@@ -7670,8 +7988,8 @@
 </p:notes>
 </file>
 
-<file path=ppt/notesSlides/notesSlide5.xml><?xml version="1.0" encoding="utf-8"?>
-<p:notes xmlns:a="http://schemas.openxmlformats.org/drawingml/2006/main" xmlns:p="http://schemas.openxmlformats.org/presentationml/2006/main" xmlns:r="http://schemas.openxmlformats.org/officeDocument/2006/relationships">
+<file path=ppt/notesSlides/notesSlide6.xml><?xml version="1.0" encoding="utf-8"?>
+<p:notes xmlns:a="http://schemas.openxmlformats.org/drawingml/2006/main" xmlns:r="http://schemas.openxmlformats.org/officeDocument/2006/relationships" xmlns:p="http://schemas.openxmlformats.org/presentationml/2006/main">
   <p:cSld>
     <p:spTree>
       <p:nvGrpSpPr>
@@ -7691,7 +8009,7 @@
         <p:nvSpPr>
           <p:cNvPr id="2" name="Slide Image Placeholder 1"/>
           <p:cNvSpPr>
-            <a:spLocks noGrp="1"/>
+            <a:spLocks noGrp="1" noRot="1" noChangeAspect="1"/>
           </p:cNvSpPr>
           <p:nvPr>
             <p:ph type="sldImg" idx="2"/>
@@ -7706,14 +8024,16 @@
             <a:spLocks noGrp="1"/>
           </p:cNvSpPr>
           <p:nvPr>
-            <p:ph type="body" idx="3" sz="quarter"/>
+            <p:ph type="body" sz="quarter" idx="3"/>
           </p:nvPr>
         </p:nvSpPr>
         <p:spPr/>
         <p:txBody>
           <a:bodyPr/>
           <a:lstStyle/>
-          <a:p/>
+          <a:p>
+            <a:endParaRPr/>
+          </a:p>
         </p:txBody>
       </p:sp>
       <p:sp>
@@ -7723,7 +8043,7 @@
             <a:spLocks noGrp="1"/>
           </p:cNvSpPr>
           <p:nvPr>
-            <p:ph type="sldNum" idx="5" sz="quarter"/>
+            <p:ph type="sldNum" sz="quarter" idx="5"/>
           </p:nvPr>
         </p:nvSpPr>
         <p:spPr/>
@@ -7736,8 +8056,8 @@
 </p:notes>
 </file>
 
-<file path=ppt/notesSlides/notesSlide6.xml><?xml version="1.0" encoding="utf-8"?>
-<p:notes xmlns:a="http://schemas.openxmlformats.org/drawingml/2006/main" xmlns:p="http://schemas.openxmlformats.org/presentationml/2006/main" xmlns:r="http://schemas.openxmlformats.org/officeDocument/2006/relationships">
+<file path=ppt/notesSlides/notesSlide7.xml><?xml version="1.0" encoding="utf-8"?>
+<p:notes xmlns:a="http://schemas.openxmlformats.org/drawingml/2006/main" xmlns:r="http://schemas.openxmlformats.org/officeDocument/2006/relationships" xmlns:p="http://schemas.openxmlformats.org/presentationml/2006/main">
   <p:cSld>
     <p:spTree>
       <p:nvGrpSpPr>
@@ -7757,7 +8077,7 @@
         <p:nvSpPr>
           <p:cNvPr id="2" name="Slide Image Placeholder 1"/>
           <p:cNvSpPr>
-            <a:spLocks noGrp="1"/>
+            <a:spLocks noGrp="1" noRot="1" noChangeAspect="1"/>
           </p:cNvSpPr>
           <p:nvPr>
             <p:ph type="sldImg" idx="2"/>
@@ -7772,14 +8092,16 @@
             <a:spLocks noGrp="1"/>
           </p:cNvSpPr>
           <p:nvPr>
-            <p:ph type="body" idx="3" sz="quarter"/>
+            <p:ph type="body" sz="quarter" idx="3"/>
           </p:nvPr>
         </p:nvSpPr>
         <p:spPr/>
         <p:txBody>
           <a:bodyPr/>
           <a:lstStyle/>
-          <a:p/>
+          <a:p>
+            <a:endParaRPr/>
+          </a:p>
         </p:txBody>
       </p:sp>
       <p:sp>
@@ -7789,7 +8111,7 @@
             <a:spLocks noGrp="1"/>
           </p:cNvSpPr>
           <p:nvPr>
-            <p:ph type="sldNum" idx="5" sz="quarter"/>
+            <p:ph type="sldNum" sz="quarter" idx="5"/>
           </p:nvPr>
         </p:nvSpPr>
         <p:spPr/>
@@ -7802,8 +8124,8 @@
 </p:notes>
 </file>
 
-<file path=ppt/notesSlides/notesSlide7.xml><?xml version="1.0" encoding="utf-8"?>
-<p:notes xmlns:a="http://schemas.openxmlformats.org/drawingml/2006/main" xmlns:p="http://schemas.openxmlformats.org/presentationml/2006/main" xmlns:r="http://schemas.openxmlformats.org/officeDocument/2006/relationships">
+<file path=ppt/notesSlides/notesSlide8.xml><?xml version="1.0" encoding="utf-8"?>
+<p:notes xmlns:a="http://schemas.openxmlformats.org/drawingml/2006/main" xmlns:r="http://schemas.openxmlformats.org/officeDocument/2006/relationships" xmlns:p="http://schemas.openxmlformats.org/presentationml/2006/main">
   <p:cSld>
     <p:spTree>
       <p:nvGrpSpPr>
@@ -7823,7 +8145,7 @@
         <p:nvSpPr>
           <p:cNvPr id="2" name="Slide Image Placeholder 1"/>
           <p:cNvSpPr>
-            <a:spLocks noGrp="1"/>
+            <a:spLocks noGrp="1" noRot="1" noChangeAspect="1"/>
           </p:cNvSpPr>
           <p:nvPr>
             <p:ph type="sldImg" idx="2"/>
@@ -7838,14 +8160,16 @@
             <a:spLocks noGrp="1"/>
           </p:cNvSpPr>
           <p:nvPr>
-            <p:ph type="body" idx="3" sz="quarter"/>
+            <p:ph type="body" sz="quarter" idx="3"/>
           </p:nvPr>
         </p:nvSpPr>
         <p:spPr/>
         <p:txBody>
           <a:bodyPr/>
           <a:lstStyle/>
-          <a:p/>
+          <a:p>
+            <a:endParaRPr/>
+          </a:p>
         </p:txBody>
       </p:sp>
       <p:sp>
@@ -7855,7 +8179,7 @@
             <a:spLocks noGrp="1"/>
           </p:cNvSpPr>
           <p:nvPr>
-            <p:ph type="sldNum" idx="5" sz="quarter"/>
+            <p:ph type="sldNum" sz="quarter" idx="5"/>
           </p:nvPr>
         </p:nvSpPr>
         <p:spPr/>
@@ -7868,8 +8192,8 @@
 </p:notes>
 </file>
 
-<file path=ppt/notesSlides/notesSlide8.xml><?xml version="1.0" encoding="utf-8"?>
-<p:notes xmlns:a="http://schemas.openxmlformats.org/drawingml/2006/main" xmlns:p="http://schemas.openxmlformats.org/presentationml/2006/main" xmlns:r="http://schemas.openxmlformats.org/officeDocument/2006/relationships">
+<file path=ppt/notesSlides/notesSlide9.xml><?xml version="1.0" encoding="utf-8"?>
+<p:notes xmlns:a="http://schemas.openxmlformats.org/drawingml/2006/main" xmlns:r="http://schemas.openxmlformats.org/officeDocument/2006/relationships" xmlns:p="http://schemas.openxmlformats.org/presentationml/2006/main">
   <p:cSld>
     <p:spTree>
       <p:nvGrpSpPr>
@@ -7889,7 +8213,7 @@
         <p:nvSpPr>
           <p:cNvPr id="2" name="Slide Image Placeholder 1"/>
           <p:cNvSpPr>
-            <a:spLocks noGrp="1"/>
+            <a:spLocks noGrp="1" noRot="1" noChangeAspect="1"/>
           </p:cNvSpPr>
           <p:nvPr>
             <p:ph type="sldImg" idx="2"/>
@@ -7904,14 +8228,16 @@
             <a:spLocks noGrp="1"/>
           </p:cNvSpPr>
           <p:nvPr>
-            <p:ph type="body" idx="3" sz="quarter"/>
+            <p:ph type="body" sz="quarter" idx="3"/>
           </p:nvPr>
         </p:nvSpPr>
         <p:spPr/>
         <p:txBody>
           <a:bodyPr/>
           <a:lstStyle/>
-          <a:p/>
+          <a:p>
+            <a:endParaRPr/>
+          </a:p>
         </p:txBody>
       </p:sp>
       <p:sp>
@@ -7921,73 +8247,7 @@
             <a:spLocks noGrp="1"/>
           </p:cNvSpPr>
           <p:nvPr>
-            <p:ph type="sldNum" idx="5" sz="quarter"/>
-          </p:nvPr>
-        </p:nvSpPr>
-        <p:spPr/>
-      </p:sp>
-    </p:spTree>
-  </p:cSld>
-  <p:clrMapOvr>
-    <a:masterClrMapping/>
-  </p:clrMapOvr>
-</p:notes>
-</file>
-
-<file path=ppt/notesSlides/notesSlide9.xml><?xml version="1.0" encoding="utf-8"?>
-<p:notes xmlns:a="http://schemas.openxmlformats.org/drawingml/2006/main" xmlns:p="http://schemas.openxmlformats.org/presentationml/2006/main" xmlns:r="http://schemas.openxmlformats.org/officeDocument/2006/relationships">
-  <p:cSld>
-    <p:spTree>
-      <p:nvGrpSpPr>
-        <p:cNvPr id="1" name=""/>
-        <p:cNvGrpSpPr/>
-        <p:nvPr/>
-      </p:nvGrpSpPr>
-      <p:grpSpPr>
-        <a:xfrm>
-          <a:off x="0" y="0"/>
-          <a:ext cx="0" cy="0"/>
-          <a:chOff x="0" y="0"/>
-          <a:chExt cx="0" cy="0"/>
-        </a:xfrm>
-      </p:grpSpPr>
-      <p:sp>
-        <p:nvSpPr>
-          <p:cNvPr id="2" name="Slide Image Placeholder 1"/>
-          <p:cNvSpPr>
-            <a:spLocks noGrp="1"/>
-          </p:cNvSpPr>
-          <p:nvPr>
-            <p:ph type="sldImg" idx="2"/>
-          </p:nvPr>
-        </p:nvSpPr>
-        <p:spPr/>
-      </p:sp>
-      <p:sp>
-        <p:nvSpPr>
-          <p:cNvPr id="3" name="Notes Placeholder 2"/>
-          <p:cNvSpPr>
-            <a:spLocks noGrp="1"/>
-          </p:cNvSpPr>
-          <p:nvPr>
-            <p:ph type="body" idx="3" sz="quarter"/>
-          </p:nvPr>
-        </p:nvSpPr>
-        <p:spPr/>
-        <p:txBody>
-          <a:bodyPr/>
-          <a:lstStyle/>
-          <a:p/>
-        </p:txBody>
-      </p:sp>
-      <p:sp>
-        <p:nvSpPr>
-          <p:cNvPr id="4" name="Slide Number Placeholder 3"/>
-          <p:cNvSpPr>
-            <a:spLocks noGrp="1"/>
-          </p:cNvSpPr>
-          <p:nvPr>
-            <p:ph type="sldNum" idx="5" sz="quarter"/>
+            <p:ph type="sldNum" sz="quarter" idx="5"/>
           </p:nvPr>
         </p:nvSpPr>
         <p:spPr/>
@@ -8163,7 +8423,7 @@
           <a:p>
             <a:fld id="{1215B1D1-5DE1-47DB-A0E0-D90E014977A8}" type="datetimeFigureOut">
               <a:rPr lang="en-US" smtClean="0"/>
-              <a:t>9/4/2025</a:t>
+              <a:t>9/3/2026</a:t>
             </a:fld>
             <a:endParaRPr lang="en-US"/>
           </a:p>
@@ -8385,7 +8645,7 @@
           <a:p>
             <a:fld id="{1215B1D1-5DE1-47DB-A0E0-D90E014977A8}" type="datetimeFigureOut">
               <a:rPr lang="en-US" smtClean="0"/>
-              <a:t>9/4/2025</a:t>
+              <a:t>9/3/2026</a:t>
             </a:fld>
             <a:endParaRPr lang="en-US"/>
           </a:p>
@@ -8617,7 +8877,7 @@
           <a:p>
             <a:fld id="{1215B1D1-5DE1-47DB-A0E0-D90E014977A8}" type="datetimeFigureOut">
               <a:rPr lang="en-US" smtClean="0"/>
-              <a:t>9/4/2025</a:t>
+              <a:t>9/3/2026</a:t>
             </a:fld>
             <a:endParaRPr lang="en-US"/>
           </a:p>
@@ -9079,7 +9339,7 @@
           <a:p>
             <a:fld id="{1215B1D1-5DE1-47DB-A0E0-D90E014977A8}" type="datetimeFigureOut">
               <a:rPr lang="en-US" smtClean="0"/>
-              <a:t>9/4/2025</a:t>
+              <a:t>9/3/2026</a:t>
             </a:fld>
             <a:endParaRPr lang="en-US"/>
           </a:p>
@@ -9445,7 +9705,7 @@
             <a:fld id="{1215B1D1-5DE1-47DB-A0E0-D90E014977A8}" type="datetimeFigureOut">
               <a:rPr lang="en-US" smtClean="0"/>
               <a:pPr/>
-              <a:t>9/4/2025</a:t>
+              <a:t>9/3/2026</a:t>
             </a:fld>
             <a:endParaRPr lang="en-US"/>
           </a:p>
@@ -9979,7 +10239,7 @@
             <a:fld id="{1215B1D1-5DE1-47DB-A0E0-D90E014977A8}" type="datetimeFigureOut">
               <a:rPr lang="en-US" smtClean="0"/>
               <a:pPr/>
-              <a:t>9/4/2025</a:t>
+              <a:t>9/3/2026</a:t>
             </a:fld>
             <a:endParaRPr lang="en-US"/>
           </a:p>
@@ -10174,7 +10434,7 @@
             <a:fld id="{1215B1D1-5DE1-47DB-A0E0-D90E014977A8}" type="datetimeFigureOut">
               <a:rPr lang="en-US" smtClean="0"/>
               <a:pPr/>
-              <a:t>9/4/2025</a:t>
+              <a:t>9/3/2026</a:t>
             </a:fld>
             <a:endParaRPr lang="en-US"/>
           </a:p>
@@ -10326,7 +10586,7 @@
           <a:p>
             <a:fld id="{1215B1D1-5DE1-47DB-A0E0-D90E014977A8}" type="datetimeFigureOut">
               <a:rPr lang="en-US" smtClean="0"/>
-              <a:t>9/4/2025</a:t>
+              <a:t>9/3/2026</a:t>
             </a:fld>
             <a:endParaRPr lang="en-US"/>
           </a:p>
@@ -10661,7 +10921,7 @@
           <a:p>
             <a:fld id="{1215B1D1-5DE1-47DB-A0E0-D90E014977A8}" type="datetimeFigureOut">
               <a:rPr lang="en-US" smtClean="0"/>
-              <a:t>9/4/2025</a:t>
+              <a:t>9/3/2026</a:t>
             </a:fld>
             <a:endParaRPr lang="en-US"/>
           </a:p>
@@ -10973,7 +11233,7 @@
           <a:p>
             <a:fld id="{1215B1D1-5DE1-47DB-A0E0-D90E014977A8}" type="datetimeFigureOut">
               <a:rPr lang="en-US" smtClean="0"/>
-              <a:t>9/4/2025</a:t>
+              <a:t>9/3/2026</a:t>
             </a:fld>
             <a:endParaRPr lang="en-US"/>
           </a:p>
@@ -11494,7 +11754,7 @@
 </file>
 
 <file path=ppt/slides/slide1.xml><?xml version="1.0" encoding="utf-8"?>
-<p:sld xmlns:a="http://schemas.openxmlformats.org/drawingml/2006/main" xmlns:p="http://schemas.openxmlformats.org/presentationml/2006/main" xmlns:r="http://schemas.openxmlformats.org/officeDocument/2006/relationships">
+<p:sld xmlns:a="http://schemas.openxmlformats.org/drawingml/2006/main" xmlns:r="http://schemas.openxmlformats.org/officeDocument/2006/relationships" xmlns:p="http://schemas.openxmlformats.org/presentationml/2006/main">
   <p:cSld>
     <p:spTree>
       <p:nvGrpSpPr>
@@ -11502,7 +11762,14 @@
         <p:cNvGrpSpPr/>
         <p:nvPr/>
       </p:nvGrpSpPr>
-      <p:grpSpPr/>
+      <p:grpSpPr>
+        <a:xfrm>
+          <a:off x="0" y="0"/>
+          <a:ext cx="0" cy="0"/>
+          <a:chOff x="0" y="0"/>
+          <a:chExt cx="0" cy="0"/>
+        </a:xfrm>
+      </p:grpSpPr>
       <p:sp>
         <p:nvSpPr>
           <p:cNvPr id="2" name="TextBox 1"/>
@@ -11520,7 +11787,7 @@
           <a:noFill/>
         </p:spPr>
         <p:txBody>
-          <a:bodyPr wrap="square" lIns="36576" rIns="36576" tIns="36576" bIns="36576" anchor="ctr">
+          <a:bodyPr wrap="square" lIns="36576" tIns="36576" rIns="36576" bIns="36576" anchor="ctr">
             <a:spAutoFit/>
           </a:bodyPr>
           <a:lstStyle/>
@@ -11562,7 +11829,7 @@
           <a:noFill/>
         </p:spPr>
         <p:txBody>
-          <a:bodyPr wrap="square" lIns="36576" rIns="36576" tIns="36576" bIns="36576" anchor="ctr">
+          <a:bodyPr wrap="square" lIns="36576" tIns="36576" rIns="36576" bIns="36576" anchor="ctr">
             <a:spAutoFit/>
           </a:bodyPr>
           <a:lstStyle/>
@@ -11604,7 +11871,7 @@
           <a:noFill/>
         </p:spPr>
         <p:txBody>
-          <a:bodyPr wrap="square" lIns="36576" rIns="36576" tIns="36576" bIns="36576" anchor="t">
+          <a:bodyPr wrap="square" lIns="36576" tIns="36576" rIns="36576" bIns="36576" anchor="t">
             <a:spAutoFit/>
           </a:bodyPr>
           <a:lstStyle/>
@@ -11646,7 +11913,7 @@
           <a:noFill/>
         </p:spPr>
         <p:txBody>
-          <a:bodyPr wrap="square" lIns="36576" rIns="36576" tIns="36576" bIns="36576" anchor="t">
+          <a:bodyPr wrap="square" lIns="36576" tIns="36576" rIns="36576" bIns="36576" anchor="t">
             <a:spAutoFit/>
           </a:bodyPr>
           <a:lstStyle/>
@@ -11680,7 +11947,7 @@
 </file>
 
 <file path=ppt/slides/slide10.xml><?xml version="1.0" encoding="utf-8"?>
-<p:sld xmlns:a="http://schemas.openxmlformats.org/drawingml/2006/main" xmlns:p="http://schemas.openxmlformats.org/presentationml/2006/main" xmlns:r="http://schemas.openxmlformats.org/officeDocument/2006/relationships">
+<p:sld xmlns:a="http://schemas.openxmlformats.org/drawingml/2006/main" xmlns:r="http://schemas.openxmlformats.org/officeDocument/2006/relationships" xmlns:p="http://schemas.openxmlformats.org/presentationml/2006/main">
   <p:cSld>
     <p:spTree>
       <p:nvGrpSpPr>
@@ -11688,7 +11955,14 @@
         <p:cNvGrpSpPr/>
         <p:nvPr/>
       </p:nvGrpSpPr>
-      <p:grpSpPr/>
+      <p:grpSpPr>
+        <a:xfrm>
+          <a:off x="0" y="0"/>
+          <a:ext cx="0" cy="0"/>
+          <a:chOff x="0" y="0"/>
+          <a:chExt cx="0" cy="0"/>
+        </a:xfrm>
+      </p:grpSpPr>
       <p:sp>
         <p:nvSpPr>
           <p:cNvPr id="2" name="TextBox 1"/>
@@ -11706,7 +11980,7 @@
           <a:noFill/>
         </p:spPr>
         <p:txBody>
-          <a:bodyPr wrap="square" lIns="36576" rIns="36576" tIns="36576" bIns="36576" anchor="ctr">
+          <a:bodyPr wrap="square" lIns="36576" tIns="36576" rIns="36576" bIns="36576" anchor="ctr">
             <a:spAutoFit/>
           </a:bodyPr>
           <a:lstStyle/>
@@ -11748,7 +12022,7 @@
           <a:noFill/>
         </p:spPr>
         <p:txBody>
-          <a:bodyPr wrap="square" lIns="36576" rIns="36576" tIns="36576" bIns="36576" anchor="t">
+          <a:bodyPr wrap="square" lIns="36576" tIns="36576" rIns="36576" bIns="36576" anchor="t">
             <a:spAutoFit/>
           </a:bodyPr>
           <a:lstStyle/>
@@ -11790,7 +12064,7 @@
           <a:noFill/>
         </p:spPr>
         <p:txBody>
-          <a:bodyPr wrap="square" lIns="36576" rIns="36576" tIns="36576" bIns="36576" anchor="ctr">
+          <a:bodyPr wrap="square" lIns="36576" tIns="36576" rIns="36576" bIns="36576" anchor="ctr">
             <a:spAutoFit/>
           </a:bodyPr>
           <a:lstStyle/>
@@ -11832,7 +12106,7 @@
           <a:noFill/>
         </p:spPr>
         <p:txBody>
-          <a:bodyPr wrap="square" lIns="36576" rIns="36576" tIns="36576" bIns="36576" anchor="t">
+          <a:bodyPr wrap="square" lIns="36576" tIns="36576" rIns="36576" bIns="36576" anchor="t">
             <a:spAutoFit/>
           </a:bodyPr>
           <a:lstStyle/>
@@ -11874,7 +12148,7 @@
           <a:noFill/>
         </p:spPr>
         <p:txBody>
-          <a:bodyPr wrap="square" lIns="36576" rIns="36576" tIns="36576" bIns="36576" anchor="t">
+          <a:bodyPr wrap="square" lIns="36576" tIns="36576" rIns="36576" bIns="36576" anchor="t">
             <a:spAutoFit/>
           </a:bodyPr>
           <a:lstStyle/>
@@ -11916,7 +12190,7 @@
           <a:noFill/>
         </p:spPr>
         <p:txBody>
-          <a:bodyPr wrap="square" lIns="36576" rIns="36576" tIns="36576" bIns="36576" anchor="t">
+          <a:bodyPr wrap="square" lIns="36576" tIns="36576" rIns="36576" bIns="36576" anchor="t">
             <a:spAutoFit/>
           </a:bodyPr>
           <a:lstStyle/>
@@ -11950,7 +12224,7 @@
 </file>
 
 <file path=ppt/slides/slide11.xml><?xml version="1.0" encoding="utf-8"?>
-<p:sld xmlns:a="http://schemas.openxmlformats.org/drawingml/2006/main" xmlns:p="http://schemas.openxmlformats.org/presentationml/2006/main" xmlns:r="http://schemas.openxmlformats.org/officeDocument/2006/relationships">
+<p:sld xmlns:a="http://schemas.openxmlformats.org/drawingml/2006/main" xmlns:r="http://schemas.openxmlformats.org/officeDocument/2006/relationships" xmlns:p="http://schemas.openxmlformats.org/presentationml/2006/main">
   <p:cSld>
     <p:spTree>
       <p:nvGrpSpPr>
@@ -11958,7 +12232,14 @@
         <p:cNvGrpSpPr/>
         <p:nvPr/>
       </p:nvGrpSpPr>
-      <p:grpSpPr/>
+      <p:grpSpPr>
+        <a:xfrm>
+          <a:off x="0" y="0"/>
+          <a:ext cx="0" cy="0"/>
+          <a:chOff x="0" y="0"/>
+          <a:chExt cx="0" cy="0"/>
+        </a:xfrm>
+      </p:grpSpPr>
       <p:sp>
         <p:nvSpPr>
           <p:cNvPr id="2" name="TextBox 1"/>
@@ -11976,7 +12257,7 @@
           <a:noFill/>
         </p:spPr>
         <p:txBody>
-          <a:bodyPr wrap="square" lIns="36576" rIns="36576" tIns="36576" bIns="36576" anchor="ctr">
+          <a:bodyPr wrap="square" lIns="36576" tIns="36576" rIns="36576" bIns="36576" anchor="ctr">
             <a:spAutoFit/>
           </a:bodyPr>
           <a:lstStyle/>
@@ -12018,7 +12299,7 @@
           <a:noFill/>
         </p:spPr>
         <p:txBody>
-          <a:bodyPr wrap="square" lIns="36576" rIns="36576" tIns="36576" bIns="36576" anchor="t">
+          <a:bodyPr wrap="square" lIns="36576" tIns="36576" rIns="36576" bIns="36576" anchor="t">
             <a:spAutoFit/>
           </a:bodyPr>
           <a:lstStyle/>
@@ -12060,7 +12341,7 @@
           <a:noFill/>
         </p:spPr>
         <p:txBody>
-          <a:bodyPr wrap="square" lIns="36576" rIns="36576" tIns="36576" bIns="36576" anchor="ctr">
+          <a:bodyPr wrap="square" lIns="36576" tIns="36576" rIns="36576" bIns="36576" anchor="ctr">
             <a:spAutoFit/>
           </a:bodyPr>
           <a:lstStyle/>
@@ -12125,6 +12406,7 @@
           <a:lstStyle/>
           <a:p>
             <a:pPr algn="ctr"/>
+            <a:endParaRPr/>
           </a:p>
         </p:txBody>
       </p:sp>
@@ -12168,6 +12450,7 @@
           <a:lstStyle/>
           <a:p>
             <a:pPr algn="ctr"/>
+            <a:endParaRPr/>
           </a:p>
         </p:txBody>
       </p:sp>
@@ -12188,7 +12471,7 @@
           <a:noFill/>
         </p:spPr>
         <p:txBody>
-          <a:bodyPr wrap="square" lIns="36576" rIns="36576" tIns="36576" bIns="36576" anchor="ctr">
+          <a:bodyPr wrap="square" lIns="36576" tIns="36576" rIns="36576" bIns="36576" anchor="ctr">
             <a:spAutoFit/>
           </a:bodyPr>
           <a:lstStyle/>
@@ -12230,7 +12513,7 @@
           <a:noFill/>
         </p:spPr>
         <p:txBody>
-          <a:bodyPr wrap="square" lIns="36576" rIns="36576" tIns="36576" bIns="36576" anchor="ctr">
+          <a:bodyPr wrap="square" lIns="36576" tIns="36576" rIns="36576" bIns="36576" anchor="ctr">
             <a:spAutoFit/>
           </a:bodyPr>
           <a:lstStyle/>
@@ -12295,6 +12578,7 @@
           <a:lstStyle/>
           <a:p>
             <a:pPr algn="ctr"/>
+            <a:endParaRPr/>
           </a:p>
         </p:txBody>
       </p:sp>
@@ -12338,6 +12622,7 @@
           <a:lstStyle/>
           <a:p>
             <a:pPr algn="ctr"/>
+            <a:endParaRPr/>
           </a:p>
         </p:txBody>
       </p:sp>
@@ -12358,7 +12643,7 @@
           <a:noFill/>
         </p:spPr>
         <p:txBody>
-          <a:bodyPr wrap="square" lIns="36576" rIns="36576" tIns="36576" bIns="36576" anchor="ctr">
+          <a:bodyPr wrap="square" lIns="36576" tIns="36576" rIns="36576" bIns="36576" anchor="ctr">
             <a:spAutoFit/>
           </a:bodyPr>
           <a:lstStyle/>
@@ -12425,6 +12710,7 @@
           <a:lstStyle/>
           <a:p>
             <a:pPr algn="ctr"/>
+            <a:endParaRPr/>
           </a:p>
         </p:txBody>
       </p:sp>
@@ -12445,7 +12731,7 @@
           <a:noFill/>
         </p:spPr>
         <p:txBody>
-          <a:bodyPr wrap="square" lIns="36576" rIns="36576" tIns="36576" bIns="36576" anchor="t">
+          <a:bodyPr wrap="square" lIns="36576" tIns="36576" rIns="36576" bIns="36576" anchor="t">
             <a:spAutoFit/>
           </a:bodyPr>
           <a:lstStyle/>
@@ -12487,7 +12773,7 @@
           <a:noFill/>
         </p:spPr>
         <p:txBody>
-          <a:bodyPr wrap="square" lIns="36576" rIns="36576" tIns="36576" bIns="36576" anchor="t">
+          <a:bodyPr wrap="square" lIns="36576" tIns="36576" rIns="36576" bIns="36576" anchor="t">
             <a:spAutoFit/>
           </a:bodyPr>
           <a:lstStyle/>
@@ -12529,7 +12815,7 @@
           <a:noFill/>
         </p:spPr>
         <p:txBody>
-          <a:bodyPr wrap="square" lIns="36576" rIns="36576" tIns="36576" bIns="36576" anchor="t">
+          <a:bodyPr wrap="square" lIns="36576" tIns="36576" rIns="36576" bIns="36576" anchor="t">
             <a:spAutoFit/>
           </a:bodyPr>
           <a:lstStyle/>
@@ -12563,7 +12849,7 @@
 </file>
 
 <file path=ppt/slides/slide12.xml><?xml version="1.0" encoding="utf-8"?>
-<p:sld xmlns:a="http://schemas.openxmlformats.org/drawingml/2006/main" xmlns:p="http://schemas.openxmlformats.org/presentationml/2006/main" xmlns:r="http://schemas.openxmlformats.org/officeDocument/2006/relationships">
+<p:sld xmlns:a="http://schemas.openxmlformats.org/drawingml/2006/main" xmlns:r="http://schemas.openxmlformats.org/officeDocument/2006/relationships" xmlns:p="http://schemas.openxmlformats.org/presentationml/2006/main">
   <p:cSld>
     <p:spTree>
       <p:nvGrpSpPr>
@@ -12571,7 +12857,14 @@
         <p:cNvGrpSpPr/>
         <p:nvPr/>
       </p:nvGrpSpPr>
-      <p:grpSpPr/>
+      <p:grpSpPr>
+        <a:xfrm>
+          <a:off x="0" y="0"/>
+          <a:ext cx="0" cy="0"/>
+          <a:chOff x="0" y="0"/>
+          <a:chExt cx="0" cy="0"/>
+        </a:xfrm>
+      </p:grpSpPr>
       <p:sp>
         <p:nvSpPr>
           <p:cNvPr id="2" name="TextBox 1"/>
@@ -12589,7 +12882,7 @@
           <a:noFill/>
         </p:spPr>
         <p:txBody>
-          <a:bodyPr wrap="square" lIns="36576" rIns="36576" tIns="36576" bIns="36576" anchor="ctr">
+          <a:bodyPr wrap="square" lIns="36576" tIns="36576" rIns="36576" bIns="36576" anchor="ctr">
             <a:spAutoFit/>
           </a:bodyPr>
           <a:lstStyle/>
@@ -12631,7 +12924,7 @@
           <a:noFill/>
         </p:spPr>
         <p:txBody>
-          <a:bodyPr wrap="square" lIns="36576" rIns="36576" tIns="36576" bIns="36576" anchor="t">
+          <a:bodyPr wrap="square" lIns="36576" tIns="36576" rIns="36576" bIns="36576" anchor="t">
             <a:spAutoFit/>
           </a:bodyPr>
           <a:lstStyle/>
@@ -12673,7 +12966,7 @@
           <a:noFill/>
         </p:spPr>
         <p:txBody>
-          <a:bodyPr wrap="square" lIns="45720" rIns="45720" tIns="27432" bIns="27432">
+          <a:bodyPr wrap="square" lIns="45720" tIns="27432" rIns="45720" bIns="27432">
             <a:spAutoFit/>
           </a:bodyPr>
           <a:lstStyle/>
@@ -12831,6 +13124,7 @@
           <a:lstStyle/>
           <a:p>
             <a:pPr algn="ctr"/>
+            <a:endParaRPr/>
           </a:p>
         </p:txBody>
       </p:sp>
@@ -12851,7 +13145,7 @@
           <a:noFill/>
         </p:spPr>
         <p:txBody>
-          <a:bodyPr wrap="square" lIns="36576" rIns="36576" tIns="36576" bIns="36576" anchor="t">
+          <a:bodyPr wrap="square" lIns="36576" tIns="36576" rIns="36576" bIns="36576" anchor="t">
             <a:spAutoFit/>
           </a:bodyPr>
           <a:lstStyle/>
@@ -12885,7 +13179,7 @@
 </file>
 
 <file path=ppt/slides/slide13.xml><?xml version="1.0" encoding="utf-8"?>
-<p:sld xmlns:a="http://schemas.openxmlformats.org/drawingml/2006/main" xmlns:p="http://schemas.openxmlformats.org/presentationml/2006/main" xmlns:r="http://schemas.openxmlformats.org/officeDocument/2006/relationships">
+<p:sld xmlns:a="http://schemas.openxmlformats.org/drawingml/2006/main" xmlns:r="http://schemas.openxmlformats.org/officeDocument/2006/relationships" xmlns:p="http://schemas.openxmlformats.org/presentationml/2006/main">
   <p:cSld>
     <p:spTree>
       <p:nvGrpSpPr>
@@ -12893,7 +13187,14 @@
         <p:cNvGrpSpPr/>
         <p:nvPr/>
       </p:nvGrpSpPr>
-      <p:grpSpPr/>
+      <p:grpSpPr>
+        <a:xfrm>
+          <a:off x="0" y="0"/>
+          <a:ext cx="0" cy="0"/>
+          <a:chOff x="0" y="0"/>
+          <a:chExt cx="0" cy="0"/>
+        </a:xfrm>
+      </p:grpSpPr>
       <p:sp>
         <p:nvSpPr>
           <p:cNvPr id="2" name="TextBox 1"/>
@@ -12911,7 +13212,7 @@
           <a:noFill/>
         </p:spPr>
         <p:txBody>
-          <a:bodyPr wrap="square" lIns="36576" rIns="36576" tIns="36576" bIns="36576" anchor="ctr">
+          <a:bodyPr wrap="square" lIns="36576" tIns="36576" rIns="36576" bIns="36576" anchor="ctr">
             <a:spAutoFit/>
           </a:bodyPr>
           <a:lstStyle/>
@@ -12953,7 +13254,7 @@
           <a:noFill/>
         </p:spPr>
         <p:txBody>
-          <a:bodyPr wrap="square" lIns="36576" rIns="36576" tIns="36576" bIns="36576" anchor="t">
+          <a:bodyPr wrap="square" lIns="36576" tIns="36576" rIns="36576" bIns="36576" anchor="t">
             <a:spAutoFit/>
           </a:bodyPr>
           <a:lstStyle/>
@@ -13020,6 +13321,7 @@
           <a:lstStyle/>
           <a:p>
             <a:pPr algn="ctr"/>
+            <a:endParaRPr/>
           </a:p>
         </p:txBody>
       </p:sp>
@@ -13040,7 +13342,7 @@
           <a:noFill/>
         </p:spPr>
         <p:txBody>
-          <a:bodyPr wrap="square" lIns="36576" rIns="36576" tIns="36576" bIns="36576" anchor="ctr">
+          <a:bodyPr wrap="square" lIns="36576" tIns="36576" rIns="36576" bIns="36576" anchor="ctr">
             <a:spAutoFit/>
           </a:bodyPr>
           <a:lstStyle/>
@@ -13106,6 +13408,7 @@
           <a:lstStyle/>
           <a:p>
             <a:pPr algn="ctr"/>
+            <a:endParaRPr/>
           </a:p>
         </p:txBody>
       </p:sp>
@@ -13149,6 +13452,7 @@
           <a:lstStyle/>
           <a:p>
             <a:pPr algn="ctr"/>
+            <a:endParaRPr/>
           </a:p>
         </p:txBody>
       </p:sp>
@@ -13169,7 +13473,7 @@
           <a:noFill/>
         </p:spPr>
         <p:txBody>
-          <a:bodyPr wrap="square" lIns="36576" rIns="36576" tIns="36576" bIns="36576" anchor="t">
+          <a:bodyPr wrap="square" lIns="36576" tIns="36576" rIns="36576" bIns="36576" anchor="t">
             <a:spAutoFit/>
           </a:bodyPr>
           <a:lstStyle/>
@@ -13211,7 +13515,7 @@
           <a:noFill/>
         </p:spPr>
         <p:txBody>
-          <a:bodyPr wrap="square" lIns="36576" rIns="36576" tIns="36576" bIns="36576" anchor="t">
+          <a:bodyPr wrap="square" lIns="36576" tIns="36576" rIns="36576" bIns="36576" anchor="t">
             <a:spAutoFit/>
           </a:bodyPr>
           <a:lstStyle/>
@@ -13253,7 +13557,7 @@
           <a:noFill/>
         </p:spPr>
         <p:txBody>
-          <a:bodyPr wrap="square" lIns="36576" rIns="36576" tIns="36576" bIns="36576" anchor="t">
+          <a:bodyPr wrap="square" lIns="36576" tIns="36576" rIns="36576" bIns="36576" anchor="t">
             <a:spAutoFit/>
           </a:bodyPr>
           <a:lstStyle/>
@@ -13295,7 +13599,7 @@
           <a:noFill/>
         </p:spPr>
         <p:txBody>
-          <a:bodyPr wrap="square" lIns="36576" rIns="36576" tIns="36576" bIns="36576" anchor="t">
+          <a:bodyPr wrap="square" lIns="36576" tIns="36576" rIns="36576" bIns="36576" anchor="t">
             <a:spAutoFit/>
           </a:bodyPr>
           <a:lstStyle/>
@@ -13337,7 +13641,7 @@
           <a:noFill/>
         </p:spPr>
         <p:txBody>
-          <a:bodyPr wrap="square" lIns="36576" rIns="36576" tIns="36576" bIns="36576" anchor="t">
+          <a:bodyPr wrap="square" lIns="36576" tIns="36576" rIns="36576" bIns="36576" anchor="t">
             <a:spAutoFit/>
           </a:bodyPr>
           <a:lstStyle/>
@@ -13404,6 +13708,7 @@
           <a:lstStyle/>
           <a:p>
             <a:pPr algn="ctr"/>
+            <a:endParaRPr/>
           </a:p>
         </p:txBody>
       </p:sp>
@@ -13424,7 +13729,7 @@
           <a:noFill/>
         </p:spPr>
         <p:txBody>
-          <a:bodyPr wrap="square" lIns="36576" rIns="36576" tIns="36576" bIns="36576" anchor="ctr">
+          <a:bodyPr wrap="square" lIns="36576" tIns="36576" rIns="36576" bIns="36576" anchor="ctr">
             <a:spAutoFit/>
           </a:bodyPr>
           <a:lstStyle/>
@@ -13490,6 +13795,7 @@
           <a:lstStyle/>
           <a:p>
             <a:pPr algn="ctr"/>
+            <a:endParaRPr/>
           </a:p>
         </p:txBody>
       </p:sp>
@@ -13533,6 +13839,7 @@
           <a:lstStyle/>
           <a:p>
             <a:pPr algn="ctr"/>
+            <a:endParaRPr/>
           </a:p>
         </p:txBody>
       </p:sp>
@@ -13553,7 +13860,7 @@
           <a:noFill/>
         </p:spPr>
         <p:txBody>
-          <a:bodyPr wrap="square" lIns="36576" rIns="36576" tIns="36576" bIns="36576" anchor="t">
+          <a:bodyPr wrap="square" lIns="36576" tIns="36576" rIns="36576" bIns="36576" anchor="t">
             <a:spAutoFit/>
           </a:bodyPr>
           <a:lstStyle/>
@@ -13595,7 +13902,7 @@
           <a:noFill/>
         </p:spPr>
         <p:txBody>
-          <a:bodyPr wrap="square" lIns="36576" rIns="36576" tIns="36576" bIns="36576" anchor="t">
+          <a:bodyPr wrap="square" lIns="36576" tIns="36576" rIns="36576" bIns="36576" anchor="t">
             <a:spAutoFit/>
           </a:bodyPr>
           <a:lstStyle/>
@@ -13637,7 +13944,7 @@
           <a:noFill/>
         </p:spPr>
         <p:txBody>
-          <a:bodyPr wrap="square" lIns="36576" rIns="36576" tIns="36576" bIns="36576" anchor="t">
+          <a:bodyPr wrap="square" lIns="36576" tIns="36576" rIns="36576" bIns="36576" anchor="t">
             <a:spAutoFit/>
           </a:bodyPr>
           <a:lstStyle/>
@@ -13679,7 +13986,7 @@
           <a:noFill/>
         </p:spPr>
         <p:txBody>
-          <a:bodyPr wrap="square" lIns="36576" rIns="36576" tIns="36576" bIns="36576" anchor="t">
+          <a:bodyPr wrap="square" lIns="36576" tIns="36576" rIns="36576" bIns="36576" anchor="t">
             <a:spAutoFit/>
           </a:bodyPr>
           <a:lstStyle/>
@@ -13721,7 +14028,7 @@
           <a:noFill/>
         </p:spPr>
         <p:txBody>
-          <a:bodyPr wrap="square" lIns="36576" rIns="36576" tIns="36576" bIns="36576" anchor="t">
+          <a:bodyPr wrap="square" lIns="36576" tIns="36576" rIns="36576" bIns="36576" anchor="t">
             <a:spAutoFit/>
           </a:bodyPr>
           <a:lstStyle/>
@@ -13788,6 +14095,7 @@
           <a:lstStyle/>
           <a:p>
             <a:pPr algn="ctr"/>
+            <a:endParaRPr/>
           </a:p>
         </p:txBody>
       </p:sp>
@@ -13808,7 +14116,7 @@
           <a:noFill/>
         </p:spPr>
         <p:txBody>
-          <a:bodyPr wrap="square" lIns="36576" rIns="36576" tIns="36576" bIns="36576" anchor="ctr">
+          <a:bodyPr wrap="square" lIns="36576" tIns="36576" rIns="36576" bIns="36576" anchor="ctr">
             <a:spAutoFit/>
           </a:bodyPr>
           <a:lstStyle/>
@@ -13874,6 +14182,7 @@
           <a:lstStyle/>
           <a:p>
             <a:pPr algn="ctr"/>
+            <a:endParaRPr/>
           </a:p>
         </p:txBody>
       </p:sp>
@@ -13917,6 +14226,7 @@
           <a:lstStyle/>
           <a:p>
             <a:pPr algn="ctr"/>
+            <a:endParaRPr/>
           </a:p>
         </p:txBody>
       </p:sp>
@@ -13937,7 +14247,7 @@
           <a:noFill/>
         </p:spPr>
         <p:txBody>
-          <a:bodyPr wrap="square" lIns="36576" rIns="36576" tIns="36576" bIns="36576" anchor="t">
+          <a:bodyPr wrap="square" lIns="36576" tIns="36576" rIns="36576" bIns="36576" anchor="t">
             <a:spAutoFit/>
           </a:bodyPr>
           <a:lstStyle/>
@@ -13979,7 +14289,7 @@
           <a:noFill/>
         </p:spPr>
         <p:txBody>
-          <a:bodyPr wrap="square" lIns="36576" rIns="36576" tIns="36576" bIns="36576" anchor="t">
+          <a:bodyPr wrap="square" lIns="36576" tIns="36576" rIns="36576" bIns="36576" anchor="t">
             <a:spAutoFit/>
           </a:bodyPr>
           <a:lstStyle/>
@@ -14021,7 +14331,7 @@
           <a:noFill/>
         </p:spPr>
         <p:txBody>
-          <a:bodyPr wrap="square" lIns="36576" rIns="36576" tIns="36576" bIns="36576" anchor="t">
+          <a:bodyPr wrap="square" lIns="36576" tIns="36576" rIns="36576" bIns="36576" anchor="t">
             <a:spAutoFit/>
           </a:bodyPr>
           <a:lstStyle/>
@@ -14063,7 +14373,7 @@
           <a:noFill/>
         </p:spPr>
         <p:txBody>
-          <a:bodyPr wrap="square" lIns="36576" rIns="36576" tIns="36576" bIns="36576" anchor="t">
+          <a:bodyPr wrap="square" lIns="36576" tIns="36576" rIns="36576" bIns="36576" anchor="t">
             <a:spAutoFit/>
           </a:bodyPr>
           <a:lstStyle/>
@@ -14105,7 +14415,7 @@
           <a:noFill/>
         </p:spPr>
         <p:txBody>
-          <a:bodyPr wrap="square" lIns="36576" rIns="36576" tIns="36576" bIns="36576" anchor="t">
+          <a:bodyPr wrap="square" lIns="36576" tIns="36576" rIns="36576" bIns="36576" anchor="t">
             <a:spAutoFit/>
           </a:bodyPr>
           <a:lstStyle/>
@@ -14147,7 +14457,7 @@
           <a:noFill/>
         </p:spPr>
         <p:txBody>
-          <a:bodyPr wrap="square" lIns="36576" rIns="36576" tIns="36576" bIns="36576" anchor="t">
+          <a:bodyPr wrap="square" lIns="36576" tIns="36576" rIns="36576" bIns="36576" anchor="t">
             <a:spAutoFit/>
           </a:bodyPr>
           <a:lstStyle/>
@@ -14189,7 +14499,7 @@
           <a:noFill/>
         </p:spPr>
         <p:txBody>
-          <a:bodyPr wrap="square" lIns="36576" rIns="36576" tIns="36576" bIns="36576" anchor="t">
+          <a:bodyPr wrap="square" lIns="36576" tIns="36576" rIns="36576" bIns="36576" anchor="t">
             <a:spAutoFit/>
           </a:bodyPr>
           <a:lstStyle/>
@@ -14231,7 +14541,7 @@
           <a:noFill/>
         </p:spPr>
         <p:txBody>
-          <a:bodyPr wrap="square" lIns="36576" rIns="36576" tIns="36576" bIns="36576" anchor="t">
+          <a:bodyPr wrap="square" lIns="36576" tIns="36576" rIns="36576" bIns="36576" anchor="t">
             <a:spAutoFit/>
           </a:bodyPr>
           <a:lstStyle/>
@@ -14265,7 +14575,7 @@
 </file>
 
 <file path=ppt/slides/slide14.xml><?xml version="1.0" encoding="utf-8"?>
-<p:sld xmlns:a="http://schemas.openxmlformats.org/drawingml/2006/main" xmlns:p="http://schemas.openxmlformats.org/presentationml/2006/main" xmlns:r="http://schemas.openxmlformats.org/officeDocument/2006/relationships">
+<p:sld xmlns:a="http://schemas.openxmlformats.org/drawingml/2006/main" xmlns:r="http://schemas.openxmlformats.org/officeDocument/2006/relationships" xmlns:p="http://schemas.openxmlformats.org/presentationml/2006/main">
   <p:cSld>
     <p:spTree>
       <p:nvGrpSpPr>
@@ -14273,7 +14583,14 @@
         <p:cNvGrpSpPr/>
         <p:nvPr/>
       </p:nvGrpSpPr>
-      <p:grpSpPr/>
+      <p:grpSpPr>
+        <a:xfrm>
+          <a:off x="0" y="0"/>
+          <a:ext cx="0" cy="0"/>
+          <a:chOff x="0" y="0"/>
+          <a:chExt cx="0" cy="0"/>
+        </a:xfrm>
+      </p:grpSpPr>
       <p:sp>
         <p:nvSpPr>
           <p:cNvPr id="2" name="TextBox 1"/>
@@ -14291,7 +14608,7 @@
           <a:noFill/>
         </p:spPr>
         <p:txBody>
-          <a:bodyPr wrap="square" lIns="36576" rIns="36576" tIns="36576" bIns="36576" anchor="ctr">
+          <a:bodyPr wrap="square" lIns="36576" tIns="36576" rIns="36576" bIns="36576" anchor="ctr">
             <a:spAutoFit/>
           </a:bodyPr>
           <a:lstStyle/>
@@ -14358,6 +14675,7 @@
           <a:lstStyle/>
           <a:p>
             <a:pPr algn="ctr"/>
+            <a:endParaRPr/>
           </a:p>
         </p:txBody>
       </p:sp>
@@ -14378,7 +14696,7 @@
           <a:noFill/>
         </p:spPr>
         <p:txBody>
-          <a:bodyPr wrap="square" lIns="36576" rIns="36576" tIns="36576" bIns="36576" anchor="t">
+          <a:bodyPr wrap="square" lIns="36576" tIns="36576" rIns="36576" bIns="36576" anchor="t">
             <a:spAutoFit/>
           </a:bodyPr>
           <a:lstStyle/>
@@ -14420,7 +14738,7 @@
           <a:noFill/>
         </p:spPr>
         <p:txBody>
-          <a:bodyPr wrap="square" lIns="36576" rIns="36576" tIns="36576" bIns="36576" anchor="ctr">
+          <a:bodyPr wrap="square" lIns="36576" tIns="36576" rIns="36576" bIns="36576" anchor="ctr">
             <a:spAutoFit/>
           </a:bodyPr>
           <a:lstStyle/>
@@ -14462,7 +14780,7 @@
           <a:noFill/>
         </p:spPr>
         <p:txBody>
-          <a:bodyPr wrap="square" lIns="36576" rIns="36576" tIns="36576" bIns="36576" anchor="t">
+          <a:bodyPr wrap="square" lIns="36576" tIns="36576" rIns="36576" bIns="36576" anchor="t">
             <a:spAutoFit/>
           </a:bodyPr>
           <a:lstStyle/>
@@ -14529,6 +14847,7 @@
           <a:lstStyle/>
           <a:p>
             <a:pPr algn="ctr"/>
+            <a:endParaRPr/>
           </a:p>
         </p:txBody>
       </p:sp>
@@ -14549,7 +14868,7 @@
           <a:noFill/>
         </p:spPr>
         <p:txBody>
-          <a:bodyPr wrap="square" lIns="36576" rIns="36576" tIns="36576" bIns="36576" anchor="t">
+          <a:bodyPr wrap="square" lIns="36576" tIns="36576" rIns="36576" bIns="36576" anchor="t">
             <a:spAutoFit/>
           </a:bodyPr>
           <a:lstStyle/>
@@ -14591,7 +14910,7 @@
           <a:noFill/>
         </p:spPr>
         <p:txBody>
-          <a:bodyPr wrap="square" lIns="36576" rIns="36576" tIns="36576" bIns="36576" anchor="ctr">
+          <a:bodyPr wrap="square" lIns="36576" tIns="36576" rIns="36576" bIns="36576" anchor="ctr">
             <a:spAutoFit/>
           </a:bodyPr>
           <a:lstStyle/>
@@ -14633,7 +14952,7 @@
           <a:noFill/>
         </p:spPr>
         <p:txBody>
-          <a:bodyPr wrap="square" lIns="36576" rIns="36576" tIns="36576" bIns="36576" anchor="t">
+          <a:bodyPr wrap="square" lIns="36576" tIns="36576" rIns="36576" bIns="36576" anchor="t">
             <a:spAutoFit/>
           </a:bodyPr>
           <a:lstStyle/>
@@ -14667,7 +14986,7 @@
 </file>
 
 <file path=ppt/slides/slide15.xml><?xml version="1.0" encoding="utf-8"?>
-<p:sld xmlns:a="http://schemas.openxmlformats.org/drawingml/2006/main" xmlns:p="http://schemas.openxmlformats.org/presentationml/2006/main" xmlns:r="http://schemas.openxmlformats.org/officeDocument/2006/relationships">
+<p:sld xmlns:a="http://schemas.openxmlformats.org/drawingml/2006/main" xmlns:r="http://schemas.openxmlformats.org/officeDocument/2006/relationships" xmlns:p="http://schemas.openxmlformats.org/presentationml/2006/main">
   <p:cSld>
     <p:spTree>
       <p:nvGrpSpPr>
@@ -14675,7 +14994,14 @@
         <p:cNvGrpSpPr/>
         <p:nvPr/>
       </p:nvGrpSpPr>
-      <p:grpSpPr/>
+      <p:grpSpPr>
+        <a:xfrm>
+          <a:off x="0" y="0"/>
+          <a:ext cx="0" cy="0"/>
+          <a:chOff x="0" y="0"/>
+          <a:chExt cx="0" cy="0"/>
+        </a:xfrm>
+      </p:grpSpPr>
       <p:sp>
         <p:nvSpPr>
           <p:cNvPr id="2" name="TextBox 1"/>
@@ -14693,7 +15019,7 @@
           <a:noFill/>
         </p:spPr>
         <p:txBody>
-          <a:bodyPr wrap="square" lIns="36576" rIns="36576" tIns="36576" bIns="36576" anchor="ctr">
+          <a:bodyPr wrap="square" lIns="36576" tIns="36576" rIns="36576" bIns="36576" anchor="ctr">
             <a:spAutoFit/>
           </a:bodyPr>
           <a:lstStyle/>
@@ -14735,7 +15061,7 @@
           <a:noFill/>
         </p:spPr>
         <p:txBody>
-          <a:bodyPr wrap="square" lIns="36576" rIns="36576" tIns="36576" bIns="36576" anchor="t">
+          <a:bodyPr wrap="square" lIns="36576" tIns="36576" rIns="36576" bIns="36576" anchor="t">
             <a:spAutoFit/>
           </a:bodyPr>
           <a:lstStyle/>
@@ -14802,6 +15128,7 @@
           <a:lstStyle/>
           <a:p>
             <a:pPr algn="ctr"/>
+            <a:endParaRPr/>
           </a:p>
         </p:txBody>
       </p:sp>
@@ -14822,7 +15149,7 @@
           <a:noFill/>
         </p:spPr>
         <p:txBody>
-          <a:bodyPr wrap="square" lIns="36576" rIns="36576" tIns="36576" bIns="36576" anchor="t">
+          <a:bodyPr wrap="square" lIns="36576" tIns="36576" rIns="36576" bIns="36576" anchor="t">
             <a:spAutoFit/>
           </a:bodyPr>
           <a:lstStyle/>
@@ -14864,7 +15191,7 @@
           <a:noFill/>
         </p:spPr>
         <p:txBody>
-          <a:bodyPr wrap="square" lIns="36576" rIns="36576" tIns="36576" bIns="36576" anchor="t">
+          <a:bodyPr wrap="square" lIns="36576" tIns="36576" rIns="36576" bIns="36576" anchor="t">
             <a:spAutoFit/>
           </a:bodyPr>
           <a:lstStyle/>
@@ -14931,6 +15258,7 @@
           <a:lstStyle/>
           <a:p>
             <a:pPr algn="ctr"/>
+            <a:endParaRPr/>
           </a:p>
         </p:txBody>
       </p:sp>
@@ -14951,7 +15279,7 @@
           <a:noFill/>
         </p:spPr>
         <p:txBody>
-          <a:bodyPr wrap="square" lIns="36576" rIns="36576" tIns="36576" bIns="36576" anchor="t">
+          <a:bodyPr wrap="square" lIns="36576" tIns="36576" rIns="36576" bIns="36576" anchor="t">
             <a:spAutoFit/>
           </a:bodyPr>
           <a:lstStyle/>
@@ -14993,7 +15321,7 @@
           <a:noFill/>
         </p:spPr>
         <p:txBody>
-          <a:bodyPr wrap="square" lIns="36576" rIns="36576" tIns="36576" bIns="36576" anchor="t">
+          <a:bodyPr wrap="square" lIns="36576" tIns="36576" rIns="36576" bIns="36576" anchor="t">
             <a:spAutoFit/>
           </a:bodyPr>
           <a:lstStyle/>
@@ -15060,6 +15388,7 @@
           <a:lstStyle/>
           <a:p>
             <a:pPr algn="ctr"/>
+            <a:endParaRPr/>
           </a:p>
         </p:txBody>
       </p:sp>
@@ -15080,7 +15409,7 @@
           <a:noFill/>
         </p:spPr>
         <p:txBody>
-          <a:bodyPr wrap="square" lIns="36576" rIns="36576" tIns="36576" bIns="36576" anchor="t">
+          <a:bodyPr wrap="square" lIns="36576" tIns="36576" rIns="36576" bIns="36576" anchor="t">
             <a:spAutoFit/>
           </a:bodyPr>
           <a:lstStyle/>
@@ -15114,7 +15443,7 @@
 </file>
 
 <file path=ppt/slides/slide16.xml><?xml version="1.0" encoding="utf-8"?>
-<p:sld xmlns:a="http://schemas.openxmlformats.org/drawingml/2006/main" xmlns:p="http://schemas.openxmlformats.org/presentationml/2006/main" xmlns:r="http://schemas.openxmlformats.org/officeDocument/2006/relationships">
+<p:sld xmlns:a="http://schemas.openxmlformats.org/drawingml/2006/main" xmlns:r="http://schemas.openxmlformats.org/officeDocument/2006/relationships" xmlns:p="http://schemas.openxmlformats.org/presentationml/2006/main">
   <p:cSld>
     <p:spTree>
       <p:nvGrpSpPr>
@@ -15122,7 +15451,14 @@
         <p:cNvGrpSpPr/>
         <p:nvPr/>
       </p:nvGrpSpPr>
-      <p:grpSpPr/>
+      <p:grpSpPr>
+        <a:xfrm>
+          <a:off x="0" y="0"/>
+          <a:ext cx="0" cy="0"/>
+          <a:chOff x="0" y="0"/>
+          <a:chExt cx="0" cy="0"/>
+        </a:xfrm>
+      </p:grpSpPr>
       <p:sp>
         <p:nvSpPr>
           <p:cNvPr id="2" name="TextBox 1"/>
@@ -15140,7 +15476,7 @@
           <a:noFill/>
         </p:spPr>
         <p:txBody>
-          <a:bodyPr wrap="square" lIns="36576" rIns="36576" tIns="36576" bIns="36576" anchor="ctr">
+          <a:bodyPr wrap="square" lIns="36576" tIns="36576" rIns="36576" bIns="36576" anchor="ctr">
             <a:spAutoFit/>
           </a:bodyPr>
           <a:lstStyle/>
@@ -15182,7 +15518,7 @@
           <a:noFill/>
         </p:spPr>
         <p:txBody>
-          <a:bodyPr wrap="square" lIns="36576" rIns="36576" tIns="36576" bIns="36576" anchor="t">
+          <a:bodyPr wrap="square" lIns="36576" tIns="36576" rIns="36576" bIns="36576" anchor="t">
             <a:spAutoFit/>
           </a:bodyPr>
           <a:lstStyle/>
@@ -15224,7 +15560,7 @@
           <a:noFill/>
         </p:spPr>
         <p:txBody>
-          <a:bodyPr wrap="square" lIns="36576" rIns="36576" tIns="36576" bIns="36576" anchor="ctr">
+          <a:bodyPr wrap="square" lIns="36576" tIns="36576" rIns="36576" bIns="36576" anchor="ctr">
             <a:spAutoFit/>
           </a:bodyPr>
           <a:lstStyle/>
@@ -15266,7 +15602,7 @@
           <a:noFill/>
         </p:spPr>
         <p:txBody>
-          <a:bodyPr wrap="square" lIns="36576" rIns="36576" tIns="36576" bIns="36576" anchor="ctr">
+          <a:bodyPr wrap="square" lIns="36576" tIns="36576" rIns="36576" bIns="36576" anchor="ctr">
             <a:spAutoFit/>
           </a:bodyPr>
           <a:lstStyle/>
@@ -15308,7 +15644,7 @@
           <a:noFill/>
         </p:spPr>
         <p:txBody>
-          <a:bodyPr wrap="square" lIns="36576" rIns="36576" tIns="36576" bIns="36576" anchor="t">
+          <a:bodyPr wrap="square" lIns="36576" tIns="36576" rIns="36576" bIns="36576" anchor="t">
             <a:spAutoFit/>
           </a:bodyPr>
           <a:lstStyle/>
@@ -15350,7 +15686,7 @@
           <a:noFill/>
         </p:spPr>
         <p:txBody>
-          <a:bodyPr wrap="square" lIns="36576" rIns="36576" tIns="36576" bIns="36576" anchor="ctr">
+          <a:bodyPr wrap="square" lIns="36576" tIns="36576" rIns="36576" bIns="36576" anchor="ctr">
             <a:spAutoFit/>
           </a:bodyPr>
           <a:lstStyle/>
@@ -15392,7 +15728,7 @@
           <a:noFill/>
         </p:spPr>
         <p:txBody>
-          <a:bodyPr wrap="square" lIns="36576" rIns="36576" tIns="36576" bIns="36576" anchor="ctr">
+          <a:bodyPr wrap="square" lIns="36576" tIns="36576" rIns="36576" bIns="36576" anchor="ctr">
             <a:spAutoFit/>
           </a:bodyPr>
           <a:lstStyle/>
@@ -15434,7 +15770,7 @@
           <a:noFill/>
         </p:spPr>
         <p:txBody>
-          <a:bodyPr wrap="square" lIns="36576" rIns="36576" tIns="36576" bIns="36576" anchor="t">
+          <a:bodyPr wrap="square" lIns="36576" tIns="36576" rIns="36576" bIns="36576" anchor="t">
             <a:spAutoFit/>
           </a:bodyPr>
           <a:lstStyle/>
@@ -15476,7 +15812,7 @@
           <a:noFill/>
         </p:spPr>
         <p:txBody>
-          <a:bodyPr wrap="square" lIns="36576" rIns="36576" tIns="36576" bIns="36576" anchor="ctr">
+          <a:bodyPr wrap="square" lIns="36576" tIns="36576" rIns="36576" bIns="36576" anchor="ctr">
             <a:spAutoFit/>
           </a:bodyPr>
           <a:lstStyle/>
@@ -15518,7 +15854,7 @@
           <a:noFill/>
         </p:spPr>
         <p:txBody>
-          <a:bodyPr wrap="square" lIns="36576" rIns="36576" tIns="36576" bIns="36576" anchor="ctr">
+          <a:bodyPr wrap="square" lIns="36576" tIns="36576" rIns="36576" bIns="36576" anchor="ctr">
             <a:spAutoFit/>
           </a:bodyPr>
           <a:lstStyle/>
@@ -15560,7 +15896,7 @@
           <a:noFill/>
         </p:spPr>
         <p:txBody>
-          <a:bodyPr wrap="square" lIns="36576" rIns="36576" tIns="36576" bIns="36576" anchor="t">
+          <a:bodyPr wrap="square" lIns="36576" tIns="36576" rIns="36576" bIns="36576" anchor="t">
             <a:spAutoFit/>
           </a:bodyPr>
           <a:lstStyle/>
@@ -15602,7 +15938,7 @@
           <a:noFill/>
         </p:spPr>
         <p:txBody>
-          <a:bodyPr wrap="square" lIns="36576" rIns="36576" tIns="36576" bIns="36576" anchor="ctr">
+          <a:bodyPr wrap="square" lIns="36576" tIns="36576" rIns="36576" bIns="36576" anchor="ctr">
             <a:spAutoFit/>
           </a:bodyPr>
           <a:lstStyle/>
@@ -15644,7 +15980,7 @@
           <a:noFill/>
         </p:spPr>
         <p:txBody>
-          <a:bodyPr wrap="square" lIns="36576" rIns="36576" tIns="36576" bIns="36576" anchor="ctr">
+          <a:bodyPr wrap="square" lIns="36576" tIns="36576" rIns="36576" bIns="36576" anchor="ctr">
             <a:spAutoFit/>
           </a:bodyPr>
           <a:lstStyle/>
@@ -15686,7 +16022,7 @@
           <a:noFill/>
         </p:spPr>
         <p:txBody>
-          <a:bodyPr wrap="square" lIns="36576" rIns="36576" tIns="36576" bIns="36576" anchor="t">
+          <a:bodyPr wrap="square" lIns="36576" tIns="36576" rIns="36576" bIns="36576" anchor="t">
             <a:spAutoFit/>
           </a:bodyPr>
           <a:lstStyle/>
@@ -15728,7 +16064,7 @@
           <a:noFill/>
         </p:spPr>
         <p:txBody>
-          <a:bodyPr wrap="square" lIns="36576" rIns="36576" tIns="36576" bIns="36576" anchor="ctr">
+          <a:bodyPr wrap="square" lIns="36576" tIns="36576" rIns="36576" bIns="36576" anchor="ctr">
             <a:spAutoFit/>
           </a:bodyPr>
           <a:lstStyle/>
@@ -15770,7 +16106,7 @@
           <a:noFill/>
         </p:spPr>
         <p:txBody>
-          <a:bodyPr wrap="square" lIns="36576" rIns="36576" tIns="36576" bIns="36576" anchor="ctr">
+          <a:bodyPr wrap="square" lIns="36576" tIns="36576" rIns="36576" bIns="36576" anchor="ctr">
             <a:spAutoFit/>
           </a:bodyPr>
           <a:lstStyle/>
@@ -15812,7 +16148,7 @@
           <a:noFill/>
         </p:spPr>
         <p:txBody>
-          <a:bodyPr wrap="square" lIns="36576" rIns="36576" tIns="36576" bIns="36576" anchor="t">
+          <a:bodyPr wrap="square" lIns="36576" tIns="36576" rIns="36576" bIns="36576" anchor="t">
             <a:spAutoFit/>
           </a:bodyPr>
           <a:lstStyle/>
@@ -15879,6 +16215,7 @@
           <a:lstStyle/>
           <a:p>
             <a:pPr algn="ctr"/>
+            <a:endParaRPr/>
           </a:p>
         </p:txBody>
       </p:sp>
@@ -15899,7 +16236,7 @@
           <a:noFill/>
         </p:spPr>
         <p:txBody>
-          <a:bodyPr wrap="square" lIns="36576" rIns="36576" tIns="36576" bIns="36576" anchor="t">
+          <a:bodyPr wrap="square" lIns="36576" tIns="36576" rIns="36576" bIns="36576" anchor="t">
             <a:spAutoFit/>
           </a:bodyPr>
           <a:lstStyle/>
@@ -15933,7 +16270,7 @@
 </file>
 
 <file path=ppt/slides/slide17.xml><?xml version="1.0" encoding="utf-8"?>
-<p:sld xmlns:a="http://schemas.openxmlformats.org/drawingml/2006/main" xmlns:p="http://schemas.openxmlformats.org/presentationml/2006/main" xmlns:r="http://schemas.openxmlformats.org/officeDocument/2006/relationships">
+<p:sld xmlns:a="http://schemas.openxmlformats.org/drawingml/2006/main" xmlns:r="http://schemas.openxmlformats.org/officeDocument/2006/relationships" xmlns:p="http://schemas.openxmlformats.org/presentationml/2006/main">
   <p:cSld>
     <p:spTree>
       <p:nvGrpSpPr>
@@ -15941,7 +16278,14 @@
         <p:cNvGrpSpPr/>
         <p:nvPr/>
       </p:nvGrpSpPr>
-      <p:grpSpPr/>
+      <p:grpSpPr>
+        <a:xfrm>
+          <a:off x="0" y="0"/>
+          <a:ext cx="0" cy="0"/>
+          <a:chOff x="0" y="0"/>
+          <a:chExt cx="0" cy="0"/>
+        </a:xfrm>
+      </p:grpSpPr>
       <p:sp>
         <p:nvSpPr>
           <p:cNvPr id="2" name="TextBox 1"/>
@@ -15959,7 +16303,7 @@
           <a:noFill/>
         </p:spPr>
         <p:txBody>
-          <a:bodyPr wrap="square" lIns="36576" rIns="36576" tIns="36576" bIns="36576" anchor="ctr">
+          <a:bodyPr wrap="square" lIns="36576" tIns="36576" rIns="36576" bIns="36576" anchor="ctr">
             <a:spAutoFit/>
           </a:bodyPr>
           <a:lstStyle/>
@@ -16001,7 +16345,7 @@
           <a:noFill/>
         </p:spPr>
         <p:txBody>
-          <a:bodyPr wrap="square" lIns="36576" rIns="36576" tIns="36576" bIns="36576" anchor="t">
+          <a:bodyPr wrap="square" lIns="36576" tIns="36576" rIns="36576" bIns="36576" anchor="t">
             <a:spAutoFit/>
           </a:bodyPr>
           <a:lstStyle/>
@@ -16040,7 +16384,7 @@
         </p:xfrm>
         <a:graphic>
           <a:graphicData uri="http://schemas.openxmlformats.org/drawingml/2006/chart">
-            <c:chart xmlns:c="http://schemas.openxmlformats.org/drawingml/2006/chart" r:id="rId2"/>
+            <c:chart xmlns:c="http://schemas.openxmlformats.org/drawingml/2006/chart" xmlns:r="http://schemas.openxmlformats.org/officeDocument/2006/relationships" r:id="rId3"/>
           </a:graphicData>
         </a:graphic>
       </p:graphicFrame>
@@ -16086,6 +16430,7 @@
           <a:lstStyle/>
           <a:p>
             <a:pPr algn="ctr"/>
+            <a:endParaRPr/>
           </a:p>
         </p:txBody>
       </p:sp>
@@ -16106,7 +16451,7 @@
           <a:noFill/>
         </p:spPr>
         <p:txBody>
-          <a:bodyPr wrap="square" lIns="36576" rIns="36576" tIns="36576" bIns="36576" anchor="ctr">
+          <a:bodyPr wrap="square" lIns="36576" tIns="36576" rIns="36576" bIns="36576" anchor="ctr">
             <a:spAutoFit/>
           </a:bodyPr>
           <a:lstStyle/>
@@ -16149,7 +16494,7 @@
           <a:noFill/>
         </p:spPr>
         <p:txBody>
-          <a:bodyPr wrap="square" lIns="36576" rIns="36576" tIns="36576" bIns="36576" anchor="ctr">
+          <a:bodyPr wrap="square" lIns="36576" tIns="36576" rIns="36576" bIns="36576" anchor="ctr">
             <a:spAutoFit/>
           </a:bodyPr>
           <a:lstStyle/>
@@ -16192,7 +16537,7 @@
           <a:noFill/>
         </p:spPr>
         <p:txBody>
-          <a:bodyPr wrap="square" lIns="36576" rIns="36576" tIns="36576" bIns="36576" anchor="t">
+          <a:bodyPr wrap="square" lIns="36576" tIns="36576" rIns="36576" bIns="36576" anchor="t">
             <a:spAutoFit/>
           </a:bodyPr>
           <a:lstStyle/>
@@ -16235,7 +16580,7 @@
           <a:noFill/>
         </p:spPr>
         <p:txBody>
-          <a:bodyPr wrap="square" lIns="36576" rIns="36576" tIns="36576" bIns="36576" anchor="t">
+          <a:bodyPr wrap="square" lIns="36576" tIns="36576" rIns="36576" bIns="36576" anchor="t">
             <a:spAutoFit/>
           </a:bodyPr>
           <a:lstStyle/>
@@ -16254,7 +16599,7 @@
                   <a:srgbClr val="4B4B4B"/>
                 </a:solidFill>
                 <a:latin typeface="Cambria"/>
-                <a:hlinkClick r:id="rId3"/>
+                <a:hlinkClick r:id="rId4"/>
               </a:rPr>
               <a:t>Source: Stanford Digital Economy Lab Canaries Dashboard, vintage August 12, 2026</a:t>
             </a:r>
@@ -16270,7 +16615,7 @@
 </file>
 
 <file path=ppt/slides/slide18.xml><?xml version="1.0" encoding="utf-8"?>
-<p:sld xmlns:a="http://schemas.openxmlformats.org/drawingml/2006/main" xmlns:p="http://schemas.openxmlformats.org/presentationml/2006/main" xmlns:r="http://schemas.openxmlformats.org/officeDocument/2006/relationships">
+<p:sld xmlns:a="http://schemas.openxmlformats.org/drawingml/2006/main" xmlns:r="http://schemas.openxmlformats.org/officeDocument/2006/relationships" xmlns:p="http://schemas.openxmlformats.org/presentationml/2006/main">
   <p:cSld>
     <p:spTree>
       <p:nvGrpSpPr>
@@ -16278,7 +16623,14 @@
         <p:cNvGrpSpPr/>
         <p:nvPr/>
       </p:nvGrpSpPr>
-      <p:grpSpPr/>
+      <p:grpSpPr>
+        <a:xfrm>
+          <a:off x="0" y="0"/>
+          <a:ext cx="0" cy="0"/>
+          <a:chOff x="0" y="0"/>
+          <a:chExt cx="0" cy="0"/>
+        </a:xfrm>
+      </p:grpSpPr>
       <p:sp>
         <p:nvSpPr>
           <p:cNvPr id="2" name="TextBox 1"/>
@@ -16296,7 +16648,7 @@
           <a:noFill/>
         </p:spPr>
         <p:txBody>
-          <a:bodyPr wrap="square" lIns="36576" rIns="36576" tIns="36576" bIns="36576" anchor="ctr">
+          <a:bodyPr wrap="square" lIns="36576" tIns="36576" rIns="36576" bIns="36576" anchor="ctr">
             <a:spAutoFit/>
           </a:bodyPr>
           <a:lstStyle/>
@@ -16338,7 +16690,7 @@
           <a:noFill/>
         </p:spPr>
         <p:txBody>
-          <a:bodyPr wrap="square" lIns="36576" rIns="36576" tIns="36576" bIns="36576" anchor="t">
+          <a:bodyPr wrap="square" lIns="36576" tIns="36576" rIns="36576" bIns="36576" anchor="t">
             <a:spAutoFit/>
           </a:bodyPr>
           <a:lstStyle/>
@@ -16380,7 +16732,7 @@
           <a:noFill/>
         </p:spPr>
         <p:txBody>
-          <a:bodyPr wrap="square" lIns="36576" rIns="36576" tIns="36576" bIns="36576" anchor="t">
+          <a:bodyPr wrap="square" lIns="36576" tIns="36576" rIns="36576" bIns="36576" anchor="t">
             <a:spAutoFit/>
           </a:bodyPr>
           <a:lstStyle/>
@@ -16419,7 +16771,7 @@
         </p:xfrm>
         <a:graphic>
           <a:graphicData uri="http://schemas.openxmlformats.org/drawingml/2006/chart">
-            <c:chart xmlns:c="http://schemas.openxmlformats.org/drawingml/2006/chart" r:id="rId2"/>
+            <c:chart xmlns:c="http://schemas.openxmlformats.org/drawingml/2006/chart" xmlns:r="http://schemas.openxmlformats.org/officeDocument/2006/relationships" r:id="rId3"/>
           </a:graphicData>
         </a:graphic>
       </p:graphicFrame>
@@ -16440,7 +16792,7 @@
           <a:noFill/>
         </p:spPr>
         <p:txBody>
-          <a:bodyPr wrap="square" lIns="36576" rIns="36576" tIns="36576" bIns="36576" anchor="t">
+          <a:bodyPr wrap="square" lIns="36576" tIns="36576" rIns="36576" bIns="36576" anchor="t">
             <a:spAutoFit/>
           </a:bodyPr>
           <a:lstStyle/>
@@ -16479,7 +16831,7 @@
         </p:xfrm>
         <a:graphic>
           <a:graphicData uri="http://schemas.openxmlformats.org/drawingml/2006/chart">
-            <c:chart xmlns:c="http://schemas.openxmlformats.org/drawingml/2006/chart" r:id="rId3"/>
+            <c:chart xmlns:c="http://schemas.openxmlformats.org/drawingml/2006/chart" xmlns:r="http://schemas.openxmlformats.org/officeDocument/2006/relationships" r:id="rId4"/>
           </a:graphicData>
         </a:graphic>
       </p:graphicFrame>
@@ -16500,7 +16852,7 @@
           <a:noFill/>
         </p:spPr>
         <p:txBody>
-          <a:bodyPr wrap="square" lIns="36576" rIns="36576" tIns="36576" bIns="36576" anchor="t">
+          <a:bodyPr wrap="square" lIns="36576" tIns="36576" rIns="36576" bIns="36576" anchor="t">
             <a:spAutoFit/>
           </a:bodyPr>
           <a:lstStyle/>
@@ -16539,7 +16891,7 @@
         </p:xfrm>
         <a:graphic>
           <a:graphicData uri="http://schemas.openxmlformats.org/drawingml/2006/chart">
-            <c:chart xmlns:c="http://schemas.openxmlformats.org/drawingml/2006/chart" r:id="rId4"/>
+            <c:chart xmlns:c="http://schemas.openxmlformats.org/drawingml/2006/chart" xmlns:r="http://schemas.openxmlformats.org/officeDocument/2006/relationships" r:id="rId5"/>
           </a:graphicData>
         </a:graphic>
       </p:graphicFrame>
@@ -16560,7 +16912,7 @@
           <a:noFill/>
         </p:spPr>
         <p:txBody>
-          <a:bodyPr wrap="square" lIns="36576" rIns="36576" tIns="36576" bIns="36576" anchor="t">
+          <a:bodyPr wrap="square" lIns="36576" tIns="36576" rIns="36576" bIns="36576" anchor="t">
             <a:spAutoFit/>
           </a:bodyPr>
           <a:lstStyle/>
@@ -16599,7 +16951,7 @@
         </p:xfrm>
         <a:graphic>
           <a:graphicData uri="http://schemas.openxmlformats.org/drawingml/2006/chart">
-            <c:chart xmlns:c="http://schemas.openxmlformats.org/drawingml/2006/chart" r:id="rId5"/>
+            <c:chart xmlns:c="http://schemas.openxmlformats.org/drawingml/2006/chart" xmlns:r="http://schemas.openxmlformats.org/officeDocument/2006/relationships" r:id="rId6"/>
           </a:graphicData>
         </a:graphic>
       </p:graphicFrame>
@@ -16620,7 +16972,7 @@
           <a:noFill/>
         </p:spPr>
         <p:txBody>
-          <a:bodyPr wrap="square" lIns="36576" rIns="36576" tIns="36576" bIns="36576" anchor="t">
+          <a:bodyPr wrap="square" lIns="36576" tIns="36576" rIns="36576" bIns="36576" anchor="t">
             <a:spAutoFit/>
           </a:bodyPr>
           <a:lstStyle/>
@@ -16659,7 +17011,7 @@
         </p:xfrm>
         <a:graphic>
           <a:graphicData uri="http://schemas.openxmlformats.org/drawingml/2006/chart">
-            <c:chart xmlns:c="http://schemas.openxmlformats.org/drawingml/2006/chart" r:id="rId6"/>
+            <c:chart xmlns:c="http://schemas.openxmlformats.org/drawingml/2006/chart" xmlns:r="http://schemas.openxmlformats.org/officeDocument/2006/relationships" r:id="rId7"/>
           </a:graphicData>
         </a:graphic>
       </p:graphicFrame>
@@ -16680,7 +17032,7 @@
           <a:noFill/>
         </p:spPr>
         <p:txBody>
-          <a:bodyPr wrap="square" lIns="36576" rIns="36576" tIns="36576" bIns="36576" anchor="t">
+          <a:bodyPr wrap="square" lIns="36576" tIns="36576" rIns="36576" bIns="36576" anchor="t">
             <a:spAutoFit/>
           </a:bodyPr>
           <a:lstStyle/>
@@ -16719,7 +17071,7 @@
         </p:xfrm>
         <a:graphic>
           <a:graphicData uri="http://schemas.openxmlformats.org/drawingml/2006/chart">
-            <c:chart xmlns:c="http://schemas.openxmlformats.org/drawingml/2006/chart" r:id="rId7"/>
+            <c:chart xmlns:c="http://schemas.openxmlformats.org/drawingml/2006/chart" xmlns:r="http://schemas.openxmlformats.org/officeDocument/2006/relationships" r:id="rId8"/>
           </a:graphicData>
         </a:graphic>
       </p:graphicFrame>
@@ -16740,7 +17092,7 @@
           <a:noFill/>
         </p:spPr>
         <p:txBody>
-          <a:bodyPr wrap="square" lIns="36576" rIns="36576" tIns="36576" bIns="36576" anchor="t">
+          <a:bodyPr wrap="square" lIns="36576" tIns="36576" rIns="36576" bIns="36576" anchor="t">
             <a:spAutoFit/>
           </a:bodyPr>
           <a:lstStyle/>
@@ -16782,7 +17134,7 @@
           <a:noFill/>
         </p:spPr>
         <p:txBody>
-          <a:bodyPr wrap="square" lIns="36576" rIns="36576" tIns="36576" bIns="36576" anchor="t">
+          <a:bodyPr wrap="square" lIns="36576" tIns="36576" rIns="36576" bIns="36576" anchor="t">
             <a:spAutoFit/>
           </a:bodyPr>
           <a:lstStyle/>
@@ -16801,7 +17153,7 @@
                   <a:srgbClr val="4B4B4B"/>
                 </a:solidFill>
                 <a:latin typeface="Cambria"/>
-                <a:hlinkClick r:id="rId8"/>
+                <a:hlinkClick r:id="rId9"/>
               </a:rPr>
               <a:t>Source: Stanford Digital Economy Lab Canaries Dashboard, vintage August 12, 2026</a:t>
             </a:r>
@@ -16817,7 +17169,7 @@
 </file>
 
 <file path=ppt/slides/slide19.xml><?xml version="1.0" encoding="utf-8"?>
-<p:sld xmlns:a="http://schemas.openxmlformats.org/drawingml/2006/main" xmlns:p="http://schemas.openxmlformats.org/presentationml/2006/main" xmlns:r="http://schemas.openxmlformats.org/officeDocument/2006/relationships">
+<p:sld xmlns:a="http://schemas.openxmlformats.org/drawingml/2006/main" xmlns:r="http://schemas.openxmlformats.org/officeDocument/2006/relationships" xmlns:p="http://schemas.openxmlformats.org/presentationml/2006/main">
   <p:cSld>
     <p:spTree>
       <p:nvGrpSpPr>
@@ -16825,7 +17177,14 @@
         <p:cNvGrpSpPr/>
         <p:nvPr/>
       </p:nvGrpSpPr>
-      <p:grpSpPr/>
+      <p:grpSpPr>
+        <a:xfrm>
+          <a:off x="0" y="0"/>
+          <a:ext cx="0" cy="0"/>
+          <a:chOff x="0" y="0"/>
+          <a:chExt cx="0" cy="0"/>
+        </a:xfrm>
+      </p:grpSpPr>
       <p:sp>
         <p:nvSpPr>
           <p:cNvPr id="2" name="TextBox 1"/>
@@ -16843,7 +17202,7 @@
           <a:noFill/>
         </p:spPr>
         <p:txBody>
-          <a:bodyPr wrap="square" lIns="36576" rIns="36576" tIns="36576" bIns="36576" anchor="ctr">
+          <a:bodyPr wrap="square" lIns="36576" tIns="36576" rIns="36576" bIns="36576" anchor="ctr">
             <a:spAutoFit/>
           </a:bodyPr>
           <a:lstStyle/>
@@ -16885,7 +17244,7 @@
           <a:noFill/>
         </p:spPr>
         <p:txBody>
-          <a:bodyPr wrap="square" lIns="36576" rIns="36576" tIns="36576" bIns="36576" anchor="t">
+          <a:bodyPr wrap="square" lIns="36576" tIns="36576" rIns="36576" bIns="36576" anchor="t">
             <a:spAutoFit/>
           </a:bodyPr>
           <a:lstStyle/>
@@ -16927,7 +17286,7 @@
           <a:noFill/>
         </p:spPr>
         <p:txBody>
-          <a:bodyPr wrap="square" lIns="45720" rIns="45720" tIns="27432" bIns="27432">
+          <a:bodyPr wrap="square" lIns="45720" tIns="27432" rIns="45720" bIns="27432">
             <a:spAutoFit/>
           </a:bodyPr>
           <a:lstStyle/>
@@ -17041,6 +17400,7 @@
           <a:lstStyle/>
           <a:p>
             <a:pPr algn="ctr"/>
+            <a:endParaRPr/>
           </a:p>
         </p:txBody>
       </p:sp>
@@ -17061,7 +17421,7 @@
           <a:noFill/>
         </p:spPr>
         <p:txBody>
-          <a:bodyPr wrap="square" lIns="36576" rIns="36576" tIns="36576" bIns="36576" anchor="ctr">
+          <a:bodyPr wrap="square" lIns="36576" tIns="36576" rIns="36576" bIns="36576" anchor="ctr">
             <a:spAutoFit/>
           </a:bodyPr>
           <a:lstStyle/>
@@ -17128,6 +17488,7 @@
           <a:lstStyle/>
           <a:p>
             <a:pPr algn="ctr"/>
+            <a:endParaRPr/>
           </a:p>
         </p:txBody>
       </p:sp>
@@ -17148,7 +17509,7 @@
           <a:noFill/>
         </p:spPr>
         <p:txBody>
-          <a:bodyPr wrap="square" lIns="36576" rIns="36576" tIns="36576" bIns="36576" anchor="t">
+          <a:bodyPr wrap="square" lIns="36576" tIns="36576" rIns="36576" bIns="36576" anchor="t">
             <a:spAutoFit/>
           </a:bodyPr>
           <a:lstStyle/>
@@ -17190,7 +17551,7 @@
           <a:noFill/>
         </p:spPr>
         <p:txBody>
-          <a:bodyPr wrap="square" lIns="36576" rIns="36576" tIns="36576" bIns="36576" anchor="ctr">
+          <a:bodyPr wrap="square" lIns="36576" tIns="36576" rIns="36576" bIns="36576" anchor="ctr">
             <a:spAutoFit/>
           </a:bodyPr>
           <a:lstStyle/>
@@ -17257,6 +17618,7 @@
           <a:lstStyle/>
           <a:p>
             <a:pPr algn="ctr"/>
+            <a:endParaRPr/>
           </a:p>
         </p:txBody>
       </p:sp>
@@ -17277,7 +17639,7 @@
           <a:noFill/>
         </p:spPr>
         <p:txBody>
-          <a:bodyPr wrap="square" lIns="36576" rIns="36576" tIns="36576" bIns="36576" anchor="t">
+          <a:bodyPr wrap="square" lIns="36576" tIns="36576" rIns="36576" bIns="36576" anchor="t">
             <a:spAutoFit/>
           </a:bodyPr>
           <a:lstStyle/>
@@ -17319,7 +17681,7 @@
           <a:noFill/>
         </p:spPr>
         <p:txBody>
-          <a:bodyPr wrap="square" lIns="36576" rIns="36576" tIns="36576" bIns="36576" anchor="ctr">
+          <a:bodyPr wrap="square" lIns="36576" tIns="36576" rIns="36576" bIns="36576" anchor="ctr">
             <a:spAutoFit/>
           </a:bodyPr>
           <a:lstStyle/>
@@ -17386,6 +17748,7 @@
           <a:lstStyle/>
           <a:p>
             <a:pPr algn="ctr"/>
+            <a:endParaRPr/>
           </a:p>
         </p:txBody>
       </p:sp>
@@ -17406,7 +17769,7 @@
           <a:noFill/>
         </p:spPr>
         <p:txBody>
-          <a:bodyPr wrap="square" lIns="36576" rIns="36576" tIns="36576" bIns="36576" anchor="t">
+          <a:bodyPr wrap="square" lIns="36576" tIns="36576" rIns="36576" bIns="36576" anchor="t">
             <a:spAutoFit/>
           </a:bodyPr>
           <a:lstStyle/>
@@ -17448,7 +17811,7 @@
           <a:noFill/>
         </p:spPr>
         <p:txBody>
-          <a:bodyPr wrap="square" lIns="36576" rIns="36576" tIns="36576" bIns="36576" anchor="ctr">
+          <a:bodyPr wrap="square" lIns="36576" tIns="36576" rIns="36576" bIns="36576" anchor="ctr">
             <a:spAutoFit/>
           </a:bodyPr>
           <a:lstStyle/>
@@ -17490,7 +17853,7 @@
           <a:noFill/>
         </p:spPr>
         <p:txBody>
-          <a:bodyPr wrap="square" lIns="36576" rIns="36576" tIns="36576" bIns="36576" anchor="t">
+          <a:bodyPr wrap="square" lIns="36576" tIns="36576" rIns="36576" bIns="36576" anchor="t">
             <a:spAutoFit/>
           </a:bodyPr>
           <a:lstStyle/>
@@ -17524,7 +17887,7 @@
 </file>
 
 <file path=ppt/slides/slide2.xml><?xml version="1.0" encoding="utf-8"?>
-<p:sld xmlns:a="http://schemas.openxmlformats.org/drawingml/2006/main" xmlns:p="http://schemas.openxmlformats.org/presentationml/2006/main" xmlns:r="http://schemas.openxmlformats.org/officeDocument/2006/relationships">
+<p:sld xmlns:a="http://schemas.openxmlformats.org/drawingml/2006/main" xmlns:r="http://schemas.openxmlformats.org/officeDocument/2006/relationships" xmlns:p="http://schemas.openxmlformats.org/presentationml/2006/main">
   <p:cSld>
     <p:spTree>
       <p:nvGrpSpPr>
@@ -17532,7 +17895,14 @@
         <p:cNvGrpSpPr/>
         <p:nvPr/>
       </p:nvGrpSpPr>
-      <p:grpSpPr/>
+      <p:grpSpPr>
+        <a:xfrm>
+          <a:off x="0" y="0"/>
+          <a:ext cx="0" cy="0"/>
+          <a:chOff x="0" y="0"/>
+          <a:chExt cx="0" cy="0"/>
+        </a:xfrm>
+      </p:grpSpPr>
       <p:sp>
         <p:nvSpPr>
           <p:cNvPr id="2" name="TextBox 1"/>
@@ -17550,7 +17920,7 @@
           <a:noFill/>
         </p:spPr>
         <p:txBody>
-          <a:bodyPr wrap="square" lIns="36576" rIns="36576" tIns="36576" bIns="36576" anchor="ctr">
+          <a:bodyPr wrap="square" lIns="36576" tIns="36576" rIns="36576" bIns="36576" anchor="ctr">
             <a:spAutoFit/>
           </a:bodyPr>
           <a:lstStyle/>
@@ -17592,7 +17962,7 @@
           <a:noFill/>
         </p:spPr>
         <p:txBody>
-          <a:bodyPr wrap="square" lIns="45720" rIns="45720" tIns="27432" bIns="27432">
+          <a:bodyPr wrap="square" lIns="45720" tIns="27432" rIns="45720" bIns="27432">
             <a:spAutoFit/>
           </a:bodyPr>
           <a:lstStyle/>
@@ -17783,7 +18153,7 @@
           <p:nvPr/>
         </p:nvPicPr>
         <p:blipFill>
-          <a:blip r:embed="rId2"/>
+          <a:blip r:embed="rId3"/>
           <a:stretch>
             <a:fillRect/>
           </a:stretch>
@@ -17807,7 +18177,7 @@
 </file>
 
 <file path=ppt/slides/slide20.xml><?xml version="1.0" encoding="utf-8"?>
-<p:sld xmlns:a="http://schemas.openxmlformats.org/drawingml/2006/main" xmlns:p="http://schemas.openxmlformats.org/presentationml/2006/main" xmlns:r="http://schemas.openxmlformats.org/officeDocument/2006/relationships">
+<p:sld xmlns:a="http://schemas.openxmlformats.org/drawingml/2006/main" xmlns:r="http://schemas.openxmlformats.org/officeDocument/2006/relationships" xmlns:p="http://schemas.openxmlformats.org/presentationml/2006/main">
   <p:cSld>
     <p:spTree>
       <p:nvGrpSpPr>
@@ -17815,7 +18185,14 @@
         <p:cNvGrpSpPr/>
         <p:nvPr/>
       </p:nvGrpSpPr>
-      <p:grpSpPr/>
+      <p:grpSpPr>
+        <a:xfrm>
+          <a:off x="0" y="0"/>
+          <a:ext cx="0" cy="0"/>
+          <a:chOff x="0" y="0"/>
+          <a:chExt cx="0" cy="0"/>
+        </a:xfrm>
+      </p:grpSpPr>
       <p:sp>
         <p:nvSpPr>
           <p:cNvPr id="2" name="TextBox 1"/>
@@ -17833,7 +18210,7 @@
           <a:noFill/>
         </p:spPr>
         <p:txBody>
-          <a:bodyPr wrap="square" lIns="36576" rIns="36576" tIns="36576" bIns="36576" anchor="ctr">
+          <a:bodyPr wrap="square" lIns="36576" tIns="36576" rIns="36576" bIns="36576" anchor="ctr">
             <a:spAutoFit/>
           </a:bodyPr>
           <a:lstStyle/>
@@ -17900,6 +18277,7 @@
           <a:lstStyle/>
           <a:p>
             <a:pPr algn="ctr"/>
+            <a:endParaRPr/>
           </a:p>
         </p:txBody>
       </p:sp>
@@ -17920,7 +18298,7 @@
           <a:noFill/>
         </p:spPr>
         <p:txBody>
-          <a:bodyPr wrap="square" lIns="36576" rIns="36576" tIns="36576" bIns="36576" anchor="t">
+          <a:bodyPr wrap="square" lIns="36576" tIns="36576" rIns="36576" bIns="36576" anchor="t">
             <a:spAutoFit/>
           </a:bodyPr>
           <a:lstStyle/>
@@ -17962,7 +18340,7 @@
           <a:noFill/>
         </p:spPr>
         <p:txBody>
-          <a:bodyPr wrap="square" lIns="36576" rIns="36576" tIns="36576" bIns="36576" anchor="ctr">
+          <a:bodyPr wrap="square" lIns="36576" tIns="36576" rIns="36576" bIns="36576" anchor="ctr">
             <a:spAutoFit/>
           </a:bodyPr>
           <a:lstStyle/>
@@ -18029,6 +18407,7 @@
           <a:lstStyle/>
           <a:p>
             <a:pPr algn="ctr"/>
+            <a:endParaRPr/>
           </a:p>
         </p:txBody>
       </p:sp>
@@ -18049,7 +18428,7 @@
           <a:noFill/>
         </p:spPr>
         <p:txBody>
-          <a:bodyPr wrap="square" lIns="36576" rIns="36576" tIns="36576" bIns="36576" anchor="t">
+          <a:bodyPr wrap="square" lIns="36576" tIns="36576" rIns="36576" bIns="36576" anchor="t">
             <a:spAutoFit/>
           </a:bodyPr>
           <a:lstStyle/>
@@ -18091,7 +18470,7 @@
           <a:noFill/>
         </p:spPr>
         <p:txBody>
-          <a:bodyPr wrap="square" lIns="36576" rIns="36576" tIns="36576" bIns="36576" anchor="ctr">
+          <a:bodyPr wrap="square" lIns="36576" tIns="36576" rIns="36576" bIns="36576" anchor="ctr">
             <a:spAutoFit/>
           </a:bodyPr>
           <a:lstStyle/>
@@ -18133,7 +18512,7 @@
           <a:noFill/>
         </p:spPr>
         <p:txBody>
-          <a:bodyPr wrap="square" lIns="36576" rIns="36576" tIns="36576" bIns="36576" anchor="t">
+          <a:bodyPr wrap="square" lIns="36576" tIns="36576" rIns="36576" bIns="36576" anchor="t">
             <a:spAutoFit/>
           </a:bodyPr>
           <a:lstStyle/>
@@ -18175,7 +18554,7 @@
           <a:noFill/>
         </p:spPr>
         <p:txBody>
-          <a:bodyPr wrap="square" lIns="36576" rIns="36576" tIns="36576" bIns="36576" anchor="t">
+          <a:bodyPr wrap="square" lIns="36576" tIns="36576" rIns="36576" bIns="36576" anchor="t">
             <a:spAutoFit/>
           </a:bodyPr>
           <a:lstStyle/>
@@ -18194,7 +18573,7 @@
                   <a:srgbClr val="4B4B4B"/>
                 </a:solidFill>
                 <a:latin typeface="Cambria"/>
-                <a:hlinkClick r:id="rId2"/>
+                <a:hlinkClick r:id="rId3"/>
               </a:rPr>
               <a:t>Brynjolfsson, Chandar, and Chen (2026), revised paper, abstract and introduction</a:t>
             </a:r>
@@ -18210,7 +18589,7 @@
 </file>
 
 <file path=ppt/slides/slide21.xml><?xml version="1.0" encoding="utf-8"?>
-<p:sld xmlns:a="http://schemas.openxmlformats.org/drawingml/2006/main" xmlns:p="http://schemas.openxmlformats.org/presentationml/2006/main" xmlns:r="http://schemas.openxmlformats.org/officeDocument/2006/relationships">
+<p:sld xmlns:a="http://schemas.openxmlformats.org/drawingml/2006/main" xmlns:r="http://schemas.openxmlformats.org/officeDocument/2006/relationships" xmlns:p="http://schemas.openxmlformats.org/presentationml/2006/main">
   <p:cSld>
     <p:spTree>
       <p:nvGrpSpPr>
@@ -18218,7 +18597,14 @@
         <p:cNvGrpSpPr/>
         <p:nvPr/>
       </p:nvGrpSpPr>
-      <p:grpSpPr/>
+      <p:grpSpPr>
+        <a:xfrm>
+          <a:off x="0" y="0"/>
+          <a:ext cx="0" cy="0"/>
+          <a:chOff x="0" y="0"/>
+          <a:chExt cx="0" cy="0"/>
+        </a:xfrm>
+      </p:grpSpPr>
       <p:sp>
         <p:nvSpPr>
           <p:cNvPr id="2" name="Rectangle 1"/>
@@ -18259,6 +18645,7 @@
           <a:lstStyle/>
           <a:p>
             <a:pPr algn="ctr"/>
+            <a:endParaRPr/>
           </a:p>
         </p:txBody>
       </p:sp>
@@ -18279,7 +18666,7 @@
           <a:noFill/>
         </p:spPr>
         <p:txBody>
-          <a:bodyPr wrap="square" lIns="36576" rIns="36576" tIns="36576" bIns="36576" anchor="t">
+          <a:bodyPr wrap="square" lIns="36576" tIns="36576" rIns="36576" bIns="36576" anchor="t">
             <a:spAutoFit/>
           </a:bodyPr>
           <a:lstStyle/>
@@ -18346,6 +18733,7 @@
           <a:lstStyle/>
           <a:p>
             <a:pPr algn="ctr"/>
+            <a:endParaRPr/>
           </a:p>
         </p:txBody>
       </p:sp>
@@ -18366,7 +18754,7 @@
           <a:noFill/>
         </p:spPr>
         <p:txBody>
-          <a:bodyPr wrap="square" lIns="36576" rIns="36576" tIns="36576" bIns="36576" anchor="ctr">
+          <a:bodyPr wrap="square" lIns="36576" tIns="36576" rIns="36576" bIns="36576" anchor="ctr">
             <a:spAutoFit/>
           </a:bodyPr>
           <a:lstStyle/>
@@ -18433,6 +18821,7 @@
           <a:lstStyle/>
           <a:p>
             <a:pPr algn="ctr"/>
+            <a:endParaRPr/>
           </a:p>
         </p:txBody>
       </p:sp>
@@ -18478,6 +18867,7 @@
           <a:lstStyle/>
           <a:p>
             <a:pPr algn="ctr"/>
+            <a:endParaRPr/>
           </a:p>
         </p:txBody>
       </p:sp>
@@ -18498,7 +18888,7 @@
           <a:noFill/>
         </p:spPr>
         <p:txBody>
-          <a:bodyPr wrap="square" lIns="36576" rIns="36576" tIns="36576" bIns="36576" anchor="ctr">
+          <a:bodyPr wrap="square" lIns="36576" tIns="36576" rIns="36576" bIns="36576" anchor="ctr">
             <a:spAutoFit/>
           </a:bodyPr>
           <a:lstStyle/>
@@ -18565,6 +18955,7 @@
           <a:lstStyle/>
           <a:p>
             <a:pPr algn="ctr"/>
+            <a:endParaRPr/>
           </a:p>
         </p:txBody>
       </p:sp>
@@ -18610,6 +19001,7 @@
           <a:lstStyle/>
           <a:p>
             <a:pPr algn="ctr"/>
+            <a:endParaRPr/>
           </a:p>
         </p:txBody>
       </p:sp>
@@ -18630,7 +19022,7 @@
           <a:noFill/>
         </p:spPr>
         <p:txBody>
-          <a:bodyPr wrap="square" lIns="36576" rIns="36576" tIns="36576" bIns="36576" anchor="ctr">
+          <a:bodyPr wrap="square" lIns="36576" tIns="36576" rIns="36576" bIns="36576" anchor="ctr">
             <a:spAutoFit/>
           </a:bodyPr>
           <a:lstStyle/>
@@ -18697,6 +19089,7 @@
           <a:lstStyle/>
           <a:p>
             <a:pPr algn="ctr"/>
+            <a:endParaRPr/>
           </a:p>
         </p:txBody>
       </p:sp>
@@ -18742,6 +19135,7 @@
           <a:lstStyle/>
           <a:p>
             <a:pPr algn="ctr"/>
+            <a:endParaRPr/>
           </a:p>
         </p:txBody>
       </p:sp>
@@ -18762,7 +19156,7 @@
           <a:noFill/>
         </p:spPr>
         <p:txBody>
-          <a:bodyPr wrap="square" lIns="36576" rIns="36576" tIns="36576" bIns="36576" anchor="ctr">
+          <a:bodyPr wrap="square" lIns="36576" tIns="36576" rIns="36576" bIns="36576" anchor="ctr">
             <a:spAutoFit/>
           </a:bodyPr>
           <a:lstStyle/>
@@ -18829,6 +19223,7 @@
           <a:lstStyle/>
           <a:p>
             <a:pPr algn="ctr"/>
+            <a:endParaRPr/>
           </a:p>
         </p:txBody>
       </p:sp>
@@ -18874,6 +19269,7 @@
           <a:lstStyle/>
           <a:p>
             <a:pPr algn="ctr"/>
+            <a:endParaRPr/>
           </a:p>
         </p:txBody>
       </p:sp>
@@ -18894,7 +19290,7 @@
           <a:noFill/>
         </p:spPr>
         <p:txBody>
-          <a:bodyPr wrap="square" lIns="36576" rIns="36576" tIns="36576" bIns="36576" anchor="ctr">
+          <a:bodyPr wrap="square" lIns="36576" tIns="36576" rIns="36576" bIns="36576" anchor="ctr">
             <a:spAutoFit/>
           </a:bodyPr>
           <a:lstStyle/>
@@ -18961,6 +19357,7 @@
           <a:lstStyle/>
           <a:p>
             <a:pPr algn="ctr"/>
+            <a:endParaRPr/>
           </a:p>
         </p:txBody>
       </p:sp>
@@ -19006,6 +19403,7 @@
           <a:lstStyle/>
           <a:p>
             <a:pPr algn="ctr"/>
+            <a:endParaRPr/>
           </a:p>
         </p:txBody>
       </p:sp>
@@ -19026,7 +19424,7 @@
           <a:noFill/>
         </p:spPr>
         <p:txBody>
-          <a:bodyPr wrap="square" lIns="36576" rIns="36576" tIns="36576" bIns="36576" anchor="ctr">
+          <a:bodyPr wrap="square" lIns="36576" tIns="36576" rIns="36576" bIns="36576" anchor="ctr">
             <a:spAutoFit/>
           </a:bodyPr>
           <a:lstStyle/>
@@ -19093,6 +19491,7 @@
           <a:lstStyle/>
           <a:p>
             <a:pPr algn="ctr"/>
+            <a:endParaRPr/>
           </a:p>
         </p:txBody>
       </p:sp>
@@ -19138,6 +19537,7 @@
           <a:lstStyle/>
           <a:p>
             <a:pPr algn="ctr"/>
+            <a:endParaRPr/>
           </a:p>
         </p:txBody>
       </p:sp>
@@ -19158,7 +19558,7 @@
           <a:noFill/>
         </p:spPr>
         <p:txBody>
-          <a:bodyPr wrap="square" lIns="36576" rIns="36576" tIns="36576" bIns="36576" anchor="ctr">
+          <a:bodyPr wrap="square" lIns="36576" tIns="36576" rIns="36576" bIns="36576" anchor="ctr">
             <a:spAutoFit/>
           </a:bodyPr>
           <a:lstStyle/>
@@ -19225,6 +19625,7 @@
           <a:lstStyle/>
           <a:p>
             <a:pPr algn="ctr"/>
+            <a:endParaRPr/>
           </a:p>
         </p:txBody>
       </p:sp>
@@ -19270,6 +19671,7 @@
           <a:lstStyle/>
           <a:p>
             <a:pPr algn="ctr"/>
+            <a:endParaRPr/>
           </a:p>
         </p:txBody>
       </p:sp>
@@ -19290,7 +19692,7 @@
           <a:noFill/>
         </p:spPr>
         <p:txBody>
-          <a:bodyPr wrap="square" lIns="36576" rIns="36576" tIns="36576" bIns="36576" anchor="ctr">
+          <a:bodyPr wrap="square" lIns="36576" tIns="36576" rIns="36576" bIns="36576" anchor="ctr">
             <a:spAutoFit/>
           </a:bodyPr>
           <a:lstStyle/>
@@ -19332,7 +19734,7 @@
           <a:noFill/>
         </p:spPr>
         <p:txBody>
-          <a:bodyPr wrap="square" lIns="36576" rIns="36576" tIns="36576" bIns="36576" anchor="t">
+          <a:bodyPr wrap="square" lIns="36576" tIns="36576" rIns="36576" bIns="36576" anchor="t">
             <a:spAutoFit/>
           </a:bodyPr>
           <a:lstStyle/>
@@ -19374,7 +19776,7 @@
           <a:noFill/>
         </p:spPr>
         <p:txBody>
-          <a:bodyPr wrap="square" lIns="36576" rIns="36576" tIns="36576" bIns="36576" anchor="t">
+          <a:bodyPr wrap="square" lIns="36576" tIns="36576" rIns="36576" bIns="36576" anchor="t">
             <a:spAutoFit/>
           </a:bodyPr>
           <a:lstStyle/>
@@ -19408,7 +19810,7 @@
 </file>
 
 <file path=ppt/slides/slide22.xml><?xml version="1.0" encoding="utf-8"?>
-<p:sld xmlns:a="http://schemas.openxmlformats.org/drawingml/2006/main" xmlns:p="http://schemas.openxmlformats.org/presentationml/2006/main" xmlns:r="http://schemas.openxmlformats.org/officeDocument/2006/relationships">
+<p:sld xmlns:a="http://schemas.openxmlformats.org/drawingml/2006/main" xmlns:r="http://schemas.openxmlformats.org/officeDocument/2006/relationships" xmlns:p="http://schemas.openxmlformats.org/presentationml/2006/main">
   <p:cSld>
     <p:spTree>
       <p:nvGrpSpPr>
@@ -19416,7 +19818,14 @@
         <p:cNvGrpSpPr/>
         <p:nvPr/>
       </p:nvGrpSpPr>
-      <p:grpSpPr/>
+      <p:grpSpPr>
+        <a:xfrm>
+          <a:off x="0" y="0"/>
+          <a:ext cx="0" cy="0"/>
+          <a:chOff x="0" y="0"/>
+          <a:chExt cx="0" cy="0"/>
+        </a:xfrm>
+      </p:grpSpPr>
       <p:sp>
         <p:nvSpPr>
           <p:cNvPr id="2" name="TextBox 1"/>
@@ -19434,7 +19843,7 @@
           <a:noFill/>
         </p:spPr>
         <p:txBody>
-          <a:bodyPr wrap="square" lIns="36576" rIns="36576" tIns="36576" bIns="36576" anchor="ctr">
+          <a:bodyPr wrap="square" lIns="36576" tIns="36576" rIns="36576" bIns="36576" anchor="ctr">
             <a:spAutoFit/>
           </a:bodyPr>
           <a:lstStyle/>
@@ -19501,6 +19910,7 @@
           <a:lstStyle/>
           <a:p>
             <a:pPr algn="ctr"/>
+            <a:endParaRPr/>
           </a:p>
         </p:txBody>
       </p:sp>
@@ -19521,7 +19931,7 @@
           <a:noFill/>
         </p:spPr>
         <p:txBody>
-          <a:bodyPr wrap="square" lIns="36576" rIns="36576" tIns="36576" bIns="36576" anchor="t">
+          <a:bodyPr wrap="square" lIns="36576" tIns="36576" rIns="36576" bIns="36576" anchor="t">
             <a:spAutoFit/>
           </a:bodyPr>
           <a:lstStyle/>
@@ -19563,7 +19973,7 @@
           <a:noFill/>
         </p:spPr>
         <p:txBody>
-          <a:bodyPr wrap="square" lIns="36576" rIns="36576" tIns="36576" bIns="36576" anchor="t">
+          <a:bodyPr wrap="square" lIns="36576" tIns="36576" rIns="36576" bIns="36576" anchor="t">
             <a:spAutoFit/>
           </a:bodyPr>
           <a:lstStyle/>
@@ -19605,7 +20015,7 @@
           <a:noFill/>
         </p:spPr>
         <p:txBody>
-          <a:bodyPr wrap="square" lIns="36576" rIns="36576" tIns="36576" bIns="36576" anchor="t">
+          <a:bodyPr wrap="square" lIns="36576" tIns="36576" rIns="36576" bIns="36576" anchor="t">
             <a:spAutoFit/>
           </a:bodyPr>
           <a:lstStyle/>
@@ -19672,6 +20082,7 @@
           <a:lstStyle/>
           <a:p>
             <a:pPr algn="ctr"/>
+            <a:endParaRPr/>
           </a:p>
         </p:txBody>
       </p:sp>
@@ -19692,7 +20103,7 @@
           <a:noFill/>
         </p:spPr>
         <p:txBody>
-          <a:bodyPr wrap="square" lIns="36576" rIns="36576" tIns="36576" bIns="36576" anchor="t">
+          <a:bodyPr wrap="square" lIns="36576" tIns="36576" rIns="36576" bIns="36576" anchor="t">
             <a:spAutoFit/>
           </a:bodyPr>
           <a:lstStyle/>
@@ -19734,7 +20145,7 @@
           <a:noFill/>
         </p:spPr>
         <p:txBody>
-          <a:bodyPr wrap="square" lIns="36576" rIns="36576" tIns="36576" bIns="36576" anchor="t">
+          <a:bodyPr wrap="square" lIns="36576" tIns="36576" rIns="36576" bIns="36576" anchor="t">
             <a:spAutoFit/>
           </a:bodyPr>
           <a:lstStyle/>
@@ -19776,7 +20187,7 @@
           <a:noFill/>
         </p:spPr>
         <p:txBody>
-          <a:bodyPr wrap="square" lIns="36576" rIns="36576" tIns="36576" bIns="36576" anchor="t">
+          <a:bodyPr wrap="square" lIns="36576" tIns="36576" rIns="36576" bIns="36576" anchor="t">
             <a:spAutoFit/>
           </a:bodyPr>
           <a:lstStyle/>
@@ -19843,6 +20254,7 @@
           <a:lstStyle/>
           <a:p>
             <a:pPr algn="ctr"/>
+            <a:endParaRPr/>
           </a:p>
         </p:txBody>
       </p:sp>
@@ -19863,7 +20275,7 @@
           <a:noFill/>
         </p:spPr>
         <p:txBody>
-          <a:bodyPr wrap="square" lIns="36576" rIns="36576" tIns="36576" bIns="36576" anchor="t">
+          <a:bodyPr wrap="square" lIns="36576" tIns="36576" rIns="36576" bIns="36576" anchor="t">
             <a:spAutoFit/>
           </a:bodyPr>
           <a:lstStyle/>
@@ -19905,7 +20317,7 @@
           <a:noFill/>
         </p:spPr>
         <p:txBody>
-          <a:bodyPr wrap="square" lIns="36576" rIns="36576" tIns="36576" bIns="36576" anchor="t">
+          <a:bodyPr wrap="square" lIns="36576" tIns="36576" rIns="36576" bIns="36576" anchor="t">
             <a:spAutoFit/>
           </a:bodyPr>
           <a:lstStyle/>
@@ -19947,7 +20359,7 @@
           <a:noFill/>
         </p:spPr>
         <p:txBody>
-          <a:bodyPr wrap="square" lIns="36576" rIns="36576" tIns="36576" bIns="36576" anchor="t">
+          <a:bodyPr wrap="square" lIns="36576" tIns="36576" rIns="36576" bIns="36576" anchor="t">
             <a:spAutoFit/>
           </a:bodyPr>
           <a:lstStyle/>
@@ -20014,6 +20426,7 @@
           <a:lstStyle/>
           <a:p>
             <a:pPr algn="ctr"/>
+            <a:endParaRPr/>
           </a:p>
         </p:txBody>
       </p:sp>
@@ -20034,7 +20447,7 @@
           <a:noFill/>
         </p:spPr>
         <p:txBody>
-          <a:bodyPr wrap="square" lIns="36576" rIns="36576" tIns="36576" bIns="36576" anchor="t">
+          <a:bodyPr wrap="square" lIns="36576" tIns="36576" rIns="36576" bIns="36576" anchor="t">
             <a:spAutoFit/>
           </a:bodyPr>
           <a:lstStyle/>
@@ -20076,7 +20489,7 @@
           <a:noFill/>
         </p:spPr>
         <p:txBody>
-          <a:bodyPr wrap="square" lIns="36576" rIns="36576" tIns="36576" bIns="36576" anchor="t">
+          <a:bodyPr wrap="square" lIns="36576" tIns="36576" rIns="36576" bIns="36576" anchor="t">
             <a:spAutoFit/>
           </a:bodyPr>
           <a:lstStyle/>
@@ -20118,7 +20531,7 @@
           <a:noFill/>
         </p:spPr>
         <p:txBody>
-          <a:bodyPr wrap="square" lIns="36576" rIns="36576" tIns="36576" bIns="36576" anchor="t">
+          <a:bodyPr wrap="square" lIns="36576" tIns="36576" rIns="36576" bIns="36576" anchor="t">
             <a:spAutoFit/>
           </a:bodyPr>
           <a:lstStyle/>
@@ -20185,6 +20598,7 @@
           <a:lstStyle/>
           <a:p>
             <a:pPr algn="ctr"/>
+            <a:endParaRPr/>
           </a:p>
         </p:txBody>
       </p:sp>
@@ -20205,7 +20619,7 @@
           <a:noFill/>
         </p:spPr>
         <p:txBody>
-          <a:bodyPr wrap="square" lIns="36576" rIns="36576" tIns="36576" bIns="36576" anchor="ctr">
+          <a:bodyPr wrap="square" lIns="36576" tIns="36576" rIns="36576" bIns="36576" anchor="ctr">
             <a:spAutoFit/>
           </a:bodyPr>
           <a:lstStyle/>
@@ -20239,7 +20653,7 @@
 </file>
 
 <file path=ppt/slides/slide23.xml><?xml version="1.0" encoding="utf-8"?>
-<p:sld xmlns:a="http://schemas.openxmlformats.org/drawingml/2006/main" xmlns:p="http://schemas.openxmlformats.org/presentationml/2006/main" xmlns:r="http://schemas.openxmlformats.org/officeDocument/2006/relationships">
+<p:sld xmlns:a="http://schemas.openxmlformats.org/drawingml/2006/main" xmlns:r="http://schemas.openxmlformats.org/officeDocument/2006/relationships" xmlns:p="http://schemas.openxmlformats.org/presentationml/2006/main">
   <p:cSld>
     <p:spTree>
       <p:nvGrpSpPr>
@@ -20247,7 +20661,14 @@
         <p:cNvGrpSpPr/>
         <p:nvPr/>
       </p:nvGrpSpPr>
-      <p:grpSpPr/>
+      <p:grpSpPr>
+        <a:xfrm>
+          <a:off x="0" y="0"/>
+          <a:ext cx="0" cy="0"/>
+          <a:chOff x="0" y="0"/>
+          <a:chExt cx="0" cy="0"/>
+        </a:xfrm>
+      </p:grpSpPr>
       <p:sp>
         <p:nvSpPr>
           <p:cNvPr id="2" name="TextBox 1"/>
@@ -20265,7 +20686,7 @@
           <a:noFill/>
         </p:spPr>
         <p:txBody>
-          <a:bodyPr wrap="square" lIns="36576" rIns="36576" tIns="36576" bIns="36576" anchor="ctr">
+          <a:bodyPr wrap="square" lIns="36576" tIns="36576" rIns="36576" bIns="36576" anchor="ctr">
             <a:spAutoFit/>
           </a:bodyPr>
           <a:lstStyle/>
@@ -20307,7 +20728,7 @@
           <a:noFill/>
         </p:spPr>
         <p:txBody>
-          <a:bodyPr wrap="square" lIns="36576" rIns="36576" tIns="36576" bIns="36576" anchor="t">
+          <a:bodyPr wrap="square" lIns="36576" tIns="36576" rIns="36576" bIns="36576" anchor="t">
             <a:spAutoFit/>
           </a:bodyPr>
           <a:lstStyle/>
@@ -20374,6 +20795,7 @@
           <a:lstStyle/>
           <a:p>
             <a:pPr algn="ctr"/>
+            <a:endParaRPr/>
           </a:p>
         </p:txBody>
       </p:sp>
@@ -20394,7 +20816,7 @@
           <a:noFill/>
         </p:spPr>
         <p:txBody>
-          <a:bodyPr wrap="square" lIns="36576" rIns="36576" tIns="36576" bIns="36576" anchor="ctr">
+          <a:bodyPr wrap="square" lIns="36576" tIns="36576" rIns="36576" bIns="36576" anchor="ctr">
             <a:spAutoFit/>
           </a:bodyPr>
           <a:lstStyle/>
@@ -20436,7 +20858,7 @@
           <a:noFill/>
         </p:spPr>
         <p:txBody>
-          <a:bodyPr wrap="square" lIns="36576" rIns="36576" tIns="36576" bIns="36576" anchor="ctr">
+          <a:bodyPr wrap="square" lIns="36576" tIns="36576" rIns="36576" bIns="36576" anchor="ctr">
             <a:spAutoFit/>
           </a:bodyPr>
           <a:lstStyle/>
@@ -20503,6 +20925,7 @@
           <a:lstStyle/>
           <a:p>
             <a:pPr algn="ctr"/>
+            <a:endParaRPr/>
           </a:p>
         </p:txBody>
       </p:sp>
@@ -20523,7 +20946,7 @@
           <a:noFill/>
         </p:spPr>
         <p:txBody>
-          <a:bodyPr wrap="square" lIns="36576" rIns="36576" tIns="36576" bIns="36576" anchor="ctr">
+          <a:bodyPr wrap="square" lIns="36576" tIns="36576" rIns="36576" bIns="36576" anchor="ctr">
             <a:spAutoFit/>
           </a:bodyPr>
           <a:lstStyle/>
@@ -20565,7 +20988,7 @@
           <a:noFill/>
         </p:spPr>
         <p:txBody>
-          <a:bodyPr wrap="square" lIns="36576" rIns="36576" tIns="36576" bIns="36576" anchor="ctr">
+          <a:bodyPr wrap="square" lIns="36576" tIns="36576" rIns="36576" bIns="36576" anchor="ctr">
             <a:spAutoFit/>
           </a:bodyPr>
           <a:lstStyle/>
@@ -20632,6 +21055,7 @@
           <a:lstStyle/>
           <a:p>
             <a:pPr algn="ctr"/>
+            <a:endParaRPr/>
           </a:p>
         </p:txBody>
       </p:sp>
@@ -20652,7 +21076,7 @@
           <a:noFill/>
         </p:spPr>
         <p:txBody>
-          <a:bodyPr wrap="square" lIns="36576" rIns="36576" tIns="36576" bIns="36576" anchor="ctr">
+          <a:bodyPr wrap="square" lIns="36576" tIns="36576" rIns="36576" bIns="36576" anchor="ctr">
             <a:spAutoFit/>
           </a:bodyPr>
           <a:lstStyle/>
@@ -20694,7 +21118,7 @@
           <a:noFill/>
         </p:spPr>
         <p:txBody>
-          <a:bodyPr wrap="square" lIns="36576" rIns="36576" tIns="36576" bIns="36576" anchor="ctr">
+          <a:bodyPr wrap="square" lIns="36576" tIns="36576" rIns="36576" bIns="36576" anchor="ctr">
             <a:spAutoFit/>
           </a:bodyPr>
           <a:lstStyle/>
@@ -20736,7 +21160,7 @@
           <a:noFill/>
         </p:spPr>
         <p:txBody>
-          <a:bodyPr wrap="square" lIns="36576" rIns="36576" tIns="36576" bIns="36576" anchor="t">
+          <a:bodyPr wrap="square" lIns="36576" tIns="36576" rIns="36576" bIns="36576" anchor="t">
             <a:spAutoFit/>
           </a:bodyPr>
           <a:lstStyle/>
@@ -20770,7 +21194,7 @@
 </file>
 
 <file path=ppt/slides/slide24.xml><?xml version="1.0" encoding="utf-8"?>
-<p:sld xmlns:a="http://schemas.openxmlformats.org/drawingml/2006/main" xmlns:p="http://schemas.openxmlformats.org/presentationml/2006/main" xmlns:r="http://schemas.openxmlformats.org/officeDocument/2006/relationships">
+<p:sld xmlns:a="http://schemas.openxmlformats.org/drawingml/2006/main" xmlns:r="http://schemas.openxmlformats.org/officeDocument/2006/relationships" xmlns:p="http://schemas.openxmlformats.org/presentationml/2006/main">
   <p:cSld>
     <p:spTree>
       <p:nvGrpSpPr>
@@ -20778,7 +21202,14 @@
         <p:cNvGrpSpPr/>
         <p:nvPr/>
       </p:nvGrpSpPr>
-      <p:grpSpPr/>
+      <p:grpSpPr>
+        <a:xfrm>
+          <a:off x="0" y="0"/>
+          <a:ext cx="0" cy="0"/>
+          <a:chOff x="0" y="0"/>
+          <a:chExt cx="0" cy="0"/>
+        </a:xfrm>
+      </p:grpSpPr>
       <p:sp>
         <p:nvSpPr>
           <p:cNvPr id="2" name="TextBox 1"/>
@@ -20796,7 +21227,7 @@
           <a:noFill/>
         </p:spPr>
         <p:txBody>
-          <a:bodyPr wrap="square" lIns="36576" rIns="36576" tIns="36576" bIns="36576" anchor="ctr">
+          <a:bodyPr wrap="square" lIns="36576" tIns="36576" rIns="36576" bIns="36576" anchor="ctr">
             <a:spAutoFit/>
           </a:bodyPr>
           <a:lstStyle/>
@@ -20838,7 +21269,7 @@
           <a:noFill/>
         </p:spPr>
         <p:txBody>
-          <a:bodyPr wrap="square" lIns="36576" rIns="36576" tIns="36576" bIns="36576" anchor="t">
+          <a:bodyPr wrap="square" lIns="36576" tIns="36576" rIns="36576" bIns="36576" anchor="t">
             <a:spAutoFit/>
           </a:bodyPr>
           <a:lstStyle/>
@@ -20880,7 +21311,7 @@
           <a:noFill/>
         </p:spPr>
         <p:txBody>
-          <a:bodyPr wrap="square" lIns="36576" rIns="36576" tIns="36576" bIns="36576" anchor="ctr">
+          <a:bodyPr wrap="square" lIns="36576" tIns="36576" rIns="36576" bIns="36576" anchor="ctr">
             <a:spAutoFit/>
           </a:bodyPr>
           <a:lstStyle/>
@@ -20945,6 +21376,7 @@
           <a:lstStyle/>
           <a:p>
             <a:pPr algn="ctr"/>
+            <a:endParaRPr/>
           </a:p>
         </p:txBody>
       </p:sp>
@@ -20990,6 +21422,7 @@
           <a:lstStyle/>
           <a:p>
             <a:pPr algn="ctr"/>
+            <a:endParaRPr/>
           </a:p>
         </p:txBody>
       </p:sp>
@@ -21010,7 +21443,7 @@
           <a:noFill/>
         </p:spPr>
         <p:txBody>
-          <a:bodyPr wrap="square" lIns="36576" rIns="36576" tIns="36576" bIns="36576" anchor="t">
+          <a:bodyPr wrap="square" lIns="36576" tIns="36576" rIns="36576" bIns="36576" anchor="t">
             <a:spAutoFit/>
           </a:bodyPr>
           <a:lstStyle/>
@@ -21077,6 +21510,7 @@
           <a:lstStyle/>
           <a:p>
             <a:pPr algn="ctr"/>
+            <a:endParaRPr/>
           </a:p>
         </p:txBody>
       </p:sp>
@@ -21097,7 +21531,7 @@
           <a:noFill/>
         </p:spPr>
         <p:txBody>
-          <a:bodyPr wrap="square" lIns="36576" rIns="36576" tIns="36576" bIns="36576" anchor="t">
+          <a:bodyPr wrap="square" lIns="36576" tIns="36576" rIns="36576" bIns="36576" anchor="t">
             <a:spAutoFit/>
           </a:bodyPr>
           <a:lstStyle/>
@@ -21164,6 +21598,7 @@
           <a:lstStyle/>
           <a:p>
             <a:pPr algn="ctr"/>
+            <a:endParaRPr/>
           </a:p>
         </p:txBody>
       </p:sp>
@@ -21184,7 +21619,7 @@
           <a:noFill/>
         </p:spPr>
         <p:txBody>
-          <a:bodyPr wrap="square" lIns="36576" rIns="36576" tIns="36576" bIns="36576" anchor="t">
+          <a:bodyPr wrap="square" lIns="36576" tIns="36576" rIns="36576" bIns="36576" anchor="t">
             <a:spAutoFit/>
           </a:bodyPr>
           <a:lstStyle/>
@@ -21251,6 +21686,7 @@
           <a:lstStyle/>
           <a:p>
             <a:pPr algn="ctr"/>
+            <a:endParaRPr/>
           </a:p>
         </p:txBody>
       </p:sp>
@@ -21271,7 +21707,7 @@
           <a:noFill/>
         </p:spPr>
         <p:txBody>
-          <a:bodyPr wrap="square" lIns="36576" rIns="36576" tIns="36576" bIns="36576" anchor="t">
+          <a:bodyPr wrap="square" lIns="36576" tIns="36576" rIns="36576" bIns="36576" anchor="t">
             <a:spAutoFit/>
           </a:bodyPr>
           <a:lstStyle/>
@@ -21313,7 +21749,7 @@
           <a:noFill/>
         </p:spPr>
         <p:txBody>
-          <a:bodyPr wrap="square" lIns="36576" rIns="36576" tIns="36576" bIns="36576" anchor="t">
+          <a:bodyPr wrap="square" lIns="36576" tIns="36576" rIns="36576" bIns="36576" anchor="t">
             <a:spAutoFit/>
           </a:bodyPr>
           <a:lstStyle/>
@@ -21355,7 +21791,7 @@
           <a:noFill/>
         </p:spPr>
         <p:txBody>
-          <a:bodyPr wrap="square" lIns="36576" rIns="36576" tIns="36576" bIns="36576" anchor="ctr">
+          <a:bodyPr wrap="square" lIns="36576" tIns="36576" rIns="36576" bIns="36576" anchor="ctr">
             <a:spAutoFit/>
           </a:bodyPr>
           <a:lstStyle/>
@@ -21420,6 +21856,7 @@
           <a:lstStyle/>
           <a:p>
             <a:pPr algn="ctr"/>
+            <a:endParaRPr/>
           </a:p>
         </p:txBody>
       </p:sp>
@@ -21465,6 +21902,7 @@
           <a:lstStyle/>
           <a:p>
             <a:pPr algn="ctr"/>
+            <a:endParaRPr/>
           </a:p>
         </p:txBody>
       </p:sp>
@@ -21485,7 +21923,7 @@
           <a:noFill/>
         </p:spPr>
         <p:txBody>
-          <a:bodyPr wrap="square" lIns="36576" rIns="36576" tIns="36576" bIns="36576" anchor="t">
+          <a:bodyPr wrap="square" lIns="36576" tIns="36576" rIns="36576" bIns="36576" anchor="t">
             <a:spAutoFit/>
           </a:bodyPr>
           <a:lstStyle/>
@@ -21552,6 +21990,7 @@
           <a:lstStyle/>
           <a:p>
             <a:pPr algn="ctr"/>
+            <a:endParaRPr/>
           </a:p>
         </p:txBody>
       </p:sp>
@@ -21572,7 +22011,7 @@
           <a:noFill/>
         </p:spPr>
         <p:txBody>
-          <a:bodyPr wrap="square" lIns="36576" rIns="36576" tIns="36576" bIns="36576" anchor="t">
+          <a:bodyPr wrap="square" lIns="36576" tIns="36576" rIns="36576" bIns="36576" anchor="t">
             <a:spAutoFit/>
           </a:bodyPr>
           <a:lstStyle/>
@@ -21639,6 +22078,7 @@
           <a:lstStyle/>
           <a:p>
             <a:pPr algn="ctr"/>
+            <a:endParaRPr/>
           </a:p>
         </p:txBody>
       </p:sp>
@@ -21659,7 +22099,7 @@
           <a:noFill/>
         </p:spPr>
         <p:txBody>
-          <a:bodyPr wrap="square" lIns="36576" rIns="36576" tIns="36576" bIns="36576" anchor="t">
+          <a:bodyPr wrap="square" lIns="36576" tIns="36576" rIns="36576" bIns="36576" anchor="t">
             <a:spAutoFit/>
           </a:bodyPr>
           <a:lstStyle/>
@@ -21726,6 +22166,7 @@
           <a:lstStyle/>
           <a:p>
             <a:pPr algn="ctr"/>
+            <a:endParaRPr/>
           </a:p>
         </p:txBody>
       </p:sp>
@@ -21746,7 +22187,7 @@
           <a:noFill/>
         </p:spPr>
         <p:txBody>
-          <a:bodyPr wrap="square" lIns="36576" rIns="36576" tIns="36576" bIns="36576" anchor="t">
+          <a:bodyPr wrap="square" lIns="36576" tIns="36576" rIns="36576" bIns="36576" anchor="t">
             <a:spAutoFit/>
           </a:bodyPr>
           <a:lstStyle/>
@@ -21811,6 +22252,7 @@
           <a:lstStyle/>
           <a:p>
             <a:pPr algn="ctr"/>
+            <a:endParaRPr/>
           </a:p>
         </p:txBody>
       </p:sp>
@@ -21831,7 +22273,7 @@
           <a:noFill/>
         </p:spPr>
         <p:txBody>
-          <a:bodyPr wrap="square" lIns="36576" rIns="36576" tIns="36576" bIns="36576" anchor="ctr">
+          <a:bodyPr wrap="square" lIns="36576" tIns="36576" rIns="36576" bIns="36576" anchor="ctr">
             <a:spAutoFit/>
           </a:bodyPr>
           <a:lstStyle/>
@@ -21852,582 +22294,6 @@
                 <a:latin typeface="Cambria"/>
               </a:rPr>
               <a:t>What do you want to know?   ·   Compared to what?   ·   What can you honestly say?</a:t>
-            </a:r>
-          </a:p>
-        </p:txBody>
-      </p:sp>
-    </p:spTree>
-  </p:cSld>
-  <p:clrMapOvr>
-    <a:masterClrMapping/>
-  </p:clrMapOvr>
-</p:sld>
-</file>
-
-<file path=ppt/slides/slide25.xml><?xml version="1.0" encoding="utf-8"?>
-<p:sld xmlns:a="http://schemas.openxmlformats.org/drawingml/2006/main" xmlns:p="http://schemas.openxmlformats.org/presentationml/2006/main" xmlns:r="http://schemas.openxmlformats.org/officeDocument/2006/relationships">
-  <p:cSld>
-    <p:spTree>
-      <p:nvGrpSpPr>
-        <p:cNvPr id="1" name=""/>
-        <p:cNvGrpSpPr/>
-        <p:nvPr/>
-      </p:nvGrpSpPr>
-      <p:grpSpPr/>
-      <p:sp>
-        <p:nvSpPr>
-          <p:cNvPr id="2" name="TextBox 1"/>
-          <p:cNvSpPr txBox="1"/>
-          <p:nvPr/>
-        </p:nvSpPr>
-        <p:spPr>
-          <a:xfrm>
-            <a:off x="841248" y="146304"/>
-            <a:ext cx="10561320" cy="713232"/>
-          </a:xfrm>
-          <a:prstGeom prst="rect">
-            <a:avLst/>
-          </a:prstGeom>
-          <a:noFill/>
-        </p:spPr>
-        <p:txBody>
-          <a:bodyPr wrap="square" lIns="36576" rIns="36576" tIns="36576" bIns="36576" anchor="ctr">
-            <a:spAutoFit/>
-          </a:bodyPr>
-          <a:lstStyle/>
-          <a:p>
-            <a:pPr algn="l">
-              <a:spcBef>
-                <a:spcPts val="0"/>
-              </a:spcBef>
-              <a:spcAft>
-                <a:spcPts val="0"/>
-              </a:spcAft>
-            </a:pPr>
-            <a:r>
-              <a:rPr sz="3000" b="0" i="0">
-                <a:solidFill>
-                  <a:srgbClr val="000000"/>
-                </a:solidFill>
-                <a:latin typeface="Cambria"/>
-              </a:rPr>
-              <a:t>For Tuesday</a:t>
-            </a:r>
-          </a:p>
-        </p:txBody>
-      </p:sp>
-      <p:sp>
-        <p:nvSpPr>
-          <p:cNvPr id="3" name="Rounded Rectangle 2"/>
-          <p:cNvSpPr/>
-          <p:nvPr/>
-        </p:nvSpPr>
-        <p:spPr>
-          <a:xfrm>
-            <a:off x="960120" y="1097280"/>
-            <a:ext cx="658368" cy="658368"/>
-          </a:xfrm>
-          <a:prstGeom prst="roundRect">
-            <a:avLst/>
-          </a:prstGeom>
-          <a:solidFill>
-            <a:srgbClr val="000000"/>
-          </a:solidFill>
-          <a:ln w="12700">
-            <a:solidFill>
-              <a:srgbClr val="000000"/>
-            </a:solidFill>
-          </a:ln>
-        </p:spPr>
-        <p:style>
-          <a:lnRef idx="1">
-            <a:schemeClr val="accent1"/>
-          </a:lnRef>
-          <a:fillRef idx="3">
-            <a:schemeClr val="accent1"/>
-          </a:fillRef>
-          <a:effectRef idx="2">
-            <a:schemeClr val="accent1"/>
-          </a:effectRef>
-          <a:fontRef idx="minor">
-            <a:schemeClr val="lt1"/>
-          </a:fontRef>
-        </p:style>
-        <p:txBody>
-          <a:bodyPr rtlCol="0" anchor="ctr"/>
-          <a:lstStyle/>
-          <a:p>
-            <a:pPr algn="ctr"/>
-          </a:p>
-        </p:txBody>
-      </p:sp>
-      <p:sp>
-        <p:nvSpPr>
-          <p:cNvPr id="4" name="TextBox 3"/>
-          <p:cNvSpPr txBox="1"/>
-          <p:nvPr/>
-        </p:nvSpPr>
-        <p:spPr>
-          <a:xfrm>
-            <a:off x="1005840" y="1170432"/>
-            <a:ext cx="566928" cy="475488"/>
-          </a:xfrm>
-          <a:prstGeom prst="rect">
-            <a:avLst/>
-          </a:prstGeom>
-          <a:noFill/>
-        </p:spPr>
-        <p:txBody>
-          <a:bodyPr wrap="square" lIns="36576" rIns="36576" tIns="36576" bIns="36576" anchor="ctr">
-            <a:spAutoFit/>
-          </a:bodyPr>
-          <a:lstStyle/>
-          <a:p>
-            <a:pPr algn="ctr">
-              <a:spcBef>
-                <a:spcPts val="0"/>
-              </a:spcBef>
-              <a:spcAft>
-                <a:spcPts val="0"/>
-              </a:spcAft>
-            </a:pPr>
-            <a:r>
-              <a:rPr sz="2500" b="1" i="0">
-                <a:solidFill>
-                  <a:srgbClr val="FFFFFF"/>
-                </a:solidFill>
-                <a:latin typeface="Cambria"/>
-              </a:rPr>
-              <a:t>1</a:t>
-            </a:r>
-          </a:p>
-        </p:txBody>
-      </p:sp>
-      <p:sp>
-        <p:nvSpPr>
-          <p:cNvPr id="5" name="TextBox 4"/>
-          <p:cNvSpPr txBox="1"/>
-          <p:nvPr/>
-        </p:nvSpPr>
-        <p:spPr>
-          <a:xfrm>
-            <a:off x="1874519" y="1133856"/>
-            <a:ext cx="9006840" cy="566928"/>
-          </a:xfrm>
-          <a:prstGeom prst="rect">
-            <a:avLst/>
-          </a:prstGeom>
-          <a:noFill/>
-        </p:spPr>
-        <p:txBody>
-          <a:bodyPr wrap="square" lIns="36576" rIns="36576" tIns="36576" bIns="36576" anchor="ctr">
-            <a:spAutoFit/>
-          </a:bodyPr>
-          <a:lstStyle/>
-          <a:p>
-            <a:pPr algn="l">
-              <a:spcBef>
-                <a:spcPts val="0"/>
-              </a:spcBef>
-              <a:spcAft>
-                <a:spcPts val="0"/>
-              </a:spcAft>
-            </a:pPr>
-            <a:r>
-              <a:rPr sz="2400" b="1" i="0">
-                <a:solidFill>
-                  <a:srgbClr val="000000"/>
-                </a:solidFill>
-                <a:latin typeface="Cambria"/>
-              </a:rPr>
-              <a:t>Bring one crime or criminal-justice question you care about.</a:t>
-            </a:r>
-          </a:p>
-        </p:txBody>
-      </p:sp>
-      <p:sp>
-        <p:nvSpPr>
-          <p:cNvPr id="6" name="Rounded Rectangle 5"/>
-          <p:cNvSpPr/>
-          <p:nvPr/>
-        </p:nvSpPr>
-        <p:spPr>
-          <a:xfrm>
-            <a:off x="960120" y="2176272"/>
-            <a:ext cx="658368" cy="658368"/>
-          </a:xfrm>
-          <a:prstGeom prst="roundRect">
-            <a:avLst/>
-          </a:prstGeom>
-          <a:solidFill>
-            <a:srgbClr val="000000"/>
-          </a:solidFill>
-          <a:ln w="12700">
-            <a:solidFill>
-              <a:srgbClr val="000000"/>
-            </a:solidFill>
-          </a:ln>
-        </p:spPr>
-        <p:style>
-          <a:lnRef idx="1">
-            <a:schemeClr val="accent1"/>
-          </a:lnRef>
-          <a:fillRef idx="3">
-            <a:schemeClr val="accent1"/>
-          </a:fillRef>
-          <a:effectRef idx="2">
-            <a:schemeClr val="accent1"/>
-          </a:effectRef>
-          <a:fontRef idx="minor">
-            <a:schemeClr val="lt1"/>
-          </a:fontRef>
-        </p:style>
-        <p:txBody>
-          <a:bodyPr rtlCol="0" anchor="ctr"/>
-          <a:lstStyle/>
-          <a:p>
-            <a:pPr algn="ctr"/>
-          </a:p>
-        </p:txBody>
-      </p:sp>
-      <p:sp>
-        <p:nvSpPr>
-          <p:cNvPr id="7" name="TextBox 6"/>
-          <p:cNvSpPr txBox="1"/>
-          <p:nvPr/>
-        </p:nvSpPr>
-        <p:spPr>
-          <a:xfrm>
-            <a:off x="1005840" y="2249424"/>
-            <a:ext cx="566928" cy="475488"/>
-          </a:xfrm>
-          <a:prstGeom prst="rect">
-            <a:avLst/>
-          </a:prstGeom>
-          <a:noFill/>
-        </p:spPr>
-        <p:txBody>
-          <a:bodyPr wrap="square" lIns="36576" rIns="36576" tIns="36576" bIns="36576" anchor="ctr">
-            <a:spAutoFit/>
-          </a:bodyPr>
-          <a:lstStyle/>
-          <a:p>
-            <a:pPr algn="ctr">
-              <a:spcBef>
-                <a:spcPts val="0"/>
-              </a:spcBef>
-              <a:spcAft>
-                <a:spcPts val="0"/>
-              </a:spcAft>
-            </a:pPr>
-            <a:r>
-              <a:rPr sz="2500" b="1" i="0">
-                <a:solidFill>
-                  <a:srgbClr val="FFFFFF"/>
-                </a:solidFill>
-                <a:latin typeface="Cambria"/>
-              </a:rPr>
-              <a:t>2</a:t>
-            </a:r>
-          </a:p>
-        </p:txBody>
-      </p:sp>
-      <p:sp>
-        <p:nvSpPr>
-          <p:cNvPr id="8" name="TextBox 7"/>
-          <p:cNvSpPr txBox="1"/>
-          <p:nvPr/>
-        </p:nvSpPr>
-        <p:spPr>
-          <a:xfrm>
-            <a:off x="1874519" y="2212848"/>
-            <a:ext cx="9006840" cy="566928"/>
-          </a:xfrm>
-          <a:prstGeom prst="rect">
-            <a:avLst/>
-          </a:prstGeom>
-          <a:noFill/>
-        </p:spPr>
-        <p:txBody>
-          <a:bodyPr wrap="square" lIns="36576" rIns="36576" tIns="36576" bIns="36576" anchor="ctr">
-            <a:spAutoFit/>
-          </a:bodyPr>
-          <a:lstStyle/>
-          <a:p>
-            <a:pPr algn="l">
-              <a:spcBef>
-                <a:spcPts val="0"/>
-              </a:spcBef>
-              <a:spcAft>
-                <a:spcPts val="0"/>
-              </a:spcAft>
-            </a:pPr>
-            <a:r>
-              <a:rPr sz="2400" b="1" i="0">
-                <a:solidFill>
-                  <a:srgbClr val="000000"/>
-                </a:solidFill>
-                <a:latin typeface="Cambria"/>
-              </a:rPr>
-              <a:t>Be ready to name what you would compare.</a:t>
-            </a:r>
-          </a:p>
-        </p:txBody>
-      </p:sp>
-      <p:sp>
-        <p:nvSpPr>
-          <p:cNvPr id="9" name="Rounded Rectangle 8"/>
-          <p:cNvSpPr/>
-          <p:nvPr/>
-        </p:nvSpPr>
-        <p:spPr>
-          <a:xfrm>
-            <a:off x="960120" y="3255263"/>
-            <a:ext cx="658368" cy="658368"/>
-          </a:xfrm>
-          <a:prstGeom prst="roundRect">
-            <a:avLst/>
-          </a:prstGeom>
-          <a:solidFill>
-            <a:srgbClr val="000000"/>
-          </a:solidFill>
-          <a:ln w="12700">
-            <a:solidFill>
-              <a:srgbClr val="000000"/>
-            </a:solidFill>
-          </a:ln>
-        </p:spPr>
-        <p:style>
-          <a:lnRef idx="1">
-            <a:schemeClr val="accent1"/>
-          </a:lnRef>
-          <a:fillRef idx="3">
-            <a:schemeClr val="accent1"/>
-          </a:fillRef>
-          <a:effectRef idx="2">
-            <a:schemeClr val="accent1"/>
-          </a:effectRef>
-          <a:fontRef idx="minor">
-            <a:schemeClr val="lt1"/>
-          </a:fontRef>
-        </p:style>
-        <p:txBody>
-          <a:bodyPr rtlCol="0" anchor="ctr"/>
-          <a:lstStyle/>
-          <a:p>
-            <a:pPr algn="ctr"/>
-          </a:p>
-        </p:txBody>
-      </p:sp>
-      <p:sp>
-        <p:nvSpPr>
-          <p:cNvPr id="10" name="TextBox 9"/>
-          <p:cNvSpPr txBox="1"/>
-          <p:nvPr/>
-        </p:nvSpPr>
-        <p:spPr>
-          <a:xfrm>
-            <a:off x="1005840" y="3328415"/>
-            <a:ext cx="566928" cy="475488"/>
-          </a:xfrm>
-          <a:prstGeom prst="rect">
-            <a:avLst/>
-          </a:prstGeom>
-          <a:noFill/>
-        </p:spPr>
-        <p:txBody>
-          <a:bodyPr wrap="square" lIns="36576" rIns="36576" tIns="36576" bIns="36576" anchor="ctr">
-            <a:spAutoFit/>
-          </a:bodyPr>
-          <a:lstStyle/>
-          <a:p>
-            <a:pPr algn="ctr">
-              <a:spcBef>
-                <a:spcPts val="0"/>
-              </a:spcBef>
-              <a:spcAft>
-                <a:spcPts val="0"/>
-              </a:spcAft>
-            </a:pPr>
-            <a:r>
-              <a:rPr sz="2500" b="1" i="0">
-                <a:solidFill>
-                  <a:srgbClr val="FFFFFF"/>
-                </a:solidFill>
-                <a:latin typeface="Cambria"/>
-              </a:rPr>
-              <a:t>3</a:t>
-            </a:r>
-          </a:p>
-        </p:txBody>
-      </p:sp>
-      <p:sp>
-        <p:nvSpPr>
-          <p:cNvPr id="11" name="TextBox 10"/>
-          <p:cNvSpPr txBox="1"/>
-          <p:nvPr/>
-        </p:nvSpPr>
-        <p:spPr>
-          <a:xfrm>
-            <a:off x="1874519" y="3291839"/>
-            <a:ext cx="9006840" cy="566928"/>
-          </a:xfrm>
-          <a:prstGeom prst="rect">
-            <a:avLst/>
-          </a:prstGeom>
-          <a:noFill/>
-        </p:spPr>
-        <p:txBody>
-          <a:bodyPr wrap="square" lIns="36576" rIns="36576" tIns="36576" bIns="36576" anchor="ctr">
-            <a:spAutoFit/>
-          </a:bodyPr>
-          <a:lstStyle/>
-          <a:p>
-            <a:pPr algn="l">
-              <a:spcBef>
-                <a:spcPts val="0"/>
-              </a:spcBef>
-              <a:spcAft>
-                <a:spcPts val="0"/>
-              </a:spcAft>
-            </a:pPr>
-            <a:r>
-              <a:rPr sz="2400" b="1" i="0">
-                <a:solidFill>
-                  <a:srgbClr val="000000"/>
-                </a:solidFill>
-                <a:latin typeface="Cambria"/>
-              </a:rPr>
-              <a:t>Be ready to name one reason that comparison could mislead you.</a:t>
-            </a:r>
-          </a:p>
-        </p:txBody>
-      </p:sp>
-      <p:sp>
-        <p:nvSpPr>
-          <p:cNvPr id="12" name="Rounded Rectangle 11"/>
-          <p:cNvSpPr/>
-          <p:nvPr/>
-        </p:nvSpPr>
-        <p:spPr>
-          <a:xfrm>
-            <a:off x="960120" y="4462272"/>
-            <a:ext cx="10259568" cy="658368"/>
-          </a:xfrm>
-          <a:prstGeom prst="roundRect">
-            <a:avLst/>
-          </a:prstGeom>
-          <a:solidFill>
-            <a:srgbClr val="F2F2F2"/>
-          </a:solidFill>
-          <a:ln w="12700">
-            <a:solidFill>
-              <a:srgbClr val="4B4B4B"/>
-            </a:solidFill>
-          </a:ln>
-        </p:spPr>
-        <p:style>
-          <a:lnRef idx="1">
-            <a:schemeClr val="accent1"/>
-          </a:lnRef>
-          <a:fillRef idx="3">
-            <a:schemeClr val="accent1"/>
-          </a:fillRef>
-          <a:effectRef idx="2">
-            <a:schemeClr val="accent1"/>
-          </a:effectRef>
-          <a:fontRef idx="minor">
-            <a:schemeClr val="lt1"/>
-          </a:fontRef>
-        </p:style>
-        <p:txBody>
-          <a:bodyPr rtlCol="0" anchor="ctr"/>
-          <a:lstStyle/>
-          <a:p>
-            <a:pPr algn="ctr"/>
-          </a:p>
-        </p:txBody>
-      </p:sp>
-      <p:sp>
-        <p:nvSpPr>
-          <p:cNvPr id="13" name="TextBox 12"/>
-          <p:cNvSpPr txBox="1"/>
-          <p:nvPr/>
-        </p:nvSpPr>
-        <p:spPr>
-          <a:xfrm>
-            <a:off x="1170432" y="4617720"/>
-            <a:ext cx="9838944" cy="365760"/>
-          </a:xfrm>
-          <a:prstGeom prst="rect">
-            <a:avLst/>
-          </a:prstGeom>
-          <a:noFill/>
-        </p:spPr>
-        <p:txBody>
-          <a:bodyPr wrap="square" lIns="36576" rIns="36576" tIns="36576" bIns="36576" anchor="t">
-            <a:spAutoFit/>
-          </a:bodyPr>
-          <a:lstStyle/>
-          <a:p>
-            <a:pPr algn="ctr">
-              <a:spcBef>
-                <a:spcPts val="0"/>
-              </a:spcBef>
-              <a:spcAft>
-                <a:spcPts val="0"/>
-              </a:spcAft>
-            </a:pPr>
-            <a:r>
-              <a:rPr sz="2300" b="1" i="0">
-                <a:solidFill>
-                  <a:srgbClr val="000000"/>
-                </a:solidFill>
-                <a:latin typeface="Cambria"/>
-              </a:rPr>
-              <a:t>We will start Tuesday with a few of your examples.</a:t>
-            </a:r>
-          </a:p>
-        </p:txBody>
-      </p:sp>
-      <p:sp>
-        <p:nvSpPr>
-          <p:cNvPr id="14" name="TextBox 13"/>
-          <p:cNvSpPr txBox="1"/>
-          <p:nvPr/>
-        </p:nvSpPr>
-        <p:spPr>
-          <a:xfrm>
-            <a:off x="960120" y="5413248"/>
-            <a:ext cx="10259568" cy="713232"/>
-          </a:xfrm>
-          <a:prstGeom prst="rect">
-            <a:avLst/>
-          </a:prstGeom>
-          <a:noFill/>
-        </p:spPr>
-        <p:txBody>
-          <a:bodyPr wrap="square" lIns="36576" rIns="36576" tIns="36576" bIns="36576" anchor="ctr">
-            <a:spAutoFit/>
-          </a:bodyPr>
-          <a:lstStyle/>
-          <a:p>
-            <a:pPr algn="ctr">
-              <a:spcBef>
-                <a:spcPts val="0"/>
-              </a:spcBef>
-              <a:spcAft>
-                <a:spcPts val="0"/>
-              </a:spcAft>
-            </a:pPr>
-            <a:r>
-              <a:rPr sz="1900" b="0" i="0">
-                <a:solidFill>
-                  <a:srgbClr val="000000"/>
-                </a:solidFill>
-                <a:latin typeface="Cambria"/>
-              </a:rPr>
-              <a:t>Read the Canaries summary. Come ready to identify the question, comparison, pattern, and strongest claim the comparison supports.</a:t>
             </a:r>
           </a:p>
         </p:txBody>
@@ -22441,7 +22307,7 @@
 </file>
 
 <file path=ppt/slides/slide3.xml><?xml version="1.0" encoding="utf-8"?>
-<p:sld xmlns:a="http://schemas.openxmlformats.org/drawingml/2006/main" xmlns:p="http://schemas.openxmlformats.org/presentationml/2006/main" xmlns:r="http://schemas.openxmlformats.org/officeDocument/2006/relationships">
+<p:sld xmlns:a="http://schemas.openxmlformats.org/drawingml/2006/main" xmlns:r="http://schemas.openxmlformats.org/officeDocument/2006/relationships" xmlns:p="http://schemas.openxmlformats.org/presentationml/2006/main">
   <p:cSld>
     <p:spTree>
       <p:nvGrpSpPr>
@@ -22449,7 +22315,14 @@
         <p:cNvGrpSpPr/>
         <p:nvPr/>
       </p:nvGrpSpPr>
-      <p:grpSpPr/>
+      <p:grpSpPr>
+        <a:xfrm>
+          <a:off x="0" y="0"/>
+          <a:ext cx="0" cy="0"/>
+          <a:chOff x="0" y="0"/>
+          <a:chExt cx="0" cy="0"/>
+        </a:xfrm>
+      </p:grpSpPr>
       <p:sp>
         <p:nvSpPr>
           <p:cNvPr id="2" name="TextBox 1"/>
@@ -22467,7 +22340,7 @@
           <a:noFill/>
         </p:spPr>
         <p:txBody>
-          <a:bodyPr wrap="square" lIns="36576" rIns="36576" tIns="36576" bIns="36576" anchor="ctr">
+          <a:bodyPr wrap="square" lIns="36576" tIns="36576" rIns="36576" bIns="36576" anchor="ctr">
             <a:spAutoFit/>
           </a:bodyPr>
           <a:lstStyle/>
@@ -22534,6 +22407,7 @@
           <a:lstStyle/>
           <a:p>
             <a:pPr algn="ctr"/>
+            <a:endParaRPr/>
           </a:p>
         </p:txBody>
       </p:sp>
@@ -22554,7 +22428,7 @@
           <a:noFill/>
         </p:spPr>
         <p:txBody>
-          <a:bodyPr wrap="square" lIns="36576" rIns="36576" tIns="36576" bIns="36576" anchor="t">
+          <a:bodyPr wrap="square" lIns="36576" tIns="36576" rIns="36576" bIns="36576" anchor="t">
             <a:spAutoFit/>
           </a:bodyPr>
           <a:lstStyle/>
@@ -22596,7 +22470,7 @@
           <a:noFill/>
         </p:spPr>
         <p:txBody>
-          <a:bodyPr wrap="square" lIns="36576" rIns="36576" tIns="36576" bIns="36576" anchor="t">
+          <a:bodyPr wrap="square" lIns="36576" tIns="36576" rIns="36576" bIns="36576" anchor="t">
             <a:spAutoFit/>
           </a:bodyPr>
           <a:lstStyle/>
@@ -22638,7 +22512,7 @@
           <a:noFill/>
         </p:spPr>
         <p:txBody>
-          <a:bodyPr wrap="square" lIns="36576" rIns="36576" tIns="36576" bIns="36576" anchor="t">
+          <a:bodyPr wrap="square" lIns="36576" tIns="36576" rIns="36576" bIns="36576" anchor="t">
             <a:spAutoFit/>
           </a:bodyPr>
           <a:lstStyle/>
@@ -22680,7 +22554,7 @@
           <a:noFill/>
         </p:spPr>
         <p:txBody>
-          <a:bodyPr wrap="square" lIns="36576" rIns="36576" tIns="36576" bIns="36576" anchor="t">
+          <a:bodyPr wrap="square" lIns="36576" tIns="36576" rIns="36576" bIns="36576" anchor="t">
             <a:spAutoFit/>
           </a:bodyPr>
           <a:lstStyle/>
@@ -22722,7 +22596,7 @@
           <a:noFill/>
         </p:spPr>
         <p:txBody>
-          <a:bodyPr wrap="square" lIns="36576" rIns="36576" tIns="36576" bIns="36576" anchor="t">
+          <a:bodyPr wrap="square" lIns="36576" tIns="36576" rIns="36576" bIns="36576" anchor="t">
             <a:spAutoFit/>
           </a:bodyPr>
           <a:lstStyle/>
@@ -22789,6 +22663,7 @@
           <a:lstStyle/>
           <a:p>
             <a:pPr algn="ctr"/>
+            <a:endParaRPr/>
           </a:p>
         </p:txBody>
       </p:sp>
@@ -22809,7 +22684,7 @@
           <a:noFill/>
         </p:spPr>
         <p:txBody>
-          <a:bodyPr wrap="square" lIns="36576" rIns="36576" tIns="36576" bIns="36576" anchor="t">
+          <a:bodyPr wrap="square" lIns="36576" tIns="36576" rIns="36576" bIns="36576" anchor="t">
             <a:spAutoFit/>
           </a:bodyPr>
           <a:lstStyle/>
@@ -22851,7 +22726,7 @@
           <a:noFill/>
         </p:spPr>
         <p:txBody>
-          <a:bodyPr wrap="square" lIns="36576" rIns="36576" tIns="36576" bIns="36576" anchor="t">
+          <a:bodyPr wrap="square" lIns="36576" tIns="36576" rIns="36576" bIns="36576" anchor="t">
             <a:spAutoFit/>
           </a:bodyPr>
           <a:lstStyle/>
@@ -22893,7 +22768,7 @@
           <a:noFill/>
         </p:spPr>
         <p:txBody>
-          <a:bodyPr wrap="square" lIns="36576" rIns="36576" tIns="36576" bIns="36576" anchor="t">
+          <a:bodyPr wrap="square" lIns="36576" tIns="36576" rIns="36576" bIns="36576" anchor="t">
             <a:spAutoFit/>
           </a:bodyPr>
           <a:lstStyle/>
@@ -22935,7 +22810,7 @@
           <a:noFill/>
         </p:spPr>
         <p:txBody>
-          <a:bodyPr wrap="square" lIns="36576" rIns="36576" tIns="36576" bIns="36576" anchor="t">
+          <a:bodyPr wrap="square" lIns="36576" tIns="36576" rIns="36576" bIns="36576" anchor="t">
             <a:spAutoFit/>
           </a:bodyPr>
           <a:lstStyle/>
@@ -23002,6 +22877,7 @@
           <a:lstStyle/>
           <a:p>
             <a:pPr algn="ctr"/>
+            <a:endParaRPr/>
           </a:p>
         </p:txBody>
       </p:sp>
@@ -23022,7 +22898,7 @@
           <a:noFill/>
         </p:spPr>
         <p:txBody>
-          <a:bodyPr wrap="square" lIns="36576" rIns="36576" tIns="36576" bIns="36576" anchor="ctr">
+          <a:bodyPr wrap="square" lIns="36576" tIns="36576" rIns="36576" bIns="36576" anchor="ctr">
             <a:spAutoFit/>
           </a:bodyPr>
           <a:lstStyle/>
@@ -23064,7 +22940,7 @@
           <a:noFill/>
         </p:spPr>
         <p:txBody>
-          <a:bodyPr wrap="square" lIns="36576" rIns="36576" tIns="36576" bIns="36576" anchor="t">
+          <a:bodyPr wrap="square" lIns="36576" tIns="36576" rIns="36576" bIns="36576" anchor="t">
             <a:spAutoFit/>
           </a:bodyPr>
           <a:lstStyle/>
@@ -23083,7 +22959,7 @@
                   <a:srgbClr val="0563C1"/>
                 </a:solidFill>
                 <a:latin typeface="Cambria"/>
-                <a:hlinkClick r:id="rId2"/>
+                <a:hlinkClick r:id="rId3"/>
               </a:rPr>
               <a:t>Syllabus: zjelveh.github.io/teaching/ccjs_418e_2026_fall</a:t>
             </a:r>
@@ -23099,7 +22975,7 @@
 </file>
 
 <file path=ppt/slides/slide4.xml><?xml version="1.0" encoding="utf-8"?>
-<p:sld xmlns:a="http://schemas.openxmlformats.org/drawingml/2006/main" xmlns:p="http://schemas.openxmlformats.org/presentationml/2006/main" xmlns:r="http://schemas.openxmlformats.org/officeDocument/2006/relationships">
+<p:sld xmlns:a="http://schemas.openxmlformats.org/drawingml/2006/main" xmlns:r="http://schemas.openxmlformats.org/officeDocument/2006/relationships" xmlns:p="http://schemas.openxmlformats.org/presentationml/2006/main">
   <p:cSld>
     <p:spTree>
       <p:nvGrpSpPr>
@@ -23107,7 +22983,14 @@
         <p:cNvGrpSpPr/>
         <p:nvPr/>
       </p:nvGrpSpPr>
-      <p:grpSpPr/>
+      <p:grpSpPr>
+        <a:xfrm>
+          <a:off x="0" y="0"/>
+          <a:ext cx="0" cy="0"/>
+          <a:chOff x="0" y="0"/>
+          <a:chExt cx="0" cy="0"/>
+        </a:xfrm>
+      </p:grpSpPr>
       <p:sp>
         <p:nvSpPr>
           <p:cNvPr id="2" name="TextBox 1"/>
@@ -23125,7 +23008,7 @@
           <a:noFill/>
         </p:spPr>
         <p:txBody>
-          <a:bodyPr wrap="square" lIns="36576" rIns="36576" tIns="36576" bIns="36576" anchor="ctr">
+          <a:bodyPr wrap="square" lIns="36576" tIns="36576" rIns="36576" bIns="36576" anchor="ctr">
             <a:spAutoFit/>
           </a:bodyPr>
           <a:lstStyle/>
@@ -23192,6 +23075,7 @@
           <a:lstStyle/>
           <a:p>
             <a:pPr algn="ctr"/>
+            <a:endParaRPr/>
           </a:p>
         </p:txBody>
       </p:sp>
@@ -23212,7 +23096,7 @@
           <a:noFill/>
         </p:spPr>
         <p:txBody>
-          <a:bodyPr wrap="square" lIns="36576" rIns="36576" tIns="36576" bIns="36576" anchor="ctr">
+          <a:bodyPr wrap="square" lIns="36576" tIns="36576" rIns="36576" bIns="36576" anchor="ctr">
             <a:spAutoFit/>
           </a:bodyPr>
           <a:lstStyle/>
@@ -23254,7 +23138,7 @@
           <a:noFill/>
         </p:spPr>
         <p:txBody>
-          <a:bodyPr wrap="square" lIns="36576" rIns="36576" tIns="36576" bIns="36576" anchor="ctr">
+          <a:bodyPr wrap="square" lIns="36576" tIns="36576" rIns="36576" bIns="36576" anchor="ctr">
             <a:spAutoFit/>
           </a:bodyPr>
           <a:lstStyle/>
@@ -23296,7 +23180,7 @@
           <a:noFill/>
         </p:spPr>
         <p:txBody>
-          <a:bodyPr wrap="square" lIns="36576" rIns="36576" tIns="36576" bIns="36576" anchor="ctr">
+          <a:bodyPr wrap="square" lIns="36576" tIns="36576" rIns="36576" bIns="36576" anchor="ctr">
             <a:spAutoFit/>
           </a:bodyPr>
           <a:lstStyle/>
@@ -23363,6 +23247,7 @@
           <a:lstStyle/>
           <a:p>
             <a:pPr algn="ctr"/>
+            <a:endParaRPr/>
           </a:p>
         </p:txBody>
       </p:sp>
@@ -23383,7 +23268,7 @@
           <a:noFill/>
         </p:spPr>
         <p:txBody>
-          <a:bodyPr wrap="square" lIns="36576" rIns="36576" tIns="36576" bIns="36576" anchor="ctr">
+          <a:bodyPr wrap="square" lIns="36576" tIns="36576" rIns="36576" bIns="36576" anchor="ctr">
             <a:spAutoFit/>
           </a:bodyPr>
           <a:lstStyle/>
@@ -23425,7 +23310,7 @@
           <a:noFill/>
         </p:spPr>
         <p:txBody>
-          <a:bodyPr wrap="square" lIns="36576" rIns="36576" tIns="36576" bIns="36576" anchor="ctr">
+          <a:bodyPr wrap="square" lIns="36576" tIns="36576" rIns="36576" bIns="36576" anchor="ctr">
             <a:spAutoFit/>
           </a:bodyPr>
           <a:lstStyle/>
@@ -23467,7 +23352,7 @@
           <a:noFill/>
         </p:spPr>
         <p:txBody>
-          <a:bodyPr wrap="square" lIns="36576" rIns="36576" tIns="36576" bIns="36576" anchor="ctr">
+          <a:bodyPr wrap="square" lIns="36576" tIns="36576" rIns="36576" bIns="36576" anchor="ctr">
             <a:spAutoFit/>
           </a:bodyPr>
           <a:lstStyle/>
@@ -23534,6 +23419,7 @@
           <a:lstStyle/>
           <a:p>
             <a:pPr algn="ctr"/>
+            <a:endParaRPr/>
           </a:p>
         </p:txBody>
       </p:sp>
@@ -23554,7 +23440,7 @@
           <a:noFill/>
         </p:spPr>
         <p:txBody>
-          <a:bodyPr wrap="square" lIns="36576" rIns="36576" tIns="36576" bIns="36576" anchor="ctr">
+          <a:bodyPr wrap="square" lIns="36576" tIns="36576" rIns="36576" bIns="36576" anchor="ctr">
             <a:spAutoFit/>
           </a:bodyPr>
           <a:lstStyle/>
@@ -23596,7 +23482,7 @@
           <a:noFill/>
         </p:spPr>
         <p:txBody>
-          <a:bodyPr wrap="square" lIns="36576" rIns="36576" tIns="36576" bIns="36576" anchor="ctr">
+          <a:bodyPr wrap="square" lIns="36576" tIns="36576" rIns="36576" bIns="36576" anchor="ctr">
             <a:spAutoFit/>
           </a:bodyPr>
           <a:lstStyle/>
@@ -23638,7 +23524,7 @@
           <a:noFill/>
         </p:spPr>
         <p:txBody>
-          <a:bodyPr wrap="square" lIns="36576" rIns="36576" tIns="36576" bIns="36576" anchor="ctr">
+          <a:bodyPr wrap="square" lIns="36576" tIns="36576" rIns="36576" bIns="36576" anchor="ctr">
             <a:spAutoFit/>
           </a:bodyPr>
           <a:lstStyle/>
@@ -23680,7 +23566,7 @@
           <a:noFill/>
         </p:spPr>
         <p:txBody>
-          <a:bodyPr wrap="square" lIns="36576" rIns="36576" tIns="36576" bIns="36576" anchor="t">
+          <a:bodyPr wrap="square" lIns="36576" tIns="36576" rIns="36576" bIns="36576" anchor="t">
             <a:spAutoFit/>
           </a:bodyPr>
           <a:lstStyle/>
@@ -23747,6 +23633,7 @@
           <a:lstStyle/>
           <a:p>
             <a:pPr algn="ctr"/>
+            <a:endParaRPr/>
           </a:p>
         </p:txBody>
       </p:sp>
@@ -23767,7 +23654,7 @@
           <a:noFill/>
         </p:spPr>
         <p:txBody>
-          <a:bodyPr wrap="square" lIns="36576" rIns="36576" tIns="36576" bIns="36576" anchor="ctr">
+          <a:bodyPr wrap="square" lIns="36576" tIns="36576" rIns="36576" bIns="36576" anchor="ctr">
             <a:spAutoFit/>
           </a:bodyPr>
           <a:lstStyle/>
@@ -23809,7 +23696,7 @@
           <a:noFill/>
         </p:spPr>
         <p:txBody>
-          <a:bodyPr wrap="square" lIns="36576" rIns="36576" tIns="36576" bIns="36576" anchor="ctr">
+          <a:bodyPr wrap="square" lIns="36576" tIns="36576" rIns="36576" bIns="36576" anchor="ctr">
             <a:spAutoFit/>
           </a:bodyPr>
           <a:lstStyle/>
@@ -23876,6 +23763,7 @@
           <a:lstStyle/>
           <a:p>
             <a:pPr algn="ctr"/>
+            <a:endParaRPr/>
           </a:p>
         </p:txBody>
       </p:sp>
@@ -23921,6 +23809,7 @@
           <a:lstStyle/>
           <a:p>
             <a:pPr algn="ctr"/>
+            <a:endParaRPr/>
           </a:p>
         </p:txBody>
       </p:sp>
@@ -23941,7 +23830,7 @@
           <a:noFill/>
         </p:spPr>
         <p:txBody>
-          <a:bodyPr wrap="square" lIns="36576" rIns="36576" tIns="36576" bIns="36576" anchor="ctr">
+          <a:bodyPr wrap="square" lIns="36576" tIns="36576" rIns="36576" bIns="36576" anchor="ctr">
             <a:spAutoFit/>
           </a:bodyPr>
           <a:lstStyle/>
@@ -23983,7 +23872,7 @@
           <a:noFill/>
         </p:spPr>
         <p:txBody>
-          <a:bodyPr wrap="square" lIns="36576" rIns="36576" tIns="36576" bIns="36576" anchor="ctr">
+          <a:bodyPr wrap="square" lIns="36576" tIns="36576" rIns="36576" bIns="36576" anchor="ctr">
             <a:spAutoFit/>
           </a:bodyPr>
           <a:lstStyle/>
@@ -24050,6 +23939,7 @@
           <a:lstStyle/>
           <a:p>
             <a:pPr algn="ctr"/>
+            <a:endParaRPr/>
           </a:p>
         </p:txBody>
       </p:sp>
@@ -24095,6 +23985,7 @@
           <a:lstStyle/>
           <a:p>
             <a:pPr algn="ctr"/>
+            <a:endParaRPr/>
           </a:p>
         </p:txBody>
       </p:sp>
@@ -24115,7 +24006,7 @@
           <a:noFill/>
         </p:spPr>
         <p:txBody>
-          <a:bodyPr wrap="square" lIns="36576" rIns="36576" tIns="36576" bIns="36576" anchor="ctr">
+          <a:bodyPr wrap="square" lIns="36576" tIns="36576" rIns="36576" bIns="36576" anchor="ctr">
             <a:spAutoFit/>
           </a:bodyPr>
           <a:lstStyle/>
@@ -24157,7 +24048,7 @@
           <a:noFill/>
         </p:spPr>
         <p:txBody>
-          <a:bodyPr wrap="square" lIns="36576" rIns="36576" tIns="36576" bIns="36576" anchor="ctr">
+          <a:bodyPr wrap="square" lIns="36576" tIns="36576" rIns="36576" bIns="36576" anchor="ctr">
             <a:spAutoFit/>
           </a:bodyPr>
           <a:lstStyle/>
@@ -24224,6 +24115,7 @@
           <a:lstStyle/>
           <a:p>
             <a:pPr algn="ctr"/>
+            <a:endParaRPr/>
           </a:p>
         </p:txBody>
       </p:sp>
@@ -24244,7 +24136,7 @@
           <a:noFill/>
         </p:spPr>
         <p:txBody>
-          <a:bodyPr wrap="square" lIns="36576" rIns="36576" tIns="36576" bIns="36576" anchor="ctr">
+          <a:bodyPr wrap="square" lIns="36576" tIns="36576" rIns="36576" bIns="36576" anchor="ctr">
             <a:spAutoFit/>
           </a:bodyPr>
           <a:lstStyle/>
@@ -24278,7 +24170,7 @@
 </file>
 
 <file path=ppt/slides/slide5.xml><?xml version="1.0" encoding="utf-8"?>
-<p:sld xmlns:a="http://schemas.openxmlformats.org/drawingml/2006/main" xmlns:p="http://schemas.openxmlformats.org/presentationml/2006/main" xmlns:r="http://schemas.openxmlformats.org/officeDocument/2006/relationships">
+<p:sld xmlns:a="http://schemas.openxmlformats.org/drawingml/2006/main" xmlns:r="http://schemas.openxmlformats.org/officeDocument/2006/relationships" xmlns:p="http://schemas.openxmlformats.org/presentationml/2006/main">
   <p:cSld>
     <p:spTree>
       <p:nvGrpSpPr>
@@ -24286,7 +24178,14 @@
         <p:cNvGrpSpPr/>
         <p:nvPr/>
       </p:nvGrpSpPr>
-      <p:grpSpPr/>
+      <p:grpSpPr>
+        <a:xfrm>
+          <a:off x="0" y="0"/>
+          <a:ext cx="0" cy="0"/>
+          <a:chOff x="0" y="0"/>
+          <a:chExt cx="0" cy="0"/>
+        </a:xfrm>
+      </p:grpSpPr>
       <p:sp>
         <p:nvSpPr>
           <p:cNvPr id="2" name="TextBox 1"/>
@@ -24304,7 +24203,7 @@
           <a:noFill/>
         </p:spPr>
         <p:txBody>
-          <a:bodyPr wrap="square" lIns="36576" rIns="36576" tIns="36576" bIns="36576" anchor="ctr">
+          <a:bodyPr wrap="square" lIns="36576" tIns="36576" rIns="36576" bIns="36576" anchor="ctr">
             <a:spAutoFit/>
           </a:bodyPr>
           <a:lstStyle/>
@@ -24346,7 +24245,7 @@
           <a:noFill/>
         </p:spPr>
         <p:txBody>
-          <a:bodyPr wrap="square" lIns="36576" rIns="36576" tIns="36576" bIns="36576" anchor="ctr">
+          <a:bodyPr wrap="square" lIns="36576" tIns="36576" rIns="36576" bIns="36576" anchor="ctr">
             <a:spAutoFit/>
           </a:bodyPr>
           <a:lstStyle/>
@@ -24413,6 +24312,7 @@
           <a:lstStyle/>
           <a:p>
             <a:pPr algn="ctr"/>
+            <a:endParaRPr/>
           </a:p>
         </p:txBody>
       </p:sp>
@@ -24433,7 +24333,7 @@
           <a:noFill/>
         </p:spPr>
         <p:txBody>
-          <a:bodyPr wrap="square" lIns="36576" rIns="36576" tIns="36576" bIns="36576" anchor="ctr">
+          <a:bodyPr wrap="square" lIns="36576" tIns="36576" rIns="36576" bIns="36576" anchor="ctr">
             <a:spAutoFit/>
           </a:bodyPr>
           <a:lstStyle/>
@@ -24475,7 +24375,7 @@
           <a:noFill/>
         </p:spPr>
         <p:txBody>
-          <a:bodyPr wrap="square" lIns="36576" rIns="36576" tIns="36576" bIns="36576" anchor="ctr">
+          <a:bodyPr wrap="square" lIns="36576" tIns="36576" rIns="36576" bIns="36576" anchor="ctr">
             <a:spAutoFit/>
           </a:bodyPr>
           <a:lstStyle/>
@@ -24543,6 +24443,7 @@
           <a:lstStyle/>
           <a:p>
             <a:pPr algn="ctr"/>
+            <a:endParaRPr/>
           </a:p>
         </p:txBody>
       </p:sp>
@@ -24563,7 +24464,7 @@
           <a:noFill/>
         </p:spPr>
         <p:txBody>
-          <a:bodyPr wrap="square" lIns="36576" rIns="36576" tIns="36576" bIns="36576" anchor="ctr">
+          <a:bodyPr wrap="square" lIns="36576" tIns="36576" rIns="36576" bIns="36576" anchor="ctr">
             <a:spAutoFit/>
           </a:bodyPr>
           <a:lstStyle/>
@@ -24605,7 +24506,7 @@
           <a:noFill/>
         </p:spPr>
         <p:txBody>
-          <a:bodyPr wrap="square" lIns="36576" rIns="36576" tIns="36576" bIns="36576" anchor="ctr">
+          <a:bodyPr wrap="square" lIns="36576" tIns="36576" rIns="36576" bIns="36576" anchor="ctr">
             <a:spAutoFit/>
           </a:bodyPr>
           <a:lstStyle/>
@@ -24672,6 +24573,7 @@
           <a:lstStyle/>
           <a:p>
             <a:pPr algn="ctr"/>
+            <a:endParaRPr/>
           </a:p>
         </p:txBody>
       </p:sp>
@@ -24692,7 +24594,7 @@
           <a:noFill/>
         </p:spPr>
         <p:txBody>
-          <a:bodyPr wrap="square" lIns="36576" rIns="36576" tIns="36576" bIns="36576" anchor="ctr">
+          <a:bodyPr wrap="square" lIns="36576" tIns="36576" rIns="36576" bIns="36576" anchor="ctr">
             <a:spAutoFit/>
           </a:bodyPr>
           <a:lstStyle/>
@@ -24734,7 +24636,7 @@
           <a:noFill/>
         </p:spPr>
         <p:txBody>
-          <a:bodyPr wrap="square" lIns="36576" rIns="36576" tIns="36576" bIns="36576" anchor="ctr">
+          <a:bodyPr wrap="square" lIns="36576" tIns="36576" rIns="36576" bIns="36576" anchor="ctr">
             <a:spAutoFit/>
           </a:bodyPr>
           <a:lstStyle/>
@@ -24801,6 +24703,7 @@
           <a:lstStyle/>
           <a:p>
             <a:pPr algn="ctr"/>
+            <a:endParaRPr/>
           </a:p>
         </p:txBody>
       </p:sp>
@@ -24821,7 +24724,7 @@
           <a:noFill/>
         </p:spPr>
         <p:txBody>
-          <a:bodyPr wrap="square" lIns="36576" rIns="36576" tIns="36576" bIns="36576" anchor="ctr">
+          <a:bodyPr wrap="square" lIns="36576" tIns="36576" rIns="36576" bIns="36576" anchor="ctr">
             <a:spAutoFit/>
           </a:bodyPr>
           <a:lstStyle/>
@@ -24863,7 +24766,7 @@
           <a:noFill/>
         </p:spPr>
         <p:txBody>
-          <a:bodyPr wrap="square" lIns="36576" rIns="36576" tIns="36576" bIns="36576" anchor="ctr">
+          <a:bodyPr wrap="square" lIns="36576" tIns="36576" rIns="36576" bIns="36576" anchor="ctr">
             <a:spAutoFit/>
           </a:bodyPr>
           <a:lstStyle/>
@@ -24930,6 +24833,7 @@
           <a:lstStyle/>
           <a:p>
             <a:pPr algn="ctr"/>
+            <a:endParaRPr/>
           </a:p>
         </p:txBody>
       </p:sp>
@@ -24950,7 +24854,7 @@
           <a:noFill/>
         </p:spPr>
         <p:txBody>
-          <a:bodyPr wrap="square" lIns="36576" rIns="36576" tIns="36576" bIns="36576" anchor="ctr">
+          <a:bodyPr wrap="square" lIns="36576" tIns="36576" rIns="36576" bIns="36576" anchor="ctr">
             <a:spAutoFit/>
           </a:bodyPr>
           <a:lstStyle/>
@@ -24992,7 +24896,7 @@
           <a:noFill/>
         </p:spPr>
         <p:txBody>
-          <a:bodyPr wrap="square" lIns="36576" rIns="36576" tIns="36576" bIns="36576" anchor="t">
+          <a:bodyPr wrap="square" lIns="36576" tIns="36576" rIns="36576" bIns="36576" anchor="t">
             <a:spAutoFit/>
           </a:bodyPr>
           <a:lstStyle/>
@@ -25026,7 +24930,7 @@
 </file>
 
 <file path=ppt/slides/slide6.xml><?xml version="1.0" encoding="utf-8"?>
-<p:sld xmlns:a="http://schemas.openxmlformats.org/drawingml/2006/main" xmlns:p="http://schemas.openxmlformats.org/presentationml/2006/main" xmlns:r="http://schemas.openxmlformats.org/officeDocument/2006/relationships">
+<p:sld xmlns:a="http://schemas.openxmlformats.org/drawingml/2006/main" xmlns:r="http://schemas.openxmlformats.org/officeDocument/2006/relationships" xmlns:p="http://schemas.openxmlformats.org/presentationml/2006/main">
   <p:cSld>
     <p:spTree>
       <p:nvGrpSpPr>
@@ -25034,7 +24938,14 @@
         <p:cNvGrpSpPr/>
         <p:nvPr/>
       </p:nvGrpSpPr>
-      <p:grpSpPr/>
+      <p:grpSpPr>
+        <a:xfrm>
+          <a:off x="0" y="0"/>
+          <a:ext cx="0" cy="0"/>
+          <a:chOff x="0" y="0"/>
+          <a:chExt cx="0" cy="0"/>
+        </a:xfrm>
+      </p:grpSpPr>
       <p:sp>
         <p:nvSpPr>
           <p:cNvPr id="2" name="TextBox 1"/>
@@ -25052,7 +24963,7 @@
           <a:noFill/>
         </p:spPr>
         <p:txBody>
-          <a:bodyPr wrap="square" lIns="36576" rIns="36576" tIns="36576" bIns="36576" anchor="ctr">
+          <a:bodyPr wrap="square" lIns="36576" tIns="36576" rIns="36576" bIns="36576" anchor="ctr">
             <a:spAutoFit/>
           </a:bodyPr>
           <a:lstStyle/>
@@ -25094,7 +25005,7 @@
           <a:noFill/>
         </p:spPr>
         <p:txBody>
-          <a:bodyPr wrap="square" lIns="36576" rIns="36576" tIns="36576" bIns="36576" anchor="t">
+          <a:bodyPr wrap="square" lIns="36576" tIns="36576" rIns="36576" bIns="36576" anchor="t">
             <a:spAutoFit/>
           </a:bodyPr>
           <a:lstStyle/>
@@ -25161,6 +25072,7 @@
           <a:lstStyle/>
           <a:p>
             <a:pPr algn="ctr"/>
+            <a:endParaRPr/>
           </a:p>
         </p:txBody>
       </p:sp>
@@ -25181,7 +25093,7 @@
           <a:noFill/>
         </p:spPr>
         <p:txBody>
-          <a:bodyPr wrap="square" lIns="36576" rIns="36576" tIns="36576" bIns="36576" anchor="ctr">
+          <a:bodyPr wrap="square" lIns="36576" tIns="36576" rIns="36576" bIns="36576" anchor="ctr">
             <a:spAutoFit/>
           </a:bodyPr>
           <a:lstStyle/>
@@ -25248,6 +25160,7 @@
           <a:lstStyle/>
           <a:p>
             <a:pPr algn="ctr"/>
+            <a:endParaRPr/>
           </a:p>
         </p:txBody>
       </p:sp>
@@ -25293,6 +25206,7 @@
           <a:lstStyle/>
           <a:p>
             <a:pPr algn="ctr"/>
+            <a:endParaRPr/>
           </a:p>
         </p:txBody>
       </p:sp>
@@ -25313,7 +25227,7 @@
           <a:noFill/>
         </p:spPr>
         <p:txBody>
-          <a:bodyPr wrap="square" lIns="36576" rIns="36576" tIns="36576" bIns="36576" anchor="ctr">
+          <a:bodyPr wrap="square" lIns="36576" tIns="36576" rIns="36576" bIns="36576" anchor="ctr">
             <a:spAutoFit/>
           </a:bodyPr>
           <a:lstStyle/>
@@ -25380,6 +25294,7 @@
           <a:lstStyle/>
           <a:p>
             <a:pPr algn="ctr"/>
+            <a:endParaRPr/>
           </a:p>
         </p:txBody>
       </p:sp>
@@ -25425,6 +25340,7 @@
           <a:lstStyle/>
           <a:p>
             <a:pPr algn="ctr"/>
+            <a:endParaRPr/>
           </a:p>
         </p:txBody>
       </p:sp>
@@ -25445,7 +25361,7 @@
           <a:noFill/>
         </p:spPr>
         <p:txBody>
-          <a:bodyPr wrap="square" lIns="36576" rIns="36576" tIns="36576" bIns="36576" anchor="ctr">
+          <a:bodyPr wrap="square" lIns="36576" tIns="36576" rIns="36576" bIns="36576" anchor="ctr">
             <a:spAutoFit/>
           </a:bodyPr>
           <a:lstStyle/>
@@ -25512,6 +25428,7 @@
           <a:lstStyle/>
           <a:p>
             <a:pPr algn="ctr"/>
+            <a:endParaRPr/>
           </a:p>
         </p:txBody>
       </p:sp>
@@ -25557,6 +25474,7 @@
           <a:lstStyle/>
           <a:p>
             <a:pPr algn="ctr"/>
+            <a:endParaRPr/>
           </a:p>
         </p:txBody>
       </p:sp>
@@ -25577,7 +25495,7 @@
           <a:noFill/>
         </p:spPr>
         <p:txBody>
-          <a:bodyPr wrap="square" lIns="36576" rIns="36576" tIns="36576" bIns="36576" anchor="ctr">
+          <a:bodyPr wrap="square" lIns="36576" tIns="36576" rIns="36576" bIns="36576" anchor="ctr">
             <a:spAutoFit/>
           </a:bodyPr>
           <a:lstStyle/>
@@ -25644,6 +25562,7 @@
           <a:lstStyle/>
           <a:p>
             <a:pPr algn="ctr"/>
+            <a:endParaRPr/>
           </a:p>
         </p:txBody>
       </p:sp>
@@ -25689,6 +25608,7 @@
           <a:lstStyle/>
           <a:p>
             <a:pPr algn="ctr"/>
+            <a:endParaRPr/>
           </a:p>
         </p:txBody>
       </p:sp>
@@ -25709,7 +25629,7 @@
           <a:noFill/>
         </p:spPr>
         <p:txBody>
-          <a:bodyPr wrap="square" lIns="36576" rIns="36576" tIns="36576" bIns="36576" anchor="ctr">
+          <a:bodyPr wrap="square" lIns="36576" tIns="36576" rIns="36576" bIns="36576" anchor="ctr">
             <a:spAutoFit/>
           </a:bodyPr>
           <a:lstStyle/>
@@ -25776,6 +25696,7 @@
           <a:lstStyle/>
           <a:p>
             <a:pPr algn="ctr"/>
+            <a:endParaRPr/>
           </a:p>
         </p:txBody>
       </p:sp>
@@ -25821,6 +25742,7 @@
           <a:lstStyle/>
           <a:p>
             <a:pPr algn="ctr"/>
+            <a:endParaRPr/>
           </a:p>
         </p:txBody>
       </p:sp>
@@ -25841,7 +25763,7 @@
           <a:noFill/>
         </p:spPr>
         <p:txBody>
-          <a:bodyPr wrap="square" lIns="36576" rIns="36576" tIns="36576" bIns="36576" anchor="ctr">
+          <a:bodyPr wrap="square" lIns="36576" tIns="36576" rIns="36576" bIns="36576" anchor="ctr">
             <a:spAutoFit/>
           </a:bodyPr>
           <a:lstStyle/>
@@ -25883,7 +25805,7 @@
           <a:noFill/>
         </p:spPr>
         <p:txBody>
-          <a:bodyPr wrap="square" lIns="36576" rIns="36576" tIns="36576" bIns="36576" anchor="t">
+          <a:bodyPr wrap="square" lIns="36576" tIns="36576" rIns="36576" bIns="36576" anchor="t">
             <a:spAutoFit/>
           </a:bodyPr>
           <a:lstStyle/>
@@ -25925,7 +25847,7 @@
           <a:noFill/>
         </p:spPr>
         <p:txBody>
-          <a:bodyPr wrap="square" lIns="36576" rIns="36576" tIns="36576" bIns="36576" anchor="t">
+          <a:bodyPr wrap="square" lIns="36576" tIns="36576" rIns="36576" bIns="36576" anchor="t">
             <a:spAutoFit/>
           </a:bodyPr>
           <a:lstStyle/>
@@ -25959,7 +25881,7 @@
 </file>
 
 <file path=ppt/slides/slide7.xml><?xml version="1.0" encoding="utf-8"?>
-<p:sld xmlns:a="http://schemas.openxmlformats.org/drawingml/2006/main" xmlns:p="http://schemas.openxmlformats.org/presentationml/2006/main" xmlns:r="http://schemas.openxmlformats.org/officeDocument/2006/relationships">
+<p:sld xmlns:a="http://schemas.openxmlformats.org/drawingml/2006/main" xmlns:r="http://schemas.openxmlformats.org/officeDocument/2006/relationships" xmlns:p="http://schemas.openxmlformats.org/presentationml/2006/main">
   <p:cSld>
     <p:spTree>
       <p:nvGrpSpPr>
@@ -25967,7 +25889,14 @@
         <p:cNvGrpSpPr/>
         <p:nvPr/>
       </p:nvGrpSpPr>
-      <p:grpSpPr/>
+      <p:grpSpPr>
+        <a:xfrm>
+          <a:off x="0" y="0"/>
+          <a:ext cx="0" cy="0"/>
+          <a:chOff x="0" y="0"/>
+          <a:chExt cx="0" cy="0"/>
+        </a:xfrm>
+      </p:grpSpPr>
       <p:sp>
         <p:nvSpPr>
           <p:cNvPr id="2" name="TextBox 1"/>
@@ -25985,7 +25914,7 @@
           <a:noFill/>
         </p:spPr>
         <p:txBody>
-          <a:bodyPr wrap="square" lIns="36576" rIns="36576" tIns="36576" bIns="36576" anchor="ctr">
+          <a:bodyPr wrap="square" lIns="36576" tIns="36576" rIns="36576" bIns="36576" anchor="ctr">
             <a:spAutoFit/>
           </a:bodyPr>
           <a:lstStyle/>
@@ -26052,6 +25981,7 @@
           <a:lstStyle/>
           <a:p>
             <a:pPr algn="ctr"/>
+            <a:endParaRPr/>
           </a:p>
         </p:txBody>
       </p:sp>
@@ -26072,7 +26002,7 @@
           <a:noFill/>
         </p:spPr>
         <p:txBody>
-          <a:bodyPr wrap="square" lIns="36576" rIns="36576" tIns="36576" bIns="36576" anchor="t">
+          <a:bodyPr wrap="square" lIns="36576" tIns="36576" rIns="36576" bIns="36576" anchor="t">
             <a:spAutoFit/>
           </a:bodyPr>
           <a:lstStyle/>
@@ -26114,7 +26044,7 @@
           <a:noFill/>
         </p:spPr>
         <p:txBody>
-          <a:bodyPr wrap="square" lIns="36576" rIns="36576" tIns="36576" bIns="36576" anchor="t">
+          <a:bodyPr wrap="square" lIns="36576" tIns="36576" rIns="36576" bIns="36576" anchor="t">
             <a:spAutoFit/>
           </a:bodyPr>
           <a:lstStyle/>
@@ -26181,6 +26111,7 @@
           <a:lstStyle/>
           <a:p>
             <a:pPr algn="ctr"/>
+            <a:endParaRPr/>
           </a:p>
         </p:txBody>
       </p:sp>
@@ -26201,7 +26132,7 @@
           <a:noFill/>
         </p:spPr>
         <p:txBody>
-          <a:bodyPr wrap="square" lIns="36576" rIns="36576" tIns="36576" bIns="36576" anchor="t">
+          <a:bodyPr wrap="square" lIns="36576" tIns="36576" rIns="36576" bIns="36576" anchor="t">
             <a:spAutoFit/>
           </a:bodyPr>
           <a:lstStyle/>
@@ -26243,7 +26174,7 @@
           <a:noFill/>
         </p:spPr>
         <p:txBody>
-          <a:bodyPr wrap="square" lIns="36576" rIns="36576" tIns="36576" bIns="36576" anchor="t">
+          <a:bodyPr wrap="square" lIns="36576" tIns="36576" rIns="36576" bIns="36576" anchor="t">
             <a:spAutoFit/>
           </a:bodyPr>
           <a:lstStyle/>
@@ -26285,7 +26216,7 @@
           <a:noFill/>
         </p:spPr>
         <p:txBody>
-          <a:bodyPr wrap="square" lIns="36576" rIns="36576" tIns="36576" bIns="36576" anchor="t">
+          <a:bodyPr wrap="square" lIns="36576" tIns="36576" rIns="36576" bIns="36576" anchor="t">
             <a:spAutoFit/>
           </a:bodyPr>
           <a:lstStyle/>
@@ -26319,7 +26250,7 @@
 </file>
 
 <file path=ppt/slides/slide8.xml><?xml version="1.0" encoding="utf-8"?>
-<p:sld xmlns:a="http://schemas.openxmlformats.org/drawingml/2006/main" xmlns:p="http://schemas.openxmlformats.org/presentationml/2006/main" xmlns:r="http://schemas.openxmlformats.org/officeDocument/2006/relationships">
+<p:sld xmlns:a="http://schemas.openxmlformats.org/drawingml/2006/main" xmlns:r="http://schemas.openxmlformats.org/officeDocument/2006/relationships" xmlns:p="http://schemas.openxmlformats.org/presentationml/2006/main">
   <p:cSld>
     <p:spTree>
       <p:nvGrpSpPr>
@@ -26327,7 +26258,14 @@
         <p:cNvGrpSpPr/>
         <p:nvPr/>
       </p:nvGrpSpPr>
-      <p:grpSpPr/>
+      <p:grpSpPr>
+        <a:xfrm>
+          <a:off x="0" y="0"/>
+          <a:ext cx="0" cy="0"/>
+          <a:chOff x="0" y="0"/>
+          <a:chExt cx="0" cy="0"/>
+        </a:xfrm>
+      </p:grpSpPr>
       <p:sp>
         <p:nvSpPr>
           <p:cNvPr id="2" name="TextBox 1"/>
@@ -26345,7 +26283,7 @@
           <a:noFill/>
         </p:spPr>
         <p:txBody>
-          <a:bodyPr wrap="square" lIns="36576" rIns="36576" tIns="36576" bIns="36576" anchor="ctr">
+          <a:bodyPr wrap="square" lIns="36576" tIns="36576" rIns="36576" bIns="36576" anchor="ctr">
             <a:spAutoFit/>
           </a:bodyPr>
           <a:lstStyle/>
@@ -26412,6 +26350,7 @@
           <a:lstStyle/>
           <a:p>
             <a:pPr algn="ctr"/>
+            <a:endParaRPr/>
           </a:p>
         </p:txBody>
       </p:sp>
@@ -26432,7 +26371,7 @@
           <a:noFill/>
         </p:spPr>
         <p:txBody>
-          <a:bodyPr wrap="square" lIns="36576" rIns="36576" tIns="36576" bIns="36576" anchor="t">
+          <a:bodyPr wrap="square" lIns="36576" tIns="36576" rIns="36576" bIns="36576" anchor="t">
             <a:spAutoFit/>
           </a:bodyPr>
           <a:lstStyle/>
@@ -26474,7 +26413,7 @@
           <a:noFill/>
         </p:spPr>
         <p:txBody>
-          <a:bodyPr wrap="square" lIns="36576" rIns="36576" tIns="36576" bIns="36576" anchor="ctr">
+          <a:bodyPr wrap="square" lIns="36576" tIns="36576" rIns="36576" bIns="36576" anchor="ctr">
             <a:spAutoFit/>
           </a:bodyPr>
           <a:lstStyle/>
@@ -26541,6 +26480,7 @@
           <a:lstStyle/>
           <a:p>
             <a:pPr algn="ctr"/>
+            <a:endParaRPr/>
           </a:p>
         </p:txBody>
       </p:sp>
@@ -26561,7 +26501,7 @@
           <a:noFill/>
         </p:spPr>
         <p:txBody>
-          <a:bodyPr wrap="square" lIns="36576" rIns="36576" tIns="36576" bIns="36576" anchor="t">
+          <a:bodyPr wrap="square" lIns="36576" tIns="36576" rIns="36576" bIns="36576" anchor="t">
             <a:spAutoFit/>
           </a:bodyPr>
           <a:lstStyle/>
@@ -26603,7 +26543,7 @@
           <a:noFill/>
         </p:spPr>
         <p:txBody>
-          <a:bodyPr wrap="square" lIns="36576" rIns="36576" tIns="36576" bIns="36576" anchor="ctr">
+          <a:bodyPr wrap="square" lIns="36576" tIns="36576" rIns="36576" bIns="36576" anchor="ctr">
             <a:spAutoFit/>
           </a:bodyPr>
           <a:lstStyle/>
@@ -26670,6 +26610,7 @@
           <a:lstStyle/>
           <a:p>
             <a:pPr algn="ctr"/>
+            <a:endParaRPr/>
           </a:p>
         </p:txBody>
       </p:sp>
@@ -26690,7 +26631,7 @@
           <a:noFill/>
         </p:spPr>
         <p:txBody>
-          <a:bodyPr wrap="square" lIns="36576" rIns="36576" tIns="36576" bIns="36576" anchor="t">
+          <a:bodyPr wrap="square" lIns="36576" tIns="36576" rIns="36576" bIns="36576" anchor="t">
             <a:spAutoFit/>
           </a:bodyPr>
           <a:lstStyle/>
@@ -26732,7 +26673,7 @@
           <a:noFill/>
         </p:spPr>
         <p:txBody>
-          <a:bodyPr wrap="square" lIns="36576" rIns="36576" tIns="36576" bIns="36576" anchor="ctr">
+          <a:bodyPr wrap="square" lIns="36576" tIns="36576" rIns="36576" bIns="36576" anchor="ctr">
             <a:spAutoFit/>
           </a:bodyPr>
           <a:lstStyle/>
@@ -26766,7 +26707,7 @@
 </file>
 
 <file path=ppt/slides/slide9.xml><?xml version="1.0" encoding="utf-8"?>
-<p:sld xmlns:a="http://schemas.openxmlformats.org/drawingml/2006/main" xmlns:p="http://schemas.openxmlformats.org/presentationml/2006/main" xmlns:r="http://schemas.openxmlformats.org/officeDocument/2006/relationships">
+<p:sld xmlns:a="http://schemas.openxmlformats.org/drawingml/2006/main" xmlns:r="http://schemas.openxmlformats.org/officeDocument/2006/relationships" xmlns:p="http://schemas.openxmlformats.org/presentationml/2006/main">
   <p:cSld>
     <p:spTree>
       <p:nvGrpSpPr>
@@ -26774,7 +26715,14 @@
         <p:cNvGrpSpPr/>
         <p:nvPr/>
       </p:nvGrpSpPr>
-      <p:grpSpPr/>
+      <p:grpSpPr>
+        <a:xfrm>
+          <a:off x="0" y="0"/>
+          <a:ext cx="0" cy="0"/>
+          <a:chOff x="0" y="0"/>
+          <a:chExt cx="0" cy="0"/>
+        </a:xfrm>
+      </p:grpSpPr>
       <p:sp>
         <p:nvSpPr>
           <p:cNvPr id="2" name="Rectangle 1"/>
@@ -26815,6 +26763,7 @@
           <a:lstStyle/>
           <a:p>
             <a:pPr algn="ctr"/>
+            <a:endParaRPr/>
           </a:p>
         </p:txBody>
       </p:sp>
@@ -26835,7 +26784,7 @@
           <a:noFill/>
         </p:spPr>
         <p:txBody>
-          <a:bodyPr wrap="square" lIns="36576" rIns="36576" tIns="36576" bIns="36576" anchor="t">
+          <a:bodyPr wrap="square" lIns="36576" tIns="36576" rIns="36576" bIns="36576" anchor="t">
             <a:spAutoFit/>
           </a:bodyPr>
           <a:lstStyle/>
@@ -26877,7 +26826,7 @@
           <a:noFill/>
         </p:spPr>
         <p:txBody>
-          <a:bodyPr wrap="square" lIns="36576" rIns="36576" tIns="36576" bIns="36576" anchor="ctr">
+          <a:bodyPr wrap="square" lIns="36576" tIns="36576" rIns="36576" bIns="36576" anchor="ctr">
             <a:spAutoFit/>
           </a:bodyPr>
           <a:lstStyle/>
@@ -26919,7 +26868,7 @@
           <a:noFill/>
         </p:spPr>
         <p:txBody>
-          <a:bodyPr wrap="square" lIns="36576" rIns="36576" tIns="36576" bIns="36576" anchor="ctr">
+          <a:bodyPr wrap="square" lIns="36576" tIns="36576" rIns="36576" bIns="36576" anchor="ctr">
             <a:spAutoFit/>
           </a:bodyPr>
           <a:lstStyle/>
@@ -26961,7 +26910,7 @@
           <a:noFill/>
         </p:spPr>
         <p:txBody>
-          <a:bodyPr wrap="square" lIns="36576" rIns="36576" tIns="36576" bIns="36576" anchor="ctr">
+          <a:bodyPr wrap="square" lIns="36576" tIns="36576" rIns="36576" bIns="36576" anchor="ctr">
             <a:spAutoFit/>
           </a:bodyPr>
           <a:lstStyle/>
@@ -27003,7 +26952,7 @@
           <a:noFill/>
         </p:spPr>
         <p:txBody>
-          <a:bodyPr wrap="square" lIns="36576" rIns="36576" tIns="36576" bIns="36576" anchor="ctr">
+          <a:bodyPr wrap="square" lIns="36576" tIns="36576" rIns="36576" bIns="36576" anchor="ctr">
             <a:spAutoFit/>
           </a:bodyPr>
           <a:lstStyle/>
@@ -27045,7 +26994,7 @@
           <a:noFill/>
         </p:spPr>
         <p:txBody>
-          <a:bodyPr wrap="square" lIns="36576" rIns="36576" tIns="36576" bIns="36576" anchor="ctr">
+          <a:bodyPr wrap="square" lIns="36576" tIns="36576" rIns="36576" bIns="36576" anchor="ctr">
             <a:spAutoFit/>
           </a:bodyPr>
           <a:lstStyle/>
@@ -27087,7 +27036,7 @@
           <a:noFill/>
         </p:spPr>
         <p:txBody>
-          <a:bodyPr wrap="square" lIns="36576" rIns="36576" tIns="36576" bIns="36576" anchor="ctr">
+          <a:bodyPr wrap="square" lIns="36576" tIns="36576" rIns="36576" bIns="36576" anchor="ctr">
             <a:spAutoFit/>
           </a:bodyPr>
           <a:lstStyle/>
